--- a/Working Documents/03.26_Committee Meeting.pptx
+++ b/Working Documents/03.26_Committee Meeting.pptx
@@ -15,9 +15,9 @@
     <p:sldId id="329" r:id="rId6"/>
     <p:sldId id="330" r:id="rId7"/>
     <p:sldId id="331" r:id="rId8"/>
-    <p:sldId id="305" r:id="rId9"/>
-    <p:sldId id="298" r:id="rId10"/>
-    <p:sldId id="332" r:id="rId11"/>
+    <p:sldId id="332" r:id="rId9"/>
+    <p:sldId id="305" r:id="rId10"/>
+    <p:sldId id="298" r:id="rId11"/>
     <p:sldId id="333" r:id="rId12"/>
     <p:sldId id="334" r:id="rId13"/>
     <p:sldId id="335" r:id="rId14"/>
@@ -2440,7 +2440,7 @@
           <a:p>
             <a:fld id="{A0428C8E-7BAD-4C37-9F0B-8CBDB03D4496}" type="datetimeFigureOut">
               <a:rPr lang="en-CA" smtClean="0"/>
-              <a:t>2026-03-10</a:t>
+              <a:t>27-Mar-2026</a:t>
             </a:fld>
             <a:endParaRPr lang="en-CA"/>
           </a:p>
@@ -3492,7 +3492,7 @@
           <a:p>
             <a:fld id="{4192F68B-5CDA-45F8-8FC6-8CC31496F2C0}" type="datetime1">
               <a:rPr lang="en-CA" smtClean="0"/>
-              <a:t>2026-03-10</a:t>
+              <a:t>27-Mar-2026</a:t>
             </a:fld>
             <a:endParaRPr lang="en-CA"/>
           </a:p>
@@ -3700,7 +3700,7 @@
           <a:p>
             <a:fld id="{723E7550-8411-4E2E-A2AF-8A063A660948}" type="datetime1">
               <a:rPr lang="en-CA" smtClean="0"/>
-              <a:t>2026-03-10</a:t>
+              <a:t>27-Mar-2026</a:t>
             </a:fld>
             <a:endParaRPr lang="en-CA"/>
           </a:p>
@@ -3958,7 +3958,7 @@
           <a:p>
             <a:fld id="{6161E27D-A925-4B3D-83F5-ECDB550EC939}" type="datetime1">
               <a:rPr lang="en-CA" smtClean="0"/>
-              <a:t>2026-03-10</a:t>
+              <a:t>27-Mar-2026</a:t>
             </a:fld>
             <a:endParaRPr lang="en-CA"/>
           </a:p>
@@ -4128,7 +4128,7 @@
           <a:p>
             <a:fld id="{BBE08C00-40B8-4EDA-BCF9-010BAB3E9B10}" type="datetime1">
               <a:rPr lang="en-CA" smtClean="0"/>
-              <a:t>2026-03-10</a:t>
+              <a:t>27-Mar-2026</a:t>
             </a:fld>
             <a:endParaRPr lang="en-CA"/>
           </a:p>
@@ -4479,7 +4479,7 @@
           <a:p>
             <a:fld id="{575BD93C-08CC-43D5-8845-C649925EFB70}" type="datetime1">
               <a:rPr lang="en-CA" smtClean="0"/>
-              <a:t>2026-03-10</a:t>
+              <a:t>27-Mar-2026</a:t>
             </a:fld>
             <a:endParaRPr lang="en-CA"/>
           </a:p>
@@ -4754,7 +4754,7 @@
           <a:p>
             <a:fld id="{C2DD09B4-FF6B-44BE-9FB1-59E724526725}" type="datetime1">
               <a:rPr lang="en-CA" smtClean="0"/>
-              <a:t>2026-03-10</a:t>
+              <a:t>27-Mar-2026</a:t>
             </a:fld>
             <a:endParaRPr lang="en-CA"/>
           </a:p>
@@ -5133,7 +5133,7 @@
           <a:p>
             <a:fld id="{1C8EDB9F-AB4A-4644-B1B1-ADD488636EFD}" type="datetime1">
               <a:rPr lang="en-CA" smtClean="0"/>
-              <a:t>2026-03-10</a:t>
+              <a:t>27-Mar-2026</a:t>
             </a:fld>
             <a:endParaRPr lang="en-CA"/>
           </a:p>
@@ -5251,7 +5251,7 @@
           <a:p>
             <a:fld id="{2C069573-12B9-4DA2-AE6A-3DF248409BF9}" type="datetime1">
               <a:rPr lang="en-CA" smtClean="0"/>
-              <a:t>2026-03-10</a:t>
+              <a:t>27-Mar-2026</a:t>
             </a:fld>
             <a:endParaRPr lang="en-CA"/>
           </a:p>
@@ -5438,7 +5438,7 @@
           <a:p>
             <a:fld id="{B010FC2F-8CC7-4537-A6D2-E86E24CBE470}" type="datetime1">
               <a:rPr lang="en-CA" smtClean="0"/>
-              <a:t>2026-03-10</a:t>
+              <a:t>27-Mar-2026</a:t>
             </a:fld>
             <a:endParaRPr lang="en-CA"/>
           </a:p>
@@ -5794,7 +5794,7 @@
           <a:p>
             <a:fld id="{A20AF02B-F510-4E59-9F48-4A2B2B1C7CCC}" type="datetime1">
               <a:rPr lang="en-CA" smtClean="0"/>
-              <a:t>2026-03-10</a:t>
+              <a:t>27-Mar-2026</a:t>
             </a:fld>
             <a:endParaRPr lang="en-CA"/>
           </a:p>
@@ -6173,7 +6173,7 @@
           <a:p>
             <a:fld id="{1A796962-FC1B-4478-9758-77DD5C261549}" type="datetime1">
               <a:rPr lang="en-CA" smtClean="0"/>
-              <a:t>2026-03-10</a:t>
+              <a:t>27-Mar-2026</a:t>
             </a:fld>
             <a:endParaRPr lang="en-CA"/>
           </a:p>
@@ -6476,7 +6476,7 @@
           <a:p>
             <a:fld id="{35F51464-522D-45AA-8684-534AFC039EDB}" type="datetime1">
               <a:rPr lang="en-CA" smtClean="0"/>
-              <a:t>2026-03-10</a:t>
+              <a:t>27-Mar-2026</a:t>
             </a:fld>
             <a:endParaRPr lang="en-CA"/>
           </a:p>
@@ -7148,7 +7148,7 @@
           <a:p>
             <a:r>
               <a:rPr lang="en-CA" dirty="0"/>
-              <a:t>March XX, 2026</a:t>
+              <a:t>March 30, 2026</a:t>
             </a:r>
           </a:p>
         </p:txBody>
@@ -7395,7 +7395,7 @@
           <p:cNvPr id="2" name="Title 1">
             <a:extLst>
               <a:ext uri="{FF2B5EF4-FFF2-40B4-BE49-F238E27FC236}">
-                <a16:creationId xmlns:a16="http://schemas.microsoft.com/office/drawing/2014/main" id="{B5F71BD1-4E07-89AD-E95B-E2FCF3F3B4BD}"/>
+                <a16:creationId xmlns:a16="http://schemas.microsoft.com/office/drawing/2014/main" id="{B17FF005-D8FC-3965-09EF-C0002C95370B}"/>
               </a:ext>
             </a:extLst>
           </p:cNvPr>
@@ -7412,164 +7412,47 @@
           <a:lstStyle/>
           <a:p>
             <a:r>
-              <a:rPr lang="en-US" dirty="0"/>
-              <a:t>Experimental Set-Up: </a:t>
-            </a:r>
-            <a:r>
-              <a:rPr lang="en-US" sz="4000" dirty="0"/>
-              <a:t>Minimizing Stochastic Uncertainty </a:t>
-            </a:r>
-            <a:endParaRPr lang="en-CA" dirty="0"/>
-          </a:p>
-        </p:txBody>
-      </p:sp>
-      <p:sp>
-        <p:nvSpPr>
-          <p:cNvPr id="3" name="Content Placeholder 2">
+              <a:rPr lang="en-CA" dirty="0"/>
+              <a:t>Sweeping Co-60</a:t>
+            </a:r>
+          </a:p>
+        </p:txBody>
+      </p:sp>
+      <p:pic>
+        <p:nvPicPr>
+          <p:cNvPr id="6" name="Content Placeholder 5">
             <a:extLst>
               <a:ext uri="{FF2B5EF4-FFF2-40B4-BE49-F238E27FC236}">
-                <a16:creationId xmlns:a16="http://schemas.microsoft.com/office/drawing/2014/main" id="{97401A52-1201-D79F-3910-BF7CA817185E}"/>
+                <a16:creationId xmlns:a16="http://schemas.microsoft.com/office/drawing/2014/main" id="{67ED8643-5835-2426-FCF3-559F7D4DDD68}"/>
               </a:ext>
             </a:extLst>
           </p:cNvPr>
-          <p:cNvSpPr>
-            <a:spLocks noGrp="1"/>
-          </p:cNvSpPr>
+          <p:cNvPicPr>
+            <a:picLocks noGrp="1" noChangeAspect="1"/>
+          </p:cNvPicPr>
           <p:nvPr>
             <p:ph idx="1"/>
           </p:nvPr>
-        </p:nvSpPr>
-        <p:spPr/>
-        <p:txBody>
-          <a:bodyPr/>
-          <a:lstStyle/>
-          <a:p>
-            <a:pPr marL="0" indent="0">
-              <a:buNone/>
-            </a:pPr>
-            <a:r>
-              <a:rPr lang="en-US" dirty="0"/>
-              <a:t>Two sources of stochastic uncertainty:</a:t>
-            </a:r>
-            <a:endParaRPr lang="en-CA" dirty="0"/>
-          </a:p>
-          <a:p>
-            <a:pPr marL="457200" indent="-457200">
-              <a:buFont typeface="+mj-lt"/>
-              <a:buAutoNum type="arabicPeriod"/>
-            </a:pPr>
-            <a:r>
-              <a:rPr lang="en-CA" dirty="0"/>
-              <a:t>4D Dose Simulations</a:t>
-            </a:r>
-          </a:p>
-          <a:p>
-            <a:pPr marL="749808" lvl="1" indent="-457200">
-              <a:buFont typeface="+mj-lt"/>
-              <a:buAutoNum type="arabicPeriod"/>
-            </a:pPr>
-            <a:r>
-              <a:rPr lang="en-CA" dirty="0"/>
-              <a:t>Number of particles simulated</a:t>
-            </a:r>
-          </a:p>
-          <a:p>
-            <a:pPr marL="932688" lvl="2" indent="-457200"/>
-            <a:r>
-              <a:rPr lang="en-CA" dirty="0"/>
-              <a:t>↑ the number of particles simulated = ↓ stochastic uncertainty = </a:t>
-            </a:r>
-            <a:r>
-              <a:rPr lang="en-CA" b="1" dirty="0"/>
-              <a:t>↑ simulation time </a:t>
-            </a:r>
-          </a:p>
-          <a:p>
-            <a:pPr marL="932688" lvl="2" indent="-457200"/>
-            <a:r>
-              <a:rPr lang="en-CA" b="1" dirty="0"/>
-              <a:t>Solution: </a:t>
-            </a:r>
-            <a:r>
-              <a:rPr lang="en-CA" dirty="0"/>
-              <a:t> Run each sweep of the Co-60 head as its own simulation with 2E10 ???? Particles. Each sweep takes ~60 mins to calculate </a:t>
-            </a:r>
-          </a:p>
-          <a:p>
-            <a:pPr marL="749808" lvl="1" indent="-457200">
-              <a:buFont typeface="+mj-lt"/>
-              <a:buAutoNum type="arabicPeriod"/>
-            </a:pPr>
-            <a:r>
-              <a:rPr lang="en-CA" dirty="0"/>
-              <a:t>Size of time bin used to process the data</a:t>
-            </a:r>
-          </a:p>
-          <a:p>
-            <a:pPr marL="932688" lvl="2" indent="-457200"/>
-            <a:r>
-              <a:rPr lang="en-CA" dirty="0"/>
-              <a:t>↑ time bin size = ↓ stochastic uncertainty = </a:t>
-            </a:r>
-            <a:r>
-              <a:rPr lang="en-CA" b="1" dirty="0"/>
-              <a:t>↓ time resolution = ↑ positional averaging </a:t>
-            </a:r>
-          </a:p>
-          <a:p>
-            <a:pPr marL="932688" lvl="2" indent="-457200"/>
-            <a:r>
-              <a:rPr lang="en-CA" b="1" dirty="0"/>
-              <a:t>Solution: </a:t>
-            </a:r>
-            <a:r>
-              <a:rPr lang="en-CA" dirty="0"/>
-              <a:t>Determine the time bin which minimizes ?????????</a:t>
-            </a:r>
-            <a:endParaRPr lang="en-CA" b="1" dirty="0"/>
-          </a:p>
-          <a:p>
-            <a:pPr marL="457200" indent="-457200">
-              <a:buFont typeface="+mj-lt"/>
-              <a:buAutoNum type="arabicPeriod"/>
-            </a:pPr>
-            <a:r>
-              <a:rPr lang="en-CA" dirty="0"/>
-              <a:t>Number of BVs Simulated</a:t>
-            </a:r>
-            <a:endParaRPr lang="en-US" dirty="0"/>
-          </a:p>
-          <a:p>
-            <a:pPr marL="932688" lvl="2" indent="-457200"/>
-            <a:r>
-              <a:rPr lang="en-CA" dirty="0"/>
-              <a:t>↑ the number of particles simulated = ↓ stochastic uncertainty = </a:t>
-            </a:r>
-            <a:r>
-              <a:rPr lang="en-CA" b="1" dirty="0"/>
-              <a:t>↑ simulation time </a:t>
-            </a:r>
-          </a:p>
-          <a:p>
-            <a:pPr marL="932688" lvl="2" indent="-457200"/>
-            <a:r>
-              <a:rPr lang="en-CA" b="1" dirty="0"/>
-              <a:t>Solution: </a:t>
-            </a:r>
-            <a:r>
-              <a:rPr lang="en-CA" dirty="0"/>
-              <a:t>Characterize the mean and std of the dose to the BVs as a function of BV number</a:t>
-            </a:r>
-            <a:endParaRPr lang="en-CA" b="1" dirty="0"/>
-          </a:p>
-        </p:txBody>
-      </p:sp>
+        </p:nvPicPr>
+        <p:blipFill>
+          <a:blip r:embed="rId2"/>
+          <a:stretch>
+            <a:fillRect/>
+          </a:stretch>
+        </p:blipFill>
+        <p:spPr>
+          <a:xfrm>
+            <a:off x="1209040" y="1825778"/>
+            <a:ext cx="4704080" cy="3983195"/>
+          </a:xfrm>
+        </p:spPr>
+      </p:pic>
       <p:sp>
         <p:nvSpPr>
           <p:cNvPr id="4" name="Slide Number Placeholder 3">
             <a:extLst>
               <a:ext uri="{FF2B5EF4-FFF2-40B4-BE49-F238E27FC236}">
-                <a16:creationId xmlns:a16="http://schemas.microsoft.com/office/drawing/2014/main" id="{44F37BDC-2374-9C9A-6430-E0C96632AD0D}"/>
+                <a16:creationId xmlns:a16="http://schemas.microsoft.com/office/drawing/2014/main" id="{878AFD76-019F-9BFE-F23A-7BC798F1602C}"/>
               </a:ext>
             </a:extLst>
           </p:cNvPr>
@@ -7593,10 +7476,115 @@
           </a:p>
         </p:txBody>
       </p:sp>
+      <p:sp>
+        <p:nvSpPr>
+          <p:cNvPr id="8" name="TextBox 7">
+            <a:extLst>
+              <a:ext uri="{FF2B5EF4-FFF2-40B4-BE49-F238E27FC236}">
+                <a16:creationId xmlns:a16="http://schemas.microsoft.com/office/drawing/2014/main" id="{56F293EE-6355-47C9-B385-5139240142A0}"/>
+              </a:ext>
+            </a:extLst>
+          </p:cNvPr>
+          <p:cNvSpPr txBox="1"/>
+          <p:nvPr/>
+        </p:nvSpPr>
+        <p:spPr>
+          <a:xfrm>
+            <a:off x="0" y="6411514"/>
+            <a:ext cx="10763250" cy="461665"/>
+          </a:xfrm>
+          <a:prstGeom prst="rect">
+            <a:avLst/>
+          </a:prstGeom>
+          <a:noFill/>
+        </p:spPr>
+        <p:txBody>
+          <a:bodyPr wrap="square">
+            <a:spAutoFit/>
+          </a:bodyPr>
+          <a:lstStyle/>
+          <a:p>
+            <a:r>
+              <a:rPr lang="en-CA" sz="1200" dirty="0"/>
+              <a:t>S. Hussein and E. </a:t>
+            </a:r>
+            <a:r>
+              <a:rPr lang="en-CA" sz="1200" dirty="0" err="1"/>
+              <a:t>el</a:t>
+            </a:r>
+            <a:r>
+              <a:rPr lang="en-CA" sz="1200" dirty="0"/>
+              <a:t>-Khatib, “Total body irradiation with a sweeping 60Cobalt beam,” Int J </a:t>
+            </a:r>
+            <a:r>
+              <a:rPr lang="en-CA" sz="1200" dirty="0" err="1"/>
+              <a:t>Radiat</a:t>
+            </a:r>
+            <a:r>
+              <a:rPr lang="en-CA" sz="1200" dirty="0"/>
+              <a:t> Oncol Biol Phys, vol. 33, no. 2, pp. 493–497, Sept. 1995, </a:t>
+            </a:r>
+            <a:r>
+              <a:rPr lang="en-CA" sz="1200" dirty="0" err="1"/>
+              <a:t>doi</a:t>
+            </a:r>
+            <a:r>
+              <a:rPr lang="en-CA" sz="1200" dirty="0"/>
+              <a:t>: </a:t>
+            </a:r>
+            <a:r>
+              <a:rPr lang="en-CA" sz="1200" dirty="0">
+                <a:hlinkClick r:id="rId3">
+                  <a:extLst>
+                    <a:ext uri="{A12FA001-AC4F-418D-AE19-62706E023703}">
+                      <ahyp:hlinkClr xmlns:ahyp="http://schemas.microsoft.com/office/drawing/2018/hyperlinkcolor" val="tx"/>
+                    </a:ext>
+                  </a:extLst>
+                </a:hlinkClick>
+              </a:rPr>
+              <a:t>10.1016/0360-3016(95)00164-T</a:t>
+            </a:r>
+            <a:r>
+              <a:rPr lang="en-CA" sz="1200" dirty="0"/>
+              <a:t>.</a:t>
+            </a:r>
+          </a:p>
+        </p:txBody>
+      </p:sp>
+      <p:pic>
+        <p:nvPicPr>
+          <p:cNvPr id="10" name="Picture 9">
+            <a:extLst>
+              <a:ext uri="{FF2B5EF4-FFF2-40B4-BE49-F238E27FC236}">
+                <a16:creationId xmlns:a16="http://schemas.microsoft.com/office/drawing/2014/main" id="{E1C2F8C3-687B-3CA4-A929-FFDE18032326}"/>
+              </a:ext>
+            </a:extLst>
+          </p:cNvPr>
+          <p:cNvPicPr>
+            <a:picLocks noChangeAspect="1"/>
+          </p:cNvPicPr>
+          <p:nvPr/>
+        </p:nvPicPr>
+        <p:blipFill>
+          <a:blip r:embed="rId4"/>
+          <a:stretch>
+            <a:fillRect/>
+          </a:stretch>
+        </p:blipFill>
+        <p:spPr>
+          <a:xfrm>
+            <a:off x="6478252" y="1825778"/>
+            <a:ext cx="4677428" cy="4058216"/>
+          </a:xfrm>
+          <a:prstGeom prst="rect">
+            <a:avLst/>
+          </a:prstGeom>
+        </p:spPr>
+      </p:pic>
     </p:spTree>
     <p:extLst>
       <p:ext uri="{BB962C8B-B14F-4D97-AF65-F5344CB8AC3E}">
-        <p14:creationId xmlns:p14="http://schemas.microsoft.com/office/powerpoint/2010/main" val="2965336870"/>
+        <p14:creationId xmlns:p14="http://schemas.microsoft.com/office/powerpoint/2010/main" val="1983885850"/>
       </p:ext>
     </p:extLst>
   </p:cSld>
@@ -8180,77 +8168,7 @@
           <a:p>
             <a:r>
               <a:rPr lang="en-CA" dirty="0"/>
-              <a:t>I would like to request an extension to this deadline (1 term)</a:t>
-            </a:r>
-          </a:p>
-          <a:p>
-            <a:pPr>
-              <a:buFont typeface="Arial" panose="020B0604020202020204" pitchFamily="34" charset="0"/>
-              <a:buChar char="•"/>
-            </a:pPr>
-            <a:r>
-              <a:rPr lang="en-CA" dirty="0"/>
-              <a:t>Fall 2026 Graduation Deadlines</a:t>
-            </a:r>
-          </a:p>
-          <a:p>
-            <a:pPr lvl="1">
-              <a:buFont typeface="Arial" panose="020B0604020202020204" pitchFamily="34" charset="0"/>
-              <a:buChar char="•"/>
-            </a:pPr>
-            <a:r>
-              <a:rPr lang="en-CA" dirty="0"/>
-              <a:t>May 29: External Examiner Form </a:t>
-            </a:r>
-          </a:p>
-          <a:p>
-            <a:pPr lvl="1">
-              <a:buFont typeface="Arial" panose="020B0604020202020204" pitchFamily="34" charset="0"/>
-              <a:buChar char="•"/>
-            </a:pPr>
-            <a:r>
-              <a:rPr lang="en-CA" dirty="0"/>
-              <a:t>June 29: Thesis to Committee</a:t>
-            </a:r>
-          </a:p>
-          <a:p>
-            <a:pPr lvl="1">
-              <a:buFont typeface="Arial" panose="020B0604020202020204" pitchFamily="34" charset="0"/>
-              <a:buChar char="•"/>
-            </a:pPr>
-            <a:r>
-              <a:rPr lang="en-CA" dirty="0"/>
-              <a:t>July 13: Internal Examination</a:t>
-            </a:r>
-          </a:p>
-          <a:p>
-            <a:pPr lvl="1">
-              <a:buFont typeface="Arial" panose="020B0604020202020204" pitchFamily="34" charset="0"/>
-              <a:buChar char="•"/>
-            </a:pPr>
-            <a:r>
-              <a:rPr lang="en-CA" dirty="0"/>
-              <a:t>July 27: Dissertation Submitted for External </a:t>
-            </a:r>
-          </a:p>
-          <a:p>
-            <a:pPr lvl="1">
-              <a:buFont typeface="Arial" panose="020B0604020202020204" pitchFamily="34" charset="0"/>
-              <a:buChar char="•"/>
-            </a:pPr>
-            <a:r>
-              <a:rPr lang="en-CA" dirty="0"/>
-              <a:t>Sept 18: External Doctoral Examination</a:t>
-            </a:r>
-          </a:p>
-          <a:p>
-            <a:pPr lvl="1">
-              <a:buFont typeface="Arial" panose="020B0604020202020204" pitchFamily="34" charset="0"/>
-              <a:buChar char="•"/>
-            </a:pPr>
-            <a:r>
-              <a:rPr lang="en-CA" dirty="0"/>
-              <a:t>Oct 16: Acceptance of Final Dissertation</a:t>
+              <a:t>Request an extension to this deadline (2 term)</a:t>
             </a:r>
           </a:p>
           <a:p>
@@ -13219,6 +13137,102 @@
           </a:prstGeom>
         </p:spPr>
       </p:pic>
+      <p:sp>
+        <p:nvSpPr>
+          <p:cNvPr id="3" name="Rectangle 2">
+            <a:extLst>
+              <a:ext uri="{FF2B5EF4-FFF2-40B4-BE49-F238E27FC236}">
+                <a16:creationId xmlns:a16="http://schemas.microsoft.com/office/drawing/2014/main" id="{FBCA739D-465C-AC0E-C157-56A2C62FA738}"/>
+              </a:ext>
+            </a:extLst>
+          </p:cNvPr>
+          <p:cNvSpPr/>
+          <p:nvPr/>
+        </p:nvSpPr>
+        <p:spPr>
+          <a:xfrm>
+            <a:off x="3524250" y="5266215"/>
+            <a:ext cx="5514975" cy="461010"/>
+          </a:xfrm>
+          <a:prstGeom prst="rect">
+            <a:avLst/>
+          </a:prstGeom>
+          <a:solidFill>
+            <a:schemeClr val="bg1"/>
+          </a:solidFill>
+        </p:spPr>
+        <p:style>
+          <a:lnRef idx="2">
+            <a:schemeClr val="accent1">
+              <a:shade val="15000"/>
+            </a:schemeClr>
+          </a:lnRef>
+          <a:fillRef idx="1">
+            <a:schemeClr val="accent1"/>
+          </a:fillRef>
+          <a:effectRef idx="0">
+            <a:schemeClr val="accent1"/>
+          </a:effectRef>
+          <a:fontRef idx="minor">
+            <a:schemeClr val="lt1"/>
+          </a:fontRef>
+        </p:style>
+        <p:txBody>
+          <a:bodyPr rtlCol="0" anchor="ctr"/>
+          <a:lstStyle/>
+          <a:p>
+            <a:pPr algn="ctr"/>
+            <a:endParaRPr lang="en-CA"/>
+          </a:p>
+        </p:txBody>
+      </p:sp>
+      <p:pic>
+        <p:nvPicPr>
+          <p:cNvPr id="1026" name="Picture 2">
+            <a:extLst>
+              <a:ext uri="{FF2B5EF4-FFF2-40B4-BE49-F238E27FC236}">
+                <a16:creationId xmlns:a16="http://schemas.microsoft.com/office/drawing/2014/main" id="{9F8C1166-9EBE-934F-BEED-95AA3F6CA409}"/>
+              </a:ext>
+            </a:extLst>
+          </p:cNvPr>
+          <p:cNvPicPr>
+            <a:picLocks noChangeAspect="1" noChangeArrowheads="1"/>
+          </p:cNvPicPr>
+          <p:nvPr/>
+        </p:nvPicPr>
+        <p:blipFill>
+          <a:blip r:embed="rId4">
+            <a:extLst>
+              <a:ext uri="{28A0092B-C50C-407E-A947-70E740481C1C}">
+                <a14:useLocalDpi xmlns:a14="http://schemas.microsoft.com/office/drawing/2010/main" val="0"/>
+              </a:ext>
+            </a:extLst>
+          </a:blip>
+          <a:srcRect/>
+          <a:stretch>
+            <a:fillRect/>
+          </a:stretch>
+        </p:blipFill>
+        <p:spPr bwMode="auto">
+          <a:xfrm>
+            <a:off x="3811588" y="5344320"/>
+            <a:ext cx="4629150" cy="304800"/>
+          </a:xfrm>
+          <a:prstGeom prst="rect">
+            <a:avLst/>
+          </a:prstGeom>
+          <a:noFill/>
+          <a:extLst>
+            <a:ext uri="{909E8E84-426E-40DD-AFC4-6F175D3DCCD1}">
+              <a14:hiddenFill xmlns:a14="http://schemas.microsoft.com/office/drawing/2010/main">
+                <a:solidFill>
+                  <a:srgbClr val="FFFFFF"/>
+                </a:solidFill>
+              </a14:hiddenFill>
+            </a:ext>
+          </a:extLst>
+        </p:spPr>
+      </p:pic>
     </p:spTree>
     <p:extLst>
       <p:ext uri="{BB962C8B-B14F-4D97-AF65-F5344CB8AC3E}">
@@ -13399,6 +13413,239 @@
   <p:cSld>
     <p:spTree>
       <p:nvGrpSpPr>
+        <p:cNvPr id="1" name=""/>
+        <p:cNvGrpSpPr/>
+        <p:nvPr/>
+      </p:nvGrpSpPr>
+      <p:grpSpPr>
+        <a:xfrm>
+          <a:off x="0" y="0"/>
+          <a:ext cx="0" cy="0"/>
+          <a:chOff x="0" y="0"/>
+          <a:chExt cx="0" cy="0"/>
+        </a:xfrm>
+      </p:grpSpPr>
+      <p:sp>
+        <p:nvSpPr>
+          <p:cNvPr id="2" name="Title 1">
+            <a:extLst>
+              <a:ext uri="{FF2B5EF4-FFF2-40B4-BE49-F238E27FC236}">
+                <a16:creationId xmlns:a16="http://schemas.microsoft.com/office/drawing/2014/main" id="{B5F71BD1-4E07-89AD-E95B-E2FCF3F3B4BD}"/>
+              </a:ext>
+            </a:extLst>
+          </p:cNvPr>
+          <p:cNvSpPr>
+            <a:spLocks noGrp="1"/>
+          </p:cNvSpPr>
+          <p:nvPr>
+            <p:ph type="title"/>
+          </p:nvPr>
+        </p:nvSpPr>
+        <p:spPr/>
+        <p:txBody>
+          <a:bodyPr/>
+          <a:lstStyle/>
+          <a:p>
+            <a:r>
+              <a:rPr lang="en-US" dirty="0"/>
+              <a:t>Experimental Set-Up: </a:t>
+            </a:r>
+            <a:r>
+              <a:rPr lang="en-US" sz="4000" dirty="0"/>
+              <a:t>Minimizing Uncertainty </a:t>
+            </a:r>
+            <a:endParaRPr lang="en-CA" dirty="0"/>
+          </a:p>
+        </p:txBody>
+      </p:sp>
+      <p:sp>
+        <p:nvSpPr>
+          <p:cNvPr id="3" name="Content Placeholder 2">
+            <a:extLst>
+              <a:ext uri="{FF2B5EF4-FFF2-40B4-BE49-F238E27FC236}">
+                <a16:creationId xmlns:a16="http://schemas.microsoft.com/office/drawing/2014/main" id="{97401A52-1201-D79F-3910-BF7CA817185E}"/>
+              </a:ext>
+            </a:extLst>
+          </p:cNvPr>
+          <p:cNvSpPr>
+            <a:spLocks noGrp="1"/>
+          </p:cNvSpPr>
+          <p:nvPr>
+            <p:ph idx="1"/>
+          </p:nvPr>
+        </p:nvSpPr>
+        <p:spPr/>
+        <p:txBody>
+          <a:bodyPr/>
+          <a:lstStyle/>
+          <a:p>
+            <a:pPr marL="0" indent="0">
+              <a:buNone/>
+            </a:pPr>
+            <a:r>
+              <a:rPr lang="en-US" dirty="0"/>
+              <a:t>Three sources of uncertainty:</a:t>
+            </a:r>
+            <a:endParaRPr lang="en-CA" dirty="0"/>
+          </a:p>
+          <a:p>
+            <a:pPr marL="457200" indent="-457200">
+              <a:buFont typeface="+mj-lt"/>
+              <a:buAutoNum type="arabicPeriod"/>
+            </a:pPr>
+            <a:r>
+              <a:rPr lang="en-CA" dirty="0"/>
+              <a:t>4D Dose Simulations</a:t>
+            </a:r>
+          </a:p>
+          <a:p>
+            <a:pPr marL="749808" lvl="1" indent="-457200">
+              <a:buFont typeface="+mj-lt"/>
+              <a:buAutoNum type="arabicPeriod"/>
+            </a:pPr>
+            <a:r>
+              <a:rPr lang="en-CA" dirty="0"/>
+              <a:t>Number of particles simulated (Stochastic)</a:t>
+            </a:r>
+          </a:p>
+          <a:p>
+            <a:pPr marL="932688" lvl="2" indent="-457200"/>
+            <a:r>
+              <a:rPr lang="en-CA" dirty="0"/>
+              <a:t>↑ the number of particles simulated = ↓ stochastic uncertainty = </a:t>
+            </a:r>
+            <a:r>
+              <a:rPr lang="en-CA" b="1" dirty="0"/>
+              <a:t>↑ simulation time </a:t>
+            </a:r>
+          </a:p>
+          <a:p>
+            <a:pPr marL="932688" lvl="2" indent="-457200"/>
+            <a:r>
+              <a:rPr lang="en-CA" b="1" dirty="0"/>
+              <a:t>Solution: </a:t>
+            </a:r>
+            <a:r>
+              <a:rPr lang="en-CA" dirty="0"/>
+              <a:t> Run each sweep of the Co-60 head as its own simulation with 2E11 particles. Each sweep takes ~20 hrs to calculate </a:t>
+            </a:r>
+          </a:p>
+          <a:p>
+            <a:pPr marL="749808" lvl="1" indent="-457200">
+              <a:buFont typeface="+mj-lt"/>
+              <a:buAutoNum type="arabicPeriod"/>
+            </a:pPr>
+            <a:r>
+              <a:rPr lang="en-CA" dirty="0"/>
+              <a:t>Size of time bin used to sample dose data</a:t>
+            </a:r>
+          </a:p>
+          <a:p>
+            <a:pPr marL="932688" lvl="2" indent="-457200"/>
+            <a:r>
+              <a:rPr lang="en-CA" dirty="0"/>
+              <a:t>↑ time bin size = </a:t>
+            </a:r>
+            <a:r>
+              <a:rPr lang="en-CA" b="1" dirty="0"/>
+              <a:t>↓ time resolution = ↑ positional averaging &amp; ↑ particle number uncertainty</a:t>
+            </a:r>
+          </a:p>
+          <a:p>
+            <a:pPr marL="932688" lvl="2" indent="-457200"/>
+            <a:r>
+              <a:rPr lang="en-CA" b="1" dirty="0"/>
+              <a:t>Solution: </a:t>
+            </a:r>
+            <a:r>
+              <a:rPr lang="en-CA" dirty="0"/>
+              <a:t>Determine the time bin which minimizes </a:t>
+            </a:r>
+            <a:endParaRPr lang="en-CA" b="1" dirty="0"/>
+          </a:p>
+          <a:p>
+            <a:pPr marL="457200" indent="-457200">
+              <a:buFont typeface="+mj-lt"/>
+              <a:buAutoNum type="arabicPeriod"/>
+            </a:pPr>
+            <a:r>
+              <a:rPr lang="en-CA" dirty="0"/>
+              <a:t>Number of BVs Simulated (Stochastic)</a:t>
+            </a:r>
+            <a:endParaRPr lang="en-US" dirty="0"/>
+          </a:p>
+          <a:p>
+            <a:pPr marL="932688" lvl="2" indent="-457200"/>
+            <a:r>
+              <a:rPr lang="en-CA" dirty="0"/>
+              <a:t>↑ the number of particles simulated = ↓ stochastic uncertainty = </a:t>
+            </a:r>
+            <a:r>
+              <a:rPr lang="en-CA" b="1" dirty="0"/>
+              <a:t>↑ simulation time </a:t>
+            </a:r>
+          </a:p>
+          <a:p>
+            <a:pPr marL="932688" lvl="2" indent="-457200"/>
+            <a:r>
+              <a:rPr lang="en-CA" b="1" dirty="0"/>
+              <a:t>Solution: </a:t>
+            </a:r>
+            <a:r>
+              <a:rPr lang="en-CA" dirty="0"/>
+              <a:t>Characterize the mean and std of the dose to the BVs as a function of BV number</a:t>
+            </a:r>
+            <a:endParaRPr lang="en-CA" b="1" dirty="0"/>
+          </a:p>
+        </p:txBody>
+      </p:sp>
+      <p:sp>
+        <p:nvSpPr>
+          <p:cNvPr id="4" name="Slide Number Placeholder 3">
+            <a:extLst>
+              <a:ext uri="{FF2B5EF4-FFF2-40B4-BE49-F238E27FC236}">
+                <a16:creationId xmlns:a16="http://schemas.microsoft.com/office/drawing/2014/main" id="{44F37BDC-2374-9C9A-6430-E0C96632AD0D}"/>
+              </a:ext>
+            </a:extLst>
+          </p:cNvPr>
+          <p:cNvSpPr>
+            <a:spLocks noGrp="1"/>
+          </p:cNvSpPr>
+          <p:nvPr>
+            <p:ph type="sldNum" sz="quarter" idx="12"/>
+          </p:nvPr>
+        </p:nvSpPr>
+        <p:spPr/>
+        <p:txBody>
+          <a:bodyPr/>
+          <a:lstStyle/>
+          <a:p>
+            <a:fld id="{4BAA6517-F367-4EB3-AFA6-036DD26A3111}" type="slidenum">
+              <a:rPr lang="en-CA" smtClean="0"/>
+              <a:t>8</a:t>
+            </a:fld>
+            <a:endParaRPr lang="en-CA"/>
+          </a:p>
+        </p:txBody>
+      </p:sp>
+    </p:spTree>
+    <p:extLst>
+      <p:ext uri="{BB962C8B-B14F-4D97-AF65-F5344CB8AC3E}">
+        <p14:creationId xmlns:p14="http://schemas.microsoft.com/office/powerpoint/2010/main" val="2965336870"/>
+      </p:ext>
+    </p:extLst>
+  </p:cSld>
+  <p:clrMapOvr>
+    <a:masterClrMapping/>
+  </p:clrMapOvr>
+</p:sld>
+</file>
+
+<file path=ppt/slides/slide9.xml><?xml version="1.0" encoding="utf-8"?>
+<p:sld xmlns:a="http://schemas.openxmlformats.org/drawingml/2006/main" xmlns:r="http://schemas.openxmlformats.org/officeDocument/2006/relationships" xmlns:p="http://schemas.openxmlformats.org/presentationml/2006/main">
+  <p:cSld>
+    <p:spTree>
+      <p:nvGrpSpPr>
         <p:cNvPr id="1" name="">
           <a:extLst>
             <a:ext uri="{FF2B5EF4-FFF2-40B4-BE49-F238E27FC236}">
@@ -13445,7 +13692,7 @@
           <a:p>
             <a:fld id="{1E5564C7-97C0-40C1-9717-452594735347}" type="slidenum">
               <a:rPr lang="en-CA" smtClean="0"/>
-              <a:t>8</a:t>
+              <a:t>9</a:t>
             </a:fld>
             <a:endParaRPr lang="en-CA" dirty="0"/>
           </a:p>
@@ -13901,227 +14148,6 @@
     <p:extLst>
       <p:ext uri="{BB962C8B-B14F-4D97-AF65-F5344CB8AC3E}">
         <p14:creationId xmlns:p14="http://schemas.microsoft.com/office/powerpoint/2010/main" val="255193766"/>
-      </p:ext>
-    </p:extLst>
-  </p:cSld>
-  <p:clrMapOvr>
-    <a:masterClrMapping/>
-  </p:clrMapOvr>
-</p:sld>
-</file>
-
-<file path=ppt/slides/slide9.xml><?xml version="1.0" encoding="utf-8"?>
-<p:sld xmlns:a="http://schemas.openxmlformats.org/drawingml/2006/main" xmlns:r="http://schemas.openxmlformats.org/officeDocument/2006/relationships" xmlns:p="http://schemas.openxmlformats.org/presentationml/2006/main">
-  <p:cSld>
-    <p:spTree>
-      <p:nvGrpSpPr>
-        <p:cNvPr id="1" name=""/>
-        <p:cNvGrpSpPr/>
-        <p:nvPr/>
-      </p:nvGrpSpPr>
-      <p:grpSpPr>
-        <a:xfrm>
-          <a:off x="0" y="0"/>
-          <a:ext cx="0" cy="0"/>
-          <a:chOff x="0" y="0"/>
-          <a:chExt cx="0" cy="0"/>
-        </a:xfrm>
-      </p:grpSpPr>
-      <p:sp>
-        <p:nvSpPr>
-          <p:cNvPr id="2" name="Title 1">
-            <a:extLst>
-              <a:ext uri="{FF2B5EF4-FFF2-40B4-BE49-F238E27FC236}">
-                <a16:creationId xmlns:a16="http://schemas.microsoft.com/office/drawing/2014/main" id="{B17FF005-D8FC-3965-09EF-C0002C95370B}"/>
-              </a:ext>
-            </a:extLst>
-          </p:cNvPr>
-          <p:cNvSpPr>
-            <a:spLocks noGrp="1"/>
-          </p:cNvSpPr>
-          <p:nvPr>
-            <p:ph type="title"/>
-          </p:nvPr>
-        </p:nvSpPr>
-        <p:spPr/>
-        <p:txBody>
-          <a:bodyPr/>
-          <a:lstStyle/>
-          <a:p>
-            <a:r>
-              <a:rPr lang="en-CA" dirty="0"/>
-              <a:t>Sweeping Co-60</a:t>
-            </a:r>
-          </a:p>
-        </p:txBody>
-      </p:sp>
-      <p:pic>
-        <p:nvPicPr>
-          <p:cNvPr id="6" name="Content Placeholder 5">
-            <a:extLst>
-              <a:ext uri="{FF2B5EF4-FFF2-40B4-BE49-F238E27FC236}">
-                <a16:creationId xmlns:a16="http://schemas.microsoft.com/office/drawing/2014/main" id="{67ED8643-5835-2426-FCF3-559F7D4DDD68}"/>
-              </a:ext>
-            </a:extLst>
-          </p:cNvPr>
-          <p:cNvPicPr>
-            <a:picLocks noGrp="1" noChangeAspect="1"/>
-          </p:cNvPicPr>
-          <p:nvPr>
-            <p:ph idx="1"/>
-          </p:nvPr>
-        </p:nvPicPr>
-        <p:blipFill>
-          <a:blip r:embed="rId2"/>
-          <a:stretch>
-            <a:fillRect/>
-          </a:stretch>
-        </p:blipFill>
-        <p:spPr>
-          <a:xfrm>
-            <a:off x="1209040" y="1825778"/>
-            <a:ext cx="4704080" cy="3983195"/>
-          </a:xfrm>
-        </p:spPr>
-      </p:pic>
-      <p:sp>
-        <p:nvSpPr>
-          <p:cNvPr id="4" name="Slide Number Placeholder 3">
-            <a:extLst>
-              <a:ext uri="{FF2B5EF4-FFF2-40B4-BE49-F238E27FC236}">
-                <a16:creationId xmlns:a16="http://schemas.microsoft.com/office/drawing/2014/main" id="{878AFD76-019F-9BFE-F23A-7BC798F1602C}"/>
-              </a:ext>
-            </a:extLst>
-          </p:cNvPr>
-          <p:cNvSpPr>
-            <a:spLocks noGrp="1"/>
-          </p:cNvSpPr>
-          <p:nvPr>
-            <p:ph type="sldNum" sz="quarter" idx="12"/>
-          </p:nvPr>
-        </p:nvSpPr>
-        <p:spPr/>
-        <p:txBody>
-          <a:bodyPr/>
-          <a:lstStyle/>
-          <a:p>
-            <a:fld id="{4BAA6517-F367-4EB3-AFA6-036DD26A3111}" type="slidenum">
-              <a:rPr lang="en-CA" smtClean="0"/>
-              <a:t>9</a:t>
-            </a:fld>
-            <a:endParaRPr lang="en-CA"/>
-          </a:p>
-        </p:txBody>
-      </p:sp>
-      <p:sp>
-        <p:nvSpPr>
-          <p:cNvPr id="8" name="TextBox 7">
-            <a:extLst>
-              <a:ext uri="{FF2B5EF4-FFF2-40B4-BE49-F238E27FC236}">
-                <a16:creationId xmlns:a16="http://schemas.microsoft.com/office/drawing/2014/main" id="{56F293EE-6355-47C9-B385-5139240142A0}"/>
-              </a:ext>
-            </a:extLst>
-          </p:cNvPr>
-          <p:cNvSpPr txBox="1"/>
-          <p:nvPr/>
-        </p:nvSpPr>
-        <p:spPr>
-          <a:xfrm>
-            <a:off x="0" y="6411514"/>
-            <a:ext cx="10763250" cy="461665"/>
-          </a:xfrm>
-          <a:prstGeom prst="rect">
-            <a:avLst/>
-          </a:prstGeom>
-          <a:noFill/>
-        </p:spPr>
-        <p:txBody>
-          <a:bodyPr wrap="square">
-            <a:spAutoFit/>
-          </a:bodyPr>
-          <a:lstStyle/>
-          <a:p>
-            <a:r>
-              <a:rPr lang="en-CA" sz="1200" dirty="0"/>
-              <a:t>S. Hussein and E. </a:t>
-            </a:r>
-            <a:r>
-              <a:rPr lang="en-CA" sz="1200" dirty="0" err="1"/>
-              <a:t>el</a:t>
-            </a:r>
-            <a:r>
-              <a:rPr lang="en-CA" sz="1200" dirty="0"/>
-              <a:t>-Khatib, “Total body irradiation with a sweeping 60Cobalt beam,” Int J </a:t>
-            </a:r>
-            <a:r>
-              <a:rPr lang="en-CA" sz="1200" dirty="0" err="1"/>
-              <a:t>Radiat</a:t>
-            </a:r>
-            <a:r>
-              <a:rPr lang="en-CA" sz="1200" dirty="0"/>
-              <a:t> Oncol Biol Phys, vol. 33, no. 2, pp. 493–497, Sept. 1995, </a:t>
-            </a:r>
-            <a:r>
-              <a:rPr lang="en-CA" sz="1200" dirty="0" err="1"/>
-              <a:t>doi</a:t>
-            </a:r>
-            <a:r>
-              <a:rPr lang="en-CA" sz="1200" dirty="0"/>
-              <a:t>: </a:t>
-            </a:r>
-            <a:r>
-              <a:rPr lang="en-CA" sz="1200" dirty="0">
-                <a:hlinkClick r:id="rId3">
-                  <a:extLst>
-                    <a:ext uri="{A12FA001-AC4F-418D-AE19-62706E023703}">
-                      <ahyp:hlinkClr xmlns:ahyp="http://schemas.microsoft.com/office/drawing/2018/hyperlinkcolor" val="tx"/>
-                    </a:ext>
-                  </a:extLst>
-                </a:hlinkClick>
-              </a:rPr>
-              <a:t>10.1016/0360-3016(95)00164-T</a:t>
-            </a:r>
-            <a:r>
-              <a:rPr lang="en-CA" sz="1200" dirty="0"/>
-              <a:t>.</a:t>
-            </a:r>
-          </a:p>
-        </p:txBody>
-      </p:sp>
-      <p:pic>
-        <p:nvPicPr>
-          <p:cNvPr id="10" name="Picture 9">
-            <a:extLst>
-              <a:ext uri="{FF2B5EF4-FFF2-40B4-BE49-F238E27FC236}">
-                <a16:creationId xmlns:a16="http://schemas.microsoft.com/office/drawing/2014/main" id="{E1C2F8C3-687B-3CA4-A929-FFDE18032326}"/>
-              </a:ext>
-            </a:extLst>
-          </p:cNvPr>
-          <p:cNvPicPr>
-            <a:picLocks noChangeAspect="1"/>
-          </p:cNvPicPr>
-          <p:nvPr/>
-        </p:nvPicPr>
-        <p:blipFill>
-          <a:blip r:embed="rId4"/>
-          <a:stretch>
-            <a:fillRect/>
-          </a:stretch>
-        </p:blipFill>
-        <p:spPr>
-          <a:xfrm>
-            <a:off x="6478252" y="1825778"/>
-            <a:ext cx="4677428" cy="4058216"/>
-          </a:xfrm>
-          <a:prstGeom prst="rect">
-            <a:avLst/>
-          </a:prstGeom>
-        </p:spPr>
-      </p:pic>
-    </p:spTree>
-    <p:extLst>
-      <p:ext uri="{BB962C8B-B14F-4D97-AF65-F5344CB8AC3E}">
-        <p14:creationId xmlns:p14="http://schemas.microsoft.com/office/powerpoint/2010/main" val="1983885850"/>
       </p:ext>
     </p:extLst>
   </p:cSld>

--- a/Working Documents/03.26_Committee Meeting.pptx
+++ b/Working Documents/03.26_Committee Meeting.pptx
@@ -5,7 +5,7 @@
     <p:sldMasterId id="2147483672" r:id="rId1"/>
   </p:sldMasterIdLst>
   <p:notesMasterIdLst>
-    <p:notesMasterId r:id="rId21"/>
+    <p:notesMasterId r:id="rId30"/>
   </p:notesMasterIdLst>
   <p:sldIdLst>
     <p:sldId id="256" r:id="rId2"/>
@@ -13,20 +13,29 @@
     <p:sldId id="260" r:id="rId4"/>
     <p:sldId id="261" r:id="rId5"/>
     <p:sldId id="329" r:id="rId6"/>
-    <p:sldId id="330" r:id="rId7"/>
+    <p:sldId id="347" r:id="rId7"/>
     <p:sldId id="331" r:id="rId8"/>
-    <p:sldId id="332" r:id="rId9"/>
-    <p:sldId id="305" r:id="rId10"/>
-    <p:sldId id="298" r:id="rId11"/>
-    <p:sldId id="333" r:id="rId12"/>
-    <p:sldId id="334" r:id="rId13"/>
-    <p:sldId id="335" r:id="rId14"/>
-    <p:sldId id="336" r:id="rId15"/>
-    <p:sldId id="292" r:id="rId16"/>
-    <p:sldId id="276" r:id="rId17"/>
-    <p:sldId id="289" r:id="rId18"/>
-    <p:sldId id="277" r:id="rId19"/>
-    <p:sldId id="278" r:id="rId20"/>
+    <p:sldId id="330" r:id="rId9"/>
+    <p:sldId id="332" r:id="rId10"/>
+    <p:sldId id="344" r:id="rId11"/>
+    <p:sldId id="346" r:id="rId12"/>
+    <p:sldId id="333" r:id="rId13"/>
+    <p:sldId id="334" r:id="rId14"/>
+    <p:sldId id="337" r:id="rId15"/>
+    <p:sldId id="338" r:id="rId16"/>
+    <p:sldId id="339" r:id="rId17"/>
+    <p:sldId id="342" r:id="rId18"/>
+    <p:sldId id="343" r:id="rId19"/>
+    <p:sldId id="341" r:id="rId20"/>
+    <p:sldId id="335" r:id="rId21"/>
+    <p:sldId id="336" r:id="rId22"/>
+    <p:sldId id="292" r:id="rId23"/>
+    <p:sldId id="298" r:id="rId24"/>
+    <p:sldId id="305" r:id="rId25"/>
+    <p:sldId id="276" r:id="rId26"/>
+    <p:sldId id="289" r:id="rId27"/>
+    <p:sldId id="277" r:id="rId28"/>
+    <p:sldId id="278" r:id="rId29"/>
   </p:sldIdLst>
   <p:sldSz cx="12192000" cy="6858000"/>
   <p:notesSz cx="6858000" cy="9144000"/>
@@ -2440,7 +2449,7 @@
           <a:p>
             <a:fld id="{A0428C8E-7BAD-4C37-9F0B-8CBDB03D4496}" type="datetimeFigureOut">
               <a:rPr lang="en-CA" smtClean="0"/>
-              <a:t>27-Mar-2026</a:t>
+              <a:t>2026-03-30</a:t>
             </a:fld>
             <a:endParaRPr lang="en-CA"/>
           </a:p>
@@ -3027,7 +3036,7 @@
           <a:p>
             <a:fld id="{5C2A1542-6F33-408E-AC39-5232C11A66FF}" type="slidenum">
               <a:rPr lang="en-CA" smtClean="0"/>
-              <a:t>16</a:t>
+              <a:t>25</a:t>
             </a:fld>
             <a:endParaRPr lang="en-CA"/>
           </a:p>
@@ -3147,7 +3156,7 @@
           <a:p>
             <a:fld id="{5C2A1542-6F33-408E-AC39-5232C11A66FF}" type="slidenum">
               <a:rPr lang="en-CA" smtClean="0"/>
-              <a:t>17</a:t>
+              <a:t>26</a:t>
             </a:fld>
             <a:endParaRPr lang="en-CA"/>
           </a:p>
@@ -3231,7 +3240,7 @@
           <a:p>
             <a:fld id="{A4F92E4B-81BE-4B7A-B36D-25EE9615AC65}" type="slidenum">
               <a:rPr lang="en-CA" smtClean="0"/>
-              <a:t>18</a:t>
+              <a:t>27</a:t>
             </a:fld>
             <a:endParaRPr lang="en-CA"/>
           </a:p>
@@ -3492,7 +3501,7 @@
           <a:p>
             <a:fld id="{4192F68B-5CDA-45F8-8FC6-8CC31496F2C0}" type="datetime1">
               <a:rPr lang="en-CA" smtClean="0"/>
-              <a:t>27-Mar-2026</a:t>
+              <a:t>2026-03-30</a:t>
             </a:fld>
             <a:endParaRPr lang="en-CA"/>
           </a:p>
@@ -3700,7 +3709,7 @@
           <a:p>
             <a:fld id="{723E7550-8411-4E2E-A2AF-8A063A660948}" type="datetime1">
               <a:rPr lang="en-CA" smtClean="0"/>
-              <a:t>27-Mar-2026</a:t>
+              <a:t>2026-03-30</a:t>
             </a:fld>
             <a:endParaRPr lang="en-CA"/>
           </a:p>
@@ -3958,7 +3967,7 @@
           <a:p>
             <a:fld id="{6161E27D-A925-4B3D-83F5-ECDB550EC939}" type="datetime1">
               <a:rPr lang="en-CA" smtClean="0"/>
-              <a:t>27-Mar-2026</a:t>
+              <a:t>2026-03-30</a:t>
             </a:fld>
             <a:endParaRPr lang="en-CA"/>
           </a:p>
@@ -4128,7 +4137,7 @@
           <a:p>
             <a:fld id="{BBE08C00-40B8-4EDA-BCF9-010BAB3E9B10}" type="datetime1">
               <a:rPr lang="en-CA" smtClean="0"/>
-              <a:t>27-Mar-2026</a:t>
+              <a:t>2026-03-30</a:t>
             </a:fld>
             <a:endParaRPr lang="en-CA"/>
           </a:p>
@@ -4479,7 +4488,7 @@
           <a:p>
             <a:fld id="{575BD93C-08CC-43D5-8845-C649925EFB70}" type="datetime1">
               <a:rPr lang="en-CA" smtClean="0"/>
-              <a:t>27-Mar-2026</a:t>
+              <a:t>2026-03-30</a:t>
             </a:fld>
             <a:endParaRPr lang="en-CA"/>
           </a:p>
@@ -4754,7 +4763,7 @@
           <a:p>
             <a:fld id="{C2DD09B4-FF6B-44BE-9FB1-59E724526725}" type="datetime1">
               <a:rPr lang="en-CA" smtClean="0"/>
-              <a:t>27-Mar-2026</a:t>
+              <a:t>2026-03-30</a:t>
             </a:fld>
             <a:endParaRPr lang="en-CA"/>
           </a:p>
@@ -5133,7 +5142,7 @@
           <a:p>
             <a:fld id="{1C8EDB9F-AB4A-4644-B1B1-ADD488636EFD}" type="datetime1">
               <a:rPr lang="en-CA" smtClean="0"/>
-              <a:t>27-Mar-2026</a:t>
+              <a:t>2026-03-30</a:t>
             </a:fld>
             <a:endParaRPr lang="en-CA"/>
           </a:p>
@@ -5251,7 +5260,7 @@
           <a:p>
             <a:fld id="{2C069573-12B9-4DA2-AE6A-3DF248409BF9}" type="datetime1">
               <a:rPr lang="en-CA" smtClean="0"/>
-              <a:t>27-Mar-2026</a:t>
+              <a:t>2026-03-30</a:t>
             </a:fld>
             <a:endParaRPr lang="en-CA"/>
           </a:p>
@@ -5438,7 +5447,7 @@
           <a:p>
             <a:fld id="{B010FC2F-8CC7-4537-A6D2-E86E24CBE470}" type="datetime1">
               <a:rPr lang="en-CA" smtClean="0"/>
-              <a:t>27-Mar-2026</a:t>
+              <a:t>2026-03-30</a:t>
             </a:fld>
             <a:endParaRPr lang="en-CA"/>
           </a:p>
@@ -5794,7 +5803,7 @@
           <a:p>
             <a:fld id="{A20AF02B-F510-4E59-9F48-4A2B2B1C7CCC}" type="datetime1">
               <a:rPr lang="en-CA" smtClean="0"/>
-              <a:t>27-Mar-2026</a:t>
+              <a:t>2026-03-30</a:t>
             </a:fld>
             <a:endParaRPr lang="en-CA"/>
           </a:p>
@@ -6173,7 +6182,7 @@
           <a:p>
             <a:fld id="{1A796962-FC1B-4478-9758-77DD5C261549}" type="datetime1">
               <a:rPr lang="en-CA" smtClean="0"/>
-              <a:t>27-Mar-2026</a:t>
+              <a:t>2026-03-30</a:t>
             </a:fld>
             <a:endParaRPr lang="en-CA"/>
           </a:p>
@@ -6476,7 +6485,7 @@
           <a:p>
             <a:fld id="{35F51464-522D-45AA-8684-534AFC039EDB}" type="datetime1">
               <a:rPr lang="en-CA" smtClean="0"/>
-              <a:t>27-Mar-2026</a:t>
+              <a:t>2026-03-30</a:t>
             </a:fld>
             <a:endParaRPr lang="en-CA"/>
           </a:p>
@@ -7378,6 +7387,2641 @@
   <p:cSld>
     <p:spTree>
       <p:nvGrpSpPr>
+        <p:cNvPr id="1" name="">
+          <a:extLst>
+            <a:ext uri="{FF2B5EF4-FFF2-40B4-BE49-F238E27FC236}">
+              <a16:creationId xmlns:a16="http://schemas.microsoft.com/office/drawing/2014/main" id="{A6CFF5BA-8435-EA26-BCCC-AAA4FEE1C010}"/>
+            </a:ext>
+          </a:extLst>
+        </p:cNvPr>
+        <p:cNvGrpSpPr/>
+        <p:nvPr/>
+      </p:nvGrpSpPr>
+      <p:grpSpPr>
+        <a:xfrm>
+          <a:off x="0" y="0"/>
+          <a:ext cx="0" cy="0"/>
+          <a:chOff x="0" y="0"/>
+          <a:chExt cx="0" cy="0"/>
+        </a:xfrm>
+      </p:grpSpPr>
+      <p:sp>
+        <p:nvSpPr>
+          <p:cNvPr id="2" name="Title 1">
+            <a:extLst>
+              <a:ext uri="{FF2B5EF4-FFF2-40B4-BE49-F238E27FC236}">
+                <a16:creationId xmlns:a16="http://schemas.microsoft.com/office/drawing/2014/main" id="{8F056004-3CD9-59E3-5A19-7DE88765E922}"/>
+              </a:ext>
+            </a:extLst>
+          </p:cNvPr>
+          <p:cNvSpPr>
+            <a:spLocks noGrp="1"/>
+          </p:cNvSpPr>
+          <p:nvPr>
+            <p:ph type="title"/>
+          </p:nvPr>
+        </p:nvSpPr>
+        <p:spPr/>
+        <p:txBody>
+          <a:bodyPr/>
+          <a:lstStyle/>
+          <a:p>
+            <a:r>
+              <a:rPr lang="en-US" dirty="0"/>
+              <a:t>Experimental Set-Up: </a:t>
+            </a:r>
+            <a:r>
+              <a:rPr lang="en-US" sz="4000" dirty="0"/>
+              <a:t>Minimizing Uncertainty </a:t>
+            </a:r>
+            <a:endParaRPr lang="en-CA" dirty="0"/>
+          </a:p>
+        </p:txBody>
+      </p:sp>
+      <p:sp>
+        <p:nvSpPr>
+          <p:cNvPr id="3" name="Content Placeholder 2">
+            <a:extLst>
+              <a:ext uri="{FF2B5EF4-FFF2-40B4-BE49-F238E27FC236}">
+                <a16:creationId xmlns:a16="http://schemas.microsoft.com/office/drawing/2014/main" id="{70CDB4EF-0212-2016-6BF2-04E263BB594C}"/>
+              </a:ext>
+            </a:extLst>
+          </p:cNvPr>
+          <p:cNvSpPr>
+            <a:spLocks noGrp="1"/>
+          </p:cNvSpPr>
+          <p:nvPr>
+            <p:ph idx="1"/>
+          </p:nvPr>
+        </p:nvSpPr>
+        <p:spPr/>
+        <p:txBody>
+          <a:bodyPr/>
+          <a:lstStyle/>
+          <a:p>
+            <a:pPr marL="0" indent="0">
+              <a:buNone/>
+            </a:pPr>
+            <a:r>
+              <a:rPr lang="en-US" dirty="0"/>
+              <a:t>Three sources of uncertainty:</a:t>
+            </a:r>
+            <a:endParaRPr lang="en-CA" dirty="0"/>
+          </a:p>
+          <a:p>
+            <a:pPr>
+              <a:buFont typeface="Arial" panose="020B0604020202020204" pitchFamily="34" charset="0"/>
+              <a:buChar char="•"/>
+            </a:pPr>
+            <a:r>
+              <a:rPr lang="en-CA" dirty="0"/>
+              <a:t>4D Dose Simulations</a:t>
+            </a:r>
+          </a:p>
+          <a:p>
+            <a:pPr marL="749808" lvl="1" indent="-457200">
+              <a:buFont typeface="+mj-lt"/>
+              <a:buAutoNum type="arabicPeriod"/>
+            </a:pPr>
+            <a:r>
+              <a:rPr lang="en-CA" dirty="0"/>
+              <a:t>Number of particles simulated (Stochastic)</a:t>
+            </a:r>
+          </a:p>
+          <a:p>
+            <a:pPr marL="932688" lvl="2" indent="-457200"/>
+            <a:r>
+              <a:rPr lang="en-CA" dirty="0"/>
+              <a:t>↑ the number of particles simulated = ↓ stochastic uncertainty = </a:t>
+            </a:r>
+            <a:r>
+              <a:rPr lang="en-CA" b="1" dirty="0"/>
+              <a:t>↑ simulation time </a:t>
+            </a:r>
+          </a:p>
+          <a:p>
+            <a:pPr marL="932688" lvl="2" indent="-457200"/>
+            <a:r>
+              <a:rPr lang="en-CA" b="1" dirty="0"/>
+              <a:t>Solution: </a:t>
+            </a:r>
+            <a:r>
+              <a:rPr lang="en-CA" dirty="0"/>
+              <a:t> Run each sweep of the Co-60 head as its own simulation with 2E11 particles. Each sweep takes ~20 hrs to calculate </a:t>
+            </a:r>
+          </a:p>
+          <a:p>
+            <a:pPr marL="749808" lvl="1" indent="-457200">
+              <a:buFont typeface="+mj-lt"/>
+              <a:buAutoNum type="arabicPeriod"/>
+            </a:pPr>
+            <a:r>
+              <a:rPr lang="en-CA" dirty="0"/>
+              <a:t>Size of time bin used to sample dose data</a:t>
+            </a:r>
+          </a:p>
+          <a:p>
+            <a:pPr marL="932688" lvl="2" indent="-457200"/>
+            <a:r>
+              <a:rPr lang="en-CA" dirty="0"/>
+              <a:t>↑ time bin size = </a:t>
+            </a:r>
+            <a:r>
+              <a:rPr lang="en-CA" b="1" dirty="0"/>
+              <a:t>↓ time resolution = ↑ positional averaging &amp; ↑ particle number / dose uncertainty</a:t>
+            </a:r>
+          </a:p>
+          <a:p>
+            <a:pPr marL="932688" lvl="2" indent="-457200"/>
+            <a:r>
+              <a:rPr lang="en-CA" b="1" dirty="0"/>
+              <a:t>Solution: </a:t>
+            </a:r>
+            <a:r>
+              <a:rPr lang="en-CA" dirty="0"/>
+              <a:t>Determine the significance of </a:t>
+            </a:r>
+            <a:r>
+              <a:rPr lang="en-CA" dirty="0" err="1"/>
+              <a:t>dst</a:t>
+            </a:r>
+            <a:r>
+              <a:rPr lang="en-CA" dirty="0"/>
+              <a:t> on mean and std of dose (</a:t>
+            </a:r>
+            <a:r>
+              <a:rPr lang="en-CA" u="sng" dirty="0"/>
+              <a:t>Currently running</a:t>
+            </a:r>
+            <a:r>
+              <a:rPr lang="en-CA" dirty="0"/>
+              <a:t>)</a:t>
+            </a:r>
+            <a:endParaRPr lang="en-CA" b="1" dirty="0"/>
+          </a:p>
+        </p:txBody>
+      </p:sp>
+      <p:sp>
+        <p:nvSpPr>
+          <p:cNvPr id="4" name="Slide Number Placeholder 3">
+            <a:extLst>
+              <a:ext uri="{FF2B5EF4-FFF2-40B4-BE49-F238E27FC236}">
+                <a16:creationId xmlns:a16="http://schemas.microsoft.com/office/drawing/2014/main" id="{B33A5639-9999-F0A3-F08C-FDEF11C21747}"/>
+              </a:ext>
+            </a:extLst>
+          </p:cNvPr>
+          <p:cNvSpPr>
+            <a:spLocks noGrp="1"/>
+          </p:cNvSpPr>
+          <p:nvPr>
+            <p:ph type="sldNum" sz="quarter" idx="12"/>
+          </p:nvPr>
+        </p:nvSpPr>
+        <p:spPr/>
+        <p:txBody>
+          <a:bodyPr/>
+          <a:lstStyle/>
+          <a:p>
+            <a:fld id="{4BAA6517-F367-4EB3-AFA6-036DD26A3111}" type="slidenum">
+              <a:rPr lang="en-CA" smtClean="0"/>
+              <a:t>10</a:t>
+            </a:fld>
+            <a:endParaRPr lang="en-CA"/>
+          </a:p>
+        </p:txBody>
+      </p:sp>
+      <p:pic>
+        <p:nvPicPr>
+          <p:cNvPr id="6" name="Picture 5">
+            <a:extLst>
+              <a:ext uri="{FF2B5EF4-FFF2-40B4-BE49-F238E27FC236}">
+                <a16:creationId xmlns:a16="http://schemas.microsoft.com/office/drawing/2014/main" id="{80BE2713-BD67-2697-28FE-61BE0204CE42}"/>
+              </a:ext>
+            </a:extLst>
+          </p:cNvPr>
+          <p:cNvPicPr>
+            <a:picLocks noChangeAspect="1"/>
+          </p:cNvPicPr>
+          <p:nvPr/>
+        </p:nvPicPr>
+        <p:blipFill>
+          <a:blip r:embed="rId2"/>
+          <a:stretch>
+            <a:fillRect/>
+          </a:stretch>
+        </p:blipFill>
+        <p:spPr>
+          <a:xfrm>
+            <a:off x="8598277" y="4139155"/>
+            <a:ext cx="3023878" cy="664522"/>
+          </a:xfrm>
+          <a:prstGeom prst="rect">
+            <a:avLst/>
+          </a:prstGeom>
+        </p:spPr>
+      </p:pic>
+      <p:pic>
+        <p:nvPicPr>
+          <p:cNvPr id="8" name="Picture 7">
+            <a:extLst>
+              <a:ext uri="{FF2B5EF4-FFF2-40B4-BE49-F238E27FC236}">
+                <a16:creationId xmlns:a16="http://schemas.microsoft.com/office/drawing/2014/main" id="{CDEB94F9-1184-4A38-46DC-97F696BCDF14}"/>
+              </a:ext>
+            </a:extLst>
+          </p:cNvPr>
+          <p:cNvPicPr>
+            <a:picLocks noChangeAspect="1"/>
+          </p:cNvPicPr>
+          <p:nvPr/>
+        </p:nvPicPr>
+        <p:blipFill>
+          <a:blip r:embed="rId3"/>
+          <a:stretch>
+            <a:fillRect/>
+          </a:stretch>
+        </p:blipFill>
+        <p:spPr>
+          <a:xfrm>
+            <a:off x="8598277" y="5046657"/>
+            <a:ext cx="3258005" cy="695422"/>
+          </a:xfrm>
+          <a:prstGeom prst="rect">
+            <a:avLst/>
+          </a:prstGeom>
+        </p:spPr>
+      </p:pic>
+    </p:spTree>
+    <p:extLst>
+      <p:ext uri="{BB962C8B-B14F-4D97-AF65-F5344CB8AC3E}">
+        <p14:creationId xmlns:p14="http://schemas.microsoft.com/office/powerpoint/2010/main" val="3508117108"/>
+      </p:ext>
+    </p:extLst>
+  </p:cSld>
+  <p:clrMapOvr>
+    <a:masterClrMapping/>
+  </p:clrMapOvr>
+</p:sld>
+</file>
+
+<file path=ppt/slides/slide11.xml><?xml version="1.0" encoding="utf-8"?>
+<p:sld xmlns:a="http://schemas.openxmlformats.org/drawingml/2006/main" xmlns:r="http://schemas.openxmlformats.org/officeDocument/2006/relationships" xmlns:p="http://schemas.openxmlformats.org/presentationml/2006/main">
+  <p:cSld>
+    <p:spTree>
+      <p:nvGrpSpPr>
+        <p:cNvPr id="1" name="">
+          <a:extLst>
+            <a:ext uri="{FF2B5EF4-FFF2-40B4-BE49-F238E27FC236}">
+              <a16:creationId xmlns:a16="http://schemas.microsoft.com/office/drawing/2014/main" id="{5B036567-C529-FCB0-255E-44AA63A9DA98}"/>
+            </a:ext>
+          </a:extLst>
+        </p:cNvPr>
+        <p:cNvGrpSpPr/>
+        <p:nvPr/>
+      </p:nvGrpSpPr>
+      <p:grpSpPr>
+        <a:xfrm>
+          <a:off x="0" y="0"/>
+          <a:ext cx="0" cy="0"/>
+          <a:chOff x="0" y="0"/>
+          <a:chExt cx="0" cy="0"/>
+        </a:xfrm>
+      </p:grpSpPr>
+      <p:sp>
+        <p:nvSpPr>
+          <p:cNvPr id="2" name="Title 1">
+            <a:extLst>
+              <a:ext uri="{FF2B5EF4-FFF2-40B4-BE49-F238E27FC236}">
+                <a16:creationId xmlns:a16="http://schemas.microsoft.com/office/drawing/2014/main" id="{EC8C4AD7-4A49-3C80-0449-C8CAEE929131}"/>
+              </a:ext>
+            </a:extLst>
+          </p:cNvPr>
+          <p:cNvSpPr>
+            <a:spLocks noGrp="1"/>
+          </p:cNvSpPr>
+          <p:nvPr>
+            <p:ph type="title"/>
+          </p:nvPr>
+        </p:nvSpPr>
+        <p:spPr/>
+        <p:txBody>
+          <a:bodyPr/>
+          <a:lstStyle/>
+          <a:p>
+            <a:r>
+              <a:rPr lang="en-US" dirty="0"/>
+              <a:t>Experimental Set-Up: </a:t>
+            </a:r>
+            <a:r>
+              <a:rPr lang="en-US" sz="4000" dirty="0"/>
+              <a:t>Minimizing Uncertainty </a:t>
+            </a:r>
+            <a:endParaRPr lang="en-CA" dirty="0"/>
+          </a:p>
+        </p:txBody>
+      </p:sp>
+      <p:sp>
+        <p:nvSpPr>
+          <p:cNvPr id="3" name="Content Placeholder 2">
+            <a:extLst>
+              <a:ext uri="{FF2B5EF4-FFF2-40B4-BE49-F238E27FC236}">
+                <a16:creationId xmlns:a16="http://schemas.microsoft.com/office/drawing/2014/main" id="{282D4F49-86CD-0B8A-2F61-0586155C0131}"/>
+              </a:ext>
+            </a:extLst>
+          </p:cNvPr>
+          <p:cNvSpPr>
+            <a:spLocks noGrp="1"/>
+          </p:cNvSpPr>
+          <p:nvPr>
+            <p:ph idx="1"/>
+          </p:nvPr>
+        </p:nvSpPr>
+        <p:spPr/>
+        <p:txBody>
+          <a:bodyPr/>
+          <a:lstStyle/>
+          <a:p>
+            <a:pPr marL="0" indent="0">
+              <a:buNone/>
+            </a:pPr>
+            <a:r>
+              <a:rPr lang="en-US" dirty="0"/>
+              <a:t>Three sources of uncertainty:</a:t>
+            </a:r>
+            <a:endParaRPr lang="en-CA" dirty="0"/>
+          </a:p>
+          <a:p>
+            <a:pPr>
+              <a:buFont typeface="Arial" panose="020B0604020202020204" pitchFamily="34" charset="0"/>
+              <a:buChar char="•"/>
+            </a:pPr>
+            <a:r>
+              <a:rPr lang="en-CA" dirty="0"/>
+              <a:t>4D Dose Simulations</a:t>
+            </a:r>
+          </a:p>
+          <a:p>
+            <a:pPr marL="749808" lvl="1" indent="-457200">
+              <a:buFont typeface="+mj-lt"/>
+              <a:buAutoNum type="arabicPeriod"/>
+            </a:pPr>
+            <a:r>
+              <a:rPr lang="en-CA" dirty="0"/>
+              <a:t>Number of particles simulated (Stochastic)</a:t>
+            </a:r>
+          </a:p>
+          <a:p>
+            <a:pPr marL="932688" lvl="2" indent="-457200"/>
+            <a:r>
+              <a:rPr lang="en-CA" dirty="0"/>
+              <a:t>↑ the number of particles simulated = ↓ stochastic uncertainty = </a:t>
+            </a:r>
+            <a:r>
+              <a:rPr lang="en-CA" b="1" dirty="0"/>
+              <a:t>↑ simulation time </a:t>
+            </a:r>
+          </a:p>
+          <a:p>
+            <a:pPr marL="932688" lvl="2" indent="-457200"/>
+            <a:r>
+              <a:rPr lang="en-CA" b="1" dirty="0"/>
+              <a:t>Solution: </a:t>
+            </a:r>
+            <a:r>
+              <a:rPr lang="en-CA" dirty="0"/>
+              <a:t> Run each sweep of the Co-60 head as its own simulation with 2E11 particles. Each sweep takes ~20 hrs to calculate </a:t>
+            </a:r>
+          </a:p>
+          <a:p>
+            <a:pPr marL="749808" lvl="1" indent="-457200">
+              <a:buFont typeface="+mj-lt"/>
+              <a:buAutoNum type="arabicPeriod"/>
+            </a:pPr>
+            <a:r>
+              <a:rPr lang="en-CA" dirty="0"/>
+              <a:t>Size of time bin used to sample dose data</a:t>
+            </a:r>
+          </a:p>
+          <a:p>
+            <a:pPr marL="932688" lvl="2" indent="-457200"/>
+            <a:r>
+              <a:rPr lang="en-CA" dirty="0"/>
+              <a:t>↑ time bin size = </a:t>
+            </a:r>
+            <a:r>
+              <a:rPr lang="en-CA" b="1" dirty="0"/>
+              <a:t>↓ time resolution = ↑ positional averaging &amp; ↑ particle number / dose uncertainty</a:t>
+            </a:r>
+          </a:p>
+          <a:p>
+            <a:pPr marL="932688" lvl="2" indent="-457200"/>
+            <a:r>
+              <a:rPr lang="en-CA" b="1" dirty="0"/>
+              <a:t>Solution: </a:t>
+            </a:r>
+            <a:r>
+              <a:rPr lang="en-CA" dirty="0"/>
+              <a:t>Determine the significance of </a:t>
+            </a:r>
+            <a:r>
+              <a:rPr lang="en-CA" dirty="0" err="1"/>
+              <a:t>dst</a:t>
+            </a:r>
+            <a:r>
+              <a:rPr lang="en-CA" dirty="0"/>
+              <a:t> on mean and std of dose</a:t>
+            </a:r>
+            <a:endParaRPr lang="en-CA" b="1" dirty="0"/>
+          </a:p>
+          <a:p>
+            <a:pPr marL="457200" indent="-457200">
+              <a:buFont typeface="+mj-lt"/>
+              <a:buAutoNum type="arabicPeriod" startAt="3"/>
+            </a:pPr>
+            <a:r>
+              <a:rPr lang="en-CA" dirty="0"/>
+              <a:t>Number of BVs Simulated (Stochastic)</a:t>
+            </a:r>
+            <a:endParaRPr lang="en-US" dirty="0"/>
+          </a:p>
+          <a:p>
+            <a:pPr marL="932688" lvl="2" indent="-457200"/>
+            <a:r>
+              <a:rPr lang="en-CA" dirty="0"/>
+              <a:t>↑ the number of particles simulated = ↓ stochastic uncertainty = </a:t>
+            </a:r>
+            <a:r>
+              <a:rPr lang="en-CA" b="1" dirty="0"/>
+              <a:t>↑ simulation time </a:t>
+            </a:r>
+          </a:p>
+          <a:p>
+            <a:pPr marL="932688" lvl="2" indent="-457200"/>
+            <a:r>
+              <a:rPr lang="en-CA" b="1" dirty="0"/>
+              <a:t>Solution: </a:t>
+            </a:r>
+            <a:r>
+              <a:rPr lang="en-CA" dirty="0"/>
+              <a:t>Characterize the mean and std of the dose to the BVs as a function of BV number</a:t>
+            </a:r>
+            <a:endParaRPr lang="en-CA" b="1" dirty="0"/>
+          </a:p>
+        </p:txBody>
+      </p:sp>
+      <p:sp>
+        <p:nvSpPr>
+          <p:cNvPr id="4" name="Slide Number Placeholder 3">
+            <a:extLst>
+              <a:ext uri="{FF2B5EF4-FFF2-40B4-BE49-F238E27FC236}">
+                <a16:creationId xmlns:a16="http://schemas.microsoft.com/office/drawing/2014/main" id="{BB857D01-9AEA-DDB0-91F7-5C37DAEB1BF3}"/>
+              </a:ext>
+            </a:extLst>
+          </p:cNvPr>
+          <p:cNvSpPr>
+            <a:spLocks noGrp="1"/>
+          </p:cNvSpPr>
+          <p:nvPr>
+            <p:ph type="sldNum" sz="quarter" idx="12"/>
+          </p:nvPr>
+        </p:nvSpPr>
+        <p:spPr/>
+        <p:txBody>
+          <a:bodyPr/>
+          <a:lstStyle/>
+          <a:p>
+            <a:fld id="{4BAA6517-F367-4EB3-AFA6-036DD26A3111}" type="slidenum">
+              <a:rPr lang="en-CA" smtClean="0"/>
+              <a:t>11</a:t>
+            </a:fld>
+            <a:endParaRPr lang="en-CA"/>
+          </a:p>
+        </p:txBody>
+      </p:sp>
+    </p:spTree>
+    <p:extLst>
+      <p:ext uri="{BB962C8B-B14F-4D97-AF65-F5344CB8AC3E}">
+        <p14:creationId xmlns:p14="http://schemas.microsoft.com/office/powerpoint/2010/main" val="2511860013"/>
+      </p:ext>
+    </p:extLst>
+  </p:cSld>
+  <p:clrMapOvr>
+    <a:masterClrMapping/>
+  </p:clrMapOvr>
+</p:sld>
+</file>
+
+<file path=ppt/slides/slide12.xml><?xml version="1.0" encoding="utf-8"?>
+<p:sld xmlns:a="http://schemas.openxmlformats.org/drawingml/2006/main" xmlns:r="http://schemas.openxmlformats.org/officeDocument/2006/relationships" xmlns:p="http://schemas.openxmlformats.org/presentationml/2006/main">
+  <p:cSld>
+    <p:spTree>
+      <p:nvGrpSpPr>
+        <p:cNvPr id="1" name=""/>
+        <p:cNvGrpSpPr/>
+        <p:nvPr/>
+      </p:nvGrpSpPr>
+      <p:grpSpPr>
+        <a:xfrm>
+          <a:off x="0" y="0"/>
+          <a:ext cx="0" cy="0"/>
+          <a:chOff x="0" y="0"/>
+          <a:chExt cx="0" cy="0"/>
+        </a:xfrm>
+      </p:grpSpPr>
+      <p:sp>
+        <p:nvSpPr>
+          <p:cNvPr id="2" name="Title 1">
+            <a:extLst>
+              <a:ext uri="{FF2B5EF4-FFF2-40B4-BE49-F238E27FC236}">
+                <a16:creationId xmlns:a16="http://schemas.microsoft.com/office/drawing/2014/main" id="{1D7ED77B-6BF2-1082-1FF3-25EF66FDBBF6}"/>
+              </a:ext>
+            </a:extLst>
+          </p:cNvPr>
+          <p:cNvSpPr>
+            <a:spLocks noGrp="1"/>
+          </p:cNvSpPr>
+          <p:nvPr>
+            <p:ph type="ctrTitle"/>
+          </p:nvPr>
+        </p:nvSpPr>
+        <p:spPr/>
+        <p:txBody>
+          <a:bodyPr/>
+          <a:lstStyle/>
+          <a:p>
+            <a:r>
+              <a:rPr lang="en-CA" dirty="0"/>
+              <a:t>Thesis Chapter Outline</a:t>
+            </a:r>
+          </a:p>
+        </p:txBody>
+      </p:sp>
+      <p:sp>
+        <p:nvSpPr>
+          <p:cNvPr id="3" name="Subtitle 2">
+            <a:extLst>
+              <a:ext uri="{FF2B5EF4-FFF2-40B4-BE49-F238E27FC236}">
+                <a16:creationId xmlns:a16="http://schemas.microsoft.com/office/drawing/2014/main" id="{194D0E9B-5E79-2430-38F0-B7BA297DC9EE}"/>
+              </a:ext>
+            </a:extLst>
+          </p:cNvPr>
+          <p:cNvSpPr>
+            <a:spLocks noGrp="1"/>
+          </p:cNvSpPr>
+          <p:nvPr>
+            <p:ph type="subTitle" idx="1"/>
+          </p:nvPr>
+        </p:nvSpPr>
+        <p:spPr/>
+        <p:txBody>
+          <a:bodyPr/>
+          <a:lstStyle/>
+          <a:p>
+            <a:endParaRPr lang="en-CA"/>
+          </a:p>
+        </p:txBody>
+      </p:sp>
+      <p:sp>
+        <p:nvSpPr>
+          <p:cNvPr id="4" name="Slide Number Placeholder 3">
+            <a:extLst>
+              <a:ext uri="{FF2B5EF4-FFF2-40B4-BE49-F238E27FC236}">
+                <a16:creationId xmlns:a16="http://schemas.microsoft.com/office/drawing/2014/main" id="{FEA41E02-FA88-6CA8-C1F0-FA56D37E67C0}"/>
+              </a:ext>
+            </a:extLst>
+          </p:cNvPr>
+          <p:cNvSpPr>
+            <a:spLocks noGrp="1"/>
+          </p:cNvSpPr>
+          <p:nvPr>
+            <p:ph type="sldNum" sz="quarter" idx="12"/>
+          </p:nvPr>
+        </p:nvSpPr>
+        <p:spPr/>
+        <p:txBody>
+          <a:bodyPr/>
+          <a:lstStyle/>
+          <a:p>
+            <a:fld id="{4BAA6517-F367-4EB3-AFA6-036DD26A3111}" type="slidenum">
+              <a:rPr lang="en-CA" smtClean="0"/>
+              <a:t>12</a:t>
+            </a:fld>
+            <a:endParaRPr lang="en-CA"/>
+          </a:p>
+        </p:txBody>
+      </p:sp>
+    </p:spTree>
+    <p:extLst>
+      <p:ext uri="{BB962C8B-B14F-4D97-AF65-F5344CB8AC3E}">
+        <p14:creationId xmlns:p14="http://schemas.microsoft.com/office/powerpoint/2010/main" val="2890205982"/>
+      </p:ext>
+    </p:extLst>
+  </p:cSld>
+  <p:clrMapOvr>
+    <a:masterClrMapping/>
+  </p:clrMapOvr>
+</p:sld>
+</file>
+
+<file path=ppt/slides/slide13.xml><?xml version="1.0" encoding="utf-8"?>
+<p:sld xmlns:a="http://schemas.openxmlformats.org/drawingml/2006/main" xmlns:r="http://schemas.openxmlformats.org/officeDocument/2006/relationships" xmlns:p="http://schemas.openxmlformats.org/presentationml/2006/main">
+  <p:cSld>
+    <p:spTree>
+      <p:nvGrpSpPr>
+        <p:cNvPr id="1" name=""/>
+        <p:cNvGrpSpPr/>
+        <p:nvPr/>
+      </p:nvGrpSpPr>
+      <p:grpSpPr>
+        <a:xfrm>
+          <a:off x="0" y="0"/>
+          <a:ext cx="0" cy="0"/>
+          <a:chOff x="0" y="0"/>
+          <a:chExt cx="0" cy="0"/>
+        </a:xfrm>
+      </p:grpSpPr>
+      <p:sp>
+        <p:nvSpPr>
+          <p:cNvPr id="4" name="Slide Number Placeholder 3">
+            <a:extLst>
+              <a:ext uri="{FF2B5EF4-FFF2-40B4-BE49-F238E27FC236}">
+                <a16:creationId xmlns:a16="http://schemas.microsoft.com/office/drawing/2014/main" id="{B84047AA-E93E-D398-80E2-EE3511D69866}"/>
+              </a:ext>
+            </a:extLst>
+          </p:cNvPr>
+          <p:cNvSpPr>
+            <a:spLocks noGrp="1"/>
+          </p:cNvSpPr>
+          <p:nvPr>
+            <p:ph type="sldNum" sz="quarter" idx="12"/>
+          </p:nvPr>
+        </p:nvSpPr>
+        <p:spPr/>
+        <p:txBody>
+          <a:bodyPr/>
+          <a:lstStyle/>
+          <a:p>
+            <a:fld id="{4BAA6517-F367-4EB3-AFA6-036DD26A3111}" type="slidenum">
+              <a:rPr lang="en-CA" smtClean="0"/>
+              <a:t>13</a:t>
+            </a:fld>
+            <a:endParaRPr lang="en-CA"/>
+          </a:p>
+        </p:txBody>
+      </p:sp>
+      <p:sp>
+        <p:nvSpPr>
+          <p:cNvPr id="5" name="TextBox 4">
+            <a:extLst>
+              <a:ext uri="{FF2B5EF4-FFF2-40B4-BE49-F238E27FC236}">
+                <a16:creationId xmlns:a16="http://schemas.microsoft.com/office/drawing/2014/main" id="{64544A77-A0BB-FE78-6EC9-38299DB6DA6A}"/>
+              </a:ext>
+            </a:extLst>
+          </p:cNvPr>
+          <p:cNvSpPr txBox="1"/>
+          <p:nvPr/>
+        </p:nvSpPr>
+        <p:spPr>
+          <a:xfrm>
+            <a:off x="658761" y="462116"/>
+            <a:ext cx="11330039" cy="1015663"/>
+          </a:xfrm>
+          <a:prstGeom prst="rect">
+            <a:avLst/>
+          </a:prstGeom>
+          <a:noFill/>
+        </p:spPr>
+        <p:txBody>
+          <a:bodyPr wrap="square" rtlCol="0">
+            <a:spAutoFit/>
+          </a:bodyPr>
+          <a:lstStyle/>
+          <a:p>
+            <a:pPr marL="342900" indent="-342900">
+              <a:buFont typeface="+mj-lt"/>
+              <a:buAutoNum type="arabicPeriod"/>
+            </a:pPr>
+            <a:r>
+              <a:rPr lang="en-CA" sz="2000" dirty="0"/>
+              <a:t>Introduction to thesis</a:t>
+            </a:r>
+          </a:p>
+          <a:p>
+            <a:pPr marL="800100" lvl="1" indent="-342900">
+              <a:buFont typeface="Arial" panose="020B0604020202020204" pitchFamily="34" charset="0"/>
+              <a:buChar char="•"/>
+            </a:pPr>
+            <a:r>
+              <a:rPr lang="en-CA" sz="2000" dirty="0"/>
+              <a:t>Provide context for research and summarize the content of the thesis</a:t>
+            </a:r>
+          </a:p>
+          <a:p>
+            <a:pPr marL="342900" indent="-342900">
+              <a:buFont typeface="+mj-lt"/>
+              <a:buAutoNum type="arabicPeriod"/>
+            </a:pPr>
+            <a:endParaRPr lang="en-CA" sz="2000" dirty="0"/>
+          </a:p>
+        </p:txBody>
+      </p:sp>
+    </p:spTree>
+    <p:extLst>
+      <p:ext uri="{BB962C8B-B14F-4D97-AF65-F5344CB8AC3E}">
+        <p14:creationId xmlns:p14="http://schemas.microsoft.com/office/powerpoint/2010/main" val="114201971"/>
+      </p:ext>
+    </p:extLst>
+  </p:cSld>
+  <p:clrMapOvr>
+    <a:masterClrMapping/>
+  </p:clrMapOvr>
+</p:sld>
+</file>
+
+<file path=ppt/slides/slide14.xml><?xml version="1.0" encoding="utf-8"?>
+<p:sld xmlns:a="http://schemas.openxmlformats.org/drawingml/2006/main" xmlns:r="http://schemas.openxmlformats.org/officeDocument/2006/relationships" xmlns:p="http://schemas.openxmlformats.org/presentationml/2006/main">
+  <p:cSld>
+    <p:spTree>
+      <p:nvGrpSpPr>
+        <p:cNvPr id="1" name="">
+          <a:extLst>
+            <a:ext uri="{FF2B5EF4-FFF2-40B4-BE49-F238E27FC236}">
+              <a16:creationId xmlns:a16="http://schemas.microsoft.com/office/drawing/2014/main" id="{5CAE1E28-CDF4-5828-1932-32D2E1A7F92D}"/>
+            </a:ext>
+          </a:extLst>
+        </p:cNvPr>
+        <p:cNvGrpSpPr/>
+        <p:nvPr/>
+      </p:nvGrpSpPr>
+      <p:grpSpPr>
+        <a:xfrm>
+          <a:off x="0" y="0"/>
+          <a:ext cx="0" cy="0"/>
+          <a:chOff x="0" y="0"/>
+          <a:chExt cx="0" cy="0"/>
+        </a:xfrm>
+      </p:grpSpPr>
+      <p:sp>
+        <p:nvSpPr>
+          <p:cNvPr id="4" name="Slide Number Placeholder 3">
+            <a:extLst>
+              <a:ext uri="{FF2B5EF4-FFF2-40B4-BE49-F238E27FC236}">
+                <a16:creationId xmlns:a16="http://schemas.microsoft.com/office/drawing/2014/main" id="{9E176D73-A64A-39FC-DEE5-3BBD11738510}"/>
+              </a:ext>
+            </a:extLst>
+          </p:cNvPr>
+          <p:cNvSpPr>
+            <a:spLocks noGrp="1"/>
+          </p:cNvSpPr>
+          <p:nvPr>
+            <p:ph type="sldNum" sz="quarter" idx="12"/>
+          </p:nvPr>
+        </p:nvSpPr>
+        <p:spPr/>
+        <p:txBody>
+          <a:bodyPr/>
+          <a:lstStyle/>
+          <a:p>
+            <a:fld id="{4BAA6517-F367-4EB3-AFA6-036DD26A3111}" type="slidenum">
+              <a:rPr lang="en-CA" smtClean="0"/>
+              <a:t>14</a:t>
+            </a:fld>
+            <a:endParaRPr lang="en-CA"/>
+          </a:p>
+        </p:txBody>
+      </p:sp>
+      <p:sp>
+        <p:nvSpPr>
+          <p:cNvPr id="5" name="TextBox 4">
+            <a:extLst>
+              <a:ext uri="{FF2B5EF4-FFF2-40B4-BE49-F238E27FC236}">
+                <a16:creationId xmlns:a16="http://schemas.microsoft.com/office/drawing/2014/main" id="{C8736CB5-B843-E191-FCA6-12F750F5A63E}"/>
+              </a:ext>
+            </a:extLst>
+          </p:cNvPr>
+          <p:cNvSpPr txBox="1"/>
+          <p:nvPr/>
+        </p:nvSpPr>
+        <p:spPr>
+          <a:xfrm>
+            <a:off x="658761" y="462116"/>
+            <a:ext cx="11330039" cy="1938992"/>
+          </a:xfrm>
+          <a:prstGeom prst="rect">
+            <a:avLst/>
+          </a:prstGeom>
+          <a:noFill/>
+        </p:spPr>
+        <p:txBody>
+          <a:bodyPr wrap="square" rtlCol="0">
+            <a:spAutoFit/>
+          </a:bodyPr>
+          <a:lstStyle/>
+          <a:p>
+            <a:pPr marL="342900" indent="-342900">
+              <a:buFont typeface="+mj-lt"/>
+              <a:buAutoNum type="arabicPeriod"/>
+            </a:pPr>
+            <a:r>
+              <a:rPr lang="en-CA" sz="2000" dirty="0"/>
+              <a:t>Introduction to thesis</a:t>
+            </a:r>
+          </a:p>
+          <a:p>
+            <a:pPr marL="800100" lvl="1" indent="-342900">
+              <a:buFont typeface="Arial" panose="020B0604020202020204" pitchFamily="34" charset="0"/>
+              <a:buChar char="•"/>
+            </a:pPr>
+            <a:r>
+              <a:rPr lang="en-CA" sz="2000" dirty="0"/>
+              <a:t>Provide context for research and summarize the content of the thesis</a:t>
+            </a:r>
+          </a:p>
+          <a:p>
+            <a:pPr marL="342900" indent="-342900">
+              <a:buFont typeface="+mj-lt"/>
+              <a:buAutoNum type="arabicPeriod"/>
+            </a:pPr>
+            <a:r>
+              <a:rPr lang="en-CA" sz="2000" dirty="0"/>
+              <a:t>Introduction to Radiation Therapy </a:t>
+            </a:r>
+          </a:p>
+          <a:p>
+            <a:pPr marL="800100" lvl="1" indent="-342900">
+              <a:buFont typeface="Arial" panose="020B0604020202020204" pitchFamily="34" charset="0"/>
+              <a:buChar char="•"/>
+            </a:pPr>
+            <a:r>
+              <a:rPr lang="en-CA" sz="2000" dirty="0"/>
+              <a:t>Principles of RT </a:t>
+            </a:r>
+          </a:p>
+          <a:p>
+            <a:pPr marL="800100" lvl="1" indent="-342900">
+              <a:buFont typeface="Arial" panose="020B0604020202020204" pitchFamily="34" charset="0"/>
+              <a:buChar char="•"/>
+            </a:pPr>
+            <a:r>
+              <a:rPr lang="en-CA" sz="2000" dirty="0"/>
+              <a:t>Treatment Devices (Co-60 and Linac)</a:t>
+            </a:r>
+          </a:p>
+          <a:p>
+            <a:pPr marL="342900" indent="-342900">
+              <a:buFont typeface="+mj-lt"/>
+              <a:buAutoNum type="arabicPeriod"/>
+            </a:pPr>
+            <a:endParaRPr lang="en-CA" sz="2000" dirty="0"/>
+          </a:p>
+        </p:txBody>
+      </p:sp>
+    </p:spTree>
+    <p:extLst>
+      <p:ext uri="{BB962C8B-B14F-4D97-AF65-F5344CB8AC3E}">
+        <p14:creationId xmlns:p14="http://schemas.microsoft.com/office/powerpoint/2010/main" val="1854346456"/>
+      </p:ext>
+    </p:extLst>
+  </p:cSld>
+  <p:clrMapOvr>
+    <a:masterClrMapping/>
+  </p:clrMapOvr>
+</p:sld>
+</file>
+
+<file path=ppt/slides/slide15.xml><?xml version="1.0" encoding="utf-8"?>
+<p:sld xmlns:a="http://schemas.openxmlformats.org/drawingml/2006/main" xmlns:r="http://schemas.openxmlformats.org/officeDocument/2006/relationships" xmlns:p="http://schemas.openxmlformats.org/presentationml/2006/main">
+  <p:cSld>
+    <p:spTree>
+      <p:nvGrpSpPr>
+        <p:cNvPr id="1" name="">
+          <a:extLst>
+            <a:ext uri="{FF2B5EF4-FFF2-40B4-BE49-F238E27FC236}">
+              <a16:creationId xmlns:a16="http://schemas.microsoft.com/office/drawing/2014/main" id="{27B56909-D316-2C14-A198-FF28B389BCC7}"/>
+            </a:ext>
+          </a:extLst>
+        </p:cNvPr>
+        <p:cNvGrpSpPr/>
+        <p:nvPr/>
+      </p:nvGrpSpPr>
+      <p:grpSpPr>
+        <a:xfrm>
+          <a:off x="0" y="0"/>
+          <a:ext cx="0" cy="0"/>
+          <a:chOff x="0" y="0"/>
+          <a:chExt cx="0" cy="0"/>
+        </a:xfrm>
+      </p:grpSpPr>
+      <p:sp>
+        <p:nvSpPr>
+          <p:cNvPr id="4" name="Slide Number Placeholder 3">
+            <a:extLst>
+              <a:ext uri="{FF2B5EF4-FFF2-40B4-BE49-F238E27FC236}">
+                <a16:creationId xmlns:a16="http://schemas.microsoft.com/office/drawing/2014/main" id="{216230A5-3034-78E5-871E-60255914D2DF}"/>
+              </a:ext>
+            </a:extLst>
+          </p:cNvPr>
+          <p:cNvSpPr>
+            <a:spLocks noGrp="1"/>
+          </p:cNvSpPr>
+          <p:nvPr>
+            <p:ph type="sldNum" sz="quarter" idx="12"/>
+          </p:nvPr>
+        </p:nvSpPr>
+        <p:spPr/>
+        <p:txBody>
+          <a:bodyPr/>
+          <a:lstStyle/>
+          <a:p>
+            <a:fld id="{4BAA6517-F367-4EB3-AFA6-036DD26A3111}" type="slidenum">
+              <a:rPr lang="en-CA" smtClean="0"/>
+              <a:t>15</a:t>
+            </a:fld>
+            <a:endParaRPr lang="en-CA"/>
+          </a:p>
+        </p:txBody>
+      </p:sp>
+      <p:sp>
+        <p:nvSpPr>
+          <p:cNvPr id="5" name="TextBox 4">
+            <a:extLst>
+              <a:ext uri="{FF2B5EF4-FFF2-40B4-BE49-F238E27FC236}">
+                <a16:creationId xmlns:a16="http://schemas.microsoft.com/office/drawing/2014/main" id="{73F363CF-DC55-CC7F-A4F8-BFF50C00CA19}"/>
+              </a:ext>
+            </a:extLst>
+          </p:cNvPr>
+          <p:cNvSpPr txBox="1"/>
+          <p:nvPr/>
+        </p:nvSpPr>
+        <p:spPr>
+          <a:xfrm>
+            <a:off x="658761" y="462116"/>
+            <a:ext cx="11330039" cy="3170099"/>
+          </a:xfrm>
+          <a:prstGeom prst="rect">
+            <a:avLst/>
+          </a:prstGeom>
+          <a:noFill/>
+        </p:spPr>
+        <p:txBody>
+          <a:bodyPr wrap="square" rtlCol="0">
+            <a:spAutoFit/>
+          </a:bodyPr>
+          <a:lstStyle/>
+          <a:p>
+            <a:pPr marL="342900" indent="-342900">
+              <a:buFont typeface="+mj-lt"/>
+              <a:buAutoNum type="arabicPeriod"/>
+            </a:pPr>
+            <a:r>
+              <a:rPr lang="en-CA" sz="2000" dirty="0"/>
+              <a:t>Introduction to thesis</a:t>
+            </a:r>
+          </a:p>
+          <a:p>
+            <a:pPr marL="800100" lvl="1" indent="-342900">
+              <a:buFont typeface="Arial" panose="020B0604020202020204" pitchFamily="34" charset="0"/>
+              <a:buChar char="•"/>
+            </a:pPr>
+            <a:r>
+              <a:rPr lang="en-CA" sz="2000" dirty="0"/>
+              <a:t>Provide context for research and summarize the content of the thesis</a:t>
+            </a:r>
+          </a:p>
+          <a:p>
+            <a:pPr marL="342900" indent="-342900">
+              <a:buFont typeface="+mj-lt"/>
+              <a:buAutoNum type="arabicPeriod"/>
+            </a:pPr>
+            <a:r>
+              <a:rPr lang="en-CA" sz="2000" dirty="0"/>
+              <a:t>Introduction to Radiation Therapy </a:t>
+            </a:r>
+          </a:p>
+          <a:p>
+            <a:pPr marL="800100" lvl="1" indent="-342900">
+              <a:buFont typeface="Arial" panose="020B0604020202020204" pitchFamily="34" charset="0"/>
+              <a:buChar char="•"/>
+            </a:pPr>
+            <a:r>
+              <a:rPr lang="en-CA" sz="2000" dirty="0"/>
+              <a:t>Principles of RT </a:t>
+            </a:r>
+          </a:p>
+          <a:p>
+            <a:pPr marL="800100" lvl="1" indent="-342900">
+              <a:buFont typeface="Arial" panose="020B0604020202020204" pitchFamily="34" charset="0"/>
+              <a:buChar char="•"/>
+            </a:pPr>
+            <a:r>
+              <a:rPr lang="en-CA" sz="2000" dirty="0"/>
+              <a:t>Treatment Devices (Co-60 and Linac)</a:t>
+            </a:r>
+          </a:p>
+          <a:p>
+            <a:pPr marL="342900" indent="-342900">
+              <a:buFont typeface="+mj-lt"/>
+              <a:buAutoNum type="arabicPeriod"/>
+            </a:pPr>
+            <a:r>
+              <a:rPr lang="en-CA" sz="2000" dirty="0"/>
+              <a:t>Introduction to Total Body Irradiation</a:t>
+            </a:r>
+          </a:p>
+          <a:p>
+            <a:pPr marL="800100" lvl="1" indent="-342900">
+              <a:buFont typeface="Arial" panose="020B0604020202020204" pitchFamily="34" charset="0"/>
+              <a:buChar char="•"/>
+            </a:pPr>
+            <a:r>
+              <a:rPr lang="en-CA" sz="2000" dirty="0"/>
+              <a:t>Hematological malignancies</a:t>
+            </a:r>
+          </a:p>
+          <a:p>
+            <a:pPr marL="800100" lvl="1" indent="-342900">
+              <a:buFont typeface="Arial" panose="020B0604020202020204" pitchFamily="34" charset="0"/>
+              <a:buChar char="•"/>
+            </a:pPr>
+            <a:r>
+              <a:rPr lang="en-CA" sz="2000" dirty="0"/>
+              <a:t>History of TBI </a:t>
+            </a:r>
+          </a:p>
+          <a:p>
+            <a:pPr marL="800100" lvl="1" indent="-342900">
+              <a:buFont typeface="Arial" panose="020B0604020202020204" pitchFamily="34" charset="0"/>
+              <a:buChar char="•"/>
+            </a:pPr>
+            <a:r>
+              <a:rPr lang="en-CA" sz="2000" dirty="0"/>
+              <a:t>Modern TBI</a:t>
+            </a:r>
+          </a:p>
+          <a:p>
+            <a:pPr marL="342900" indent="-342900">
+              <a:buFont typeface="+mj-lt"/>
+              <a:buAutoNum type="arabicPeriod"/>
+            </a:pPr>
+            <a:endParaRPr lang="en-CA" sz="2000" dirty="0"/>
+          </a:p>
+        </p:txBody>
+      </p:sp>
+    </p:spTree>
+    <p:extLst>
+      <p:ext uri="{BB962C8B-B14F-4D97-AF65-F5344CB8AC3E}">
+        <p14:creationId xmlns:p14="http://schemas.microsoft.com/office/powerpoint/2010/main" val="3396822408"/>
+      </p:ext>
+    </p:extLst>
+  </p:cSld>
+  <p:clrMapOvr>
+    <a:masterClrMapping/>
+  </p:clrMapOvr>
+</p:sld>
+</file>
+
+<file path=ppt/slides/slide16.xml><?xml version="1.0" encoding="utf-8"?>
+<p:sld xmlns:a="http://schemas.openxmlformats.org/drawingml/2006/main" xmlns:r="http://schemas.openxmlformats.org/officeDocument/2006/relationships" xmlns:p="http://schemas.openxmlformats.org/presentationml/2006/main">
+  <p:cSld>
+    <p:spTree>
+      <p:nvGrpSpPr>
+        <p:cNvPr id="1" name="">
+          <a:extLst>
+            <a:ext uri="{FF2B5EF4-FFF2-40B4-BE49-F238E27FC236}">
+              <a16:creationId xmlns:a16="http://schemas.microsoft.com/office/drawing/2014/main" id="{546C970F-1B9A-0341-AA79-42626611209E}"/>
+            </a:ext>
+          </a:extLst>
+        </p:cNvPr>
+        <p:cNvGrpSpPr/>
+        <p:nvPr/>
+      </p:nvGrpSpPr>
+      <p:grpSpPr>
+        <a:xfrm>
+          <a:off x="0" y="0"/>
+          <a:ext cx="0" cy="0"/>
+          <a:chOff x="0" y="0"/>
+          <a:chExt cx="0" cy="0"/>
+        </a:xfrm>
+      </p:grpSpPr>
+      <p:sp>
+        <p:nvSpPr>
+          <p:cNvPr id="4" name="Slide Number Placeholder 3">
+            <a:extLst>
+              <a:ext uri="{FF2B5EF4-FFF2-40B4-BE49-F238E27FC236}">
+                <a16:creationId xmlns:a16="http://schemas.microsoft.com/office/drawing/2014/main" id="{CB795354-C190-6285-D056-5062B8173E90}"/>
+              </a:ext>
+            </a:extLst>
+          </p:cNvPr>
+          <p:cNvSpPr>
+            <a:spLocks noGrp="1"/>
+          </p:cNvSpPr>
+          <p:nvPr>
+            <p:ph type="sldNum" sz="quarter" idx="12"/>
+          </p:nvPr>
+        </p:nvSpPr>
+        <p:spPr/>
+        <p:txBody>
+          <a:bodyPr/>
+          <a:lstStyle/>
+          <a:p>
+            <a:fld id="{4BAA6517-F367-4EB3-AFA6-036DD26A3111}" type="slidenum">
+              <a:rPr lang="en-CA" smtClean="0"/>
+              <a:t>16</a:t>
+            </a:fld>
+            <a:endParaRPr lang="en-CA"/>
+          </a:p>
+        </p:txBody>
+      </p:sp>
+      <p:sp>
+        <p:nvSpPr>
+          <p:cNvPr id="5" name="TextBox 4">
+            <a:extLst>
+              <a:ext uri="{FF2B5EF4-FFF2-40B4-BE49-F238E27FC236}">
+                <a16:creationId xmlns:a16="http://schemas.microsoft.com/office/drawing/2014/main" id="{3739E709-3AC0-BBC0-BF82-662F13FA8C7E}"/>
+              </a:ext>
+            </a:extLst>
+          </p:cNvPr>
+          <p:cNvSpPr txBox="1"/>
+          <p:nvPr/>
+        </p:nvSpPr>
+        <p:spPr>
+          <a:xfrm>
+            <a:off x="658761" y="462116"/>
+            <a:ext cx="11330039" cy="3785652"/>
+          </a:xfrm>
+          <a:prstGeom prst="rect">
+            <a:avLst/>
+          </a:prstGeom>
+          <a:noFill/>
+        </p:spPr>
+        <p:txBody>
+          <a:bodyPr wrap="square" rtlCol="0">
+            <a:spAutoFit/>
+          </a:bodyPr>
+          <a:lstStyle/>
+          <a:p>
+            <a:pPr marL="342900" indent="-342900">
+              <a:buFont typeface="+mj-lt"/>
+              <a:buAutoNum type="arabicPeriod"/>
+            </a:pPr>
+            <a:r>
+              <a:rPr lang="en-CA" sz="2000" dirty="0"/>
+              <a:t>Introduction to thesis</a:t>
+            </a:r>
+          </a:p>
+          <a:p>
+            <a:pPr marL="800100" lvl="1" indent="-342900">
+              <a:buFont typeface="Arial" panose="020B0604020202020204" pitchFamily="34" charset="0"/>
+              <a:buChar char="•"/>
+            </a:pPr>
+            <a:r>
+              <a:rPr lang="en-CA" sz="2000" dirty="0"/>
+              <a:t>Provide context for research and summarize the content of the thesis</a:t>
+            </a:r>
+          </a:p>
+          <a:p>
+            <a:pPr marL="342900" indent="-342900">
+              <a:buFont typeface="+mj-lt"/>
+              <a:buAutoNum type="arabicPeriod"/>
+            </a:pPr>
+            <a:r>
+              <a:rPr lang="en-CA" sz="2000" dirty="0"/>
+              <a:t>Introduction to Radiation Therapy </a:t>
+            </a:r>
+          </a:p>
+          <a:p>
+            <a:pPr marL="800100" lvl="1" indent="-342900">
+              <a:buFont typeface="Arial" panose="020B0604020202020204" pitchFamily="34" charset="0"/>
+              <a:buChar char="•"/>
+            </a:pPr>
+            <a:r>
+              <a:rPr lang="en-CA" sz="2000" dirty="0"/>
+              <a:t>Principles of RT </a:t>
+            </a:r>
+          </a:p>
+          <a:p>
+            <a:pPr marL="800100" lvl="1" indent="-342900">
+              <a:buFont typeface="Arial" panose="020B0604020202020204" pitchFamily="34" charset="0"/>
+              <a:buChar char="•"/>
+            </a:pPr>
+            <a:r>
+              <a:rPr lang="en-CA" sz="2000" dirty="0"/>
+              <a:t>Treatment Devices (Co-60 and Linac)</a:t>
+            </a:r>
+          </a:p>
+          <a:p>
+            <a:pPr marL="342900" indent="-342900">
+              <a:buFont typeface="+mj-lt"/>
+              <a:buAutoNum type="arabicPeriod"/>
+            </a:pPr>
+            <a:r>
+              <a:rPr lang="en-CA" sz="2000" dirty="0"/>
+              <a:t>Introduction to Total Body Irradiation</a:t>
+            </a:r>
+          </a:p>
+          <a:p>
+            <a:pPr marL="800100" lvl="1" indent="-342900">
+              <a:buFont typeface="Arial" panose="020B0604020202020204" pitchFamily="34" charset="0"/>
+              <a:buChar char="•"/>
+            </a:pPr>
+            <a:r>
+              <a:rPr lang="en-CA" sz="2000" dirty="0"/>
+              <a:t>Hematological malignancies</a:t>
+            </a:r>
+          </a:p>
+          <a:p>
+            <a:pPr marL="800100" lvl="1" indent="-342900">
+              <a:buFont typeface="Arial" panose="020B0604020202020204" pitchFamily="34" charset="0"/>
+              <a:buChar char="•"/>
+            </a:pPr>
+            <a:r>
+              <a:rPr lang="en-CA" sz="2000" dirty="0"/>
+              <a:t>History of TBI </a:t>
+            </a:r>
+          </a:p>
+          <a:p>
+            <a:pPr marL="800100" lvl="1" indent="-342900">
+              <a:buFont typeface="Arial" panose="020B0604020202020204" pitchFamily="34" charset="0"/>
+              <a:buChar char="•"/>
+            </a:pPr>
+            <a:r>
+              <a:rPr lang="en-CA" sz="2000" dirty="0"/>
+              <a:t>Modern TBI</a:t>
+            </a:r>
+          </a:p>
+          <a:p>
+            <a:pPr marL="342900" indent="-342900">
+              <a:buFont typeface="+mj-lt"/>
+              <a:buAutoNum type="arabicPeriod"/>
+            </a:pPr>
+            <a:r>
+              <a:rPr lang="en-CA" sz="2000" dirty="0"/>
+              <a:t>Developing a Whole-Body Blood Flow Model for Dosimetric Applications</a:t>
+            </a:r>
+          </a:p>
+          <a:p>
+            <a:pPr marL="800100" lvl="1" indent="-342900">
+              <a:buFont typeface="Arial" panose="020B0604020202020204" pitchFamily="34" charset="0"/>
+              <a:buChar char="•"/>
+            </a:pPr>
+            <a:r>
+              <a:rPr lang="en-CA" sz="2000" dirty="0"/>
+              <a:t>Intro to Blood Flow Modelling </a:t>
+            </a:r>
+          </a:p>
+          <a:p>
+            <a:pPr marL="800100" lvl="1" indent="-342900">
+              <a:buFont typeface="Arial" panose="020B0604020202020204" pitchFamily="34" charset="0"/>
+              <a:buChar char="•"/>
+            </a:pPr>
+            <a:r>
+              <a:rPr lang="en-CA" sz="2000" dirty="0"/>
+              <a:t>Methodology, Results, Discussion</a:t>
+            </a:r>
+          </a:p>
+        </p:txBody>
+      </p:sp>
+    </p:spTree>
+    <p:extLst>
+      <p:ext uri="{BB962C8B-B14F-4D97-AF65-F5344CB8AC3E}">
+        <p14:creationId xmlns:p14="http://schemas.microsoft.com/office/powerpoint/2010/main" val="4232539398"/>
+      </p:ext>
+    </p:extLst>
+  </p:cSld>
+  <p:clrMapOvr>
+    <a:masterClrMapping/>
+  </p:clrMapOvr>
+</p:sld>
+</file>
+
+<file path=ppt/slides/slide17.xml><?xml version="1.0" encoding="utf-8"?>
+<p:sld xmlns:a="http://schemas.openxmlformats.org/drawingml/2006/main" xmlns:r="http://schemas.openxmlformats.org/officeDocument/2006/relationships" xmlns:p="http://schemas.openxmlformats.org/presentationml/2006/main">
+  <p:cSld>
+    <p:spTree>
+      <p:nvGrpSpPr>
+        <p:cNvPr id="1" name="">
+          <a:extLst>
+            <a:ext uri="{FF2B5EF4-FFF2-40B4-BE49-F238E27FC236}">
+              <a16:creationId xmlns:a16="http://schemas.microsoft.com/office/drawing/2014/main" id="{CAF265EF-ACBA-ED1B-8505-7BFCB32EA543}"/>
+            </a:ext>
+          </a:extLst>
+        </p:cNvPr>
+        <p:cNvGrpSpPr/>
+        <p:nvPr/>
+      </p:nvGrpSpPr>
+      <p:grpSpPr>
+        <a:xfrm>
+          <a:off x="0" y="0"/>
+          <a:ext cx="0" cy="0"/>
+          <a:chOff x="0" y="0"/>
+          <a:chExt cx="0" cy="0"/>
+        </a:xfrm>
+      </p:grpSpPr>
+      <p:sp>
+        <p:nvSpPr>
+          <p:cNvPr id="4" name="Slide Number Placeholder 3">
+            <a:extLst>
+              <a:ext uri="{FF2B5EF4-FFF2-40B4-BE49-F238E27FC236}">
+                <a16:creationId xmlns:a16="http://schemas.microsoft.com/office/drawing/2014/main" id="{6D9F4CF4-3CFA-1DD1-4A01-CD5228FD6CCB}"/>
+              </a:ext>
+            </a:extLst>
+          </p:cNvPr>
+          <p:cNvSpPr>
+            <a:spLocks noGrp="1"/>
+          </p:cNvSpPr>
+          <p:nvPr>
+            <p:ph type="sldNum" sz="quarter" idx="12"/>
+          </p:nvPr>
+        </p:nvSpPr>
+        <p:spPr/>
+        <p:txBody>
+          <a:bodyPr/>
+          <a:lstStyle/>
+          <a:p>
+            <a:fld id="{4BAA6517-F367-4EB3-AFA6-036DD26A3111}" type="slidenum">
+              <a:rPr lang="en-CA" smtClean="0"/>
+              <a:t>17</a:t>
+            </a:fld>
+            <a:endParaRPr lang="en-CA"/>
+          </a:p>
+        </p:txBody>
+      </p:sp>
+      <p:sp>
+        <p:nvSpPr>
+          <p:cNvPr id="5" name="TextBox 4">
+            <a:extLst>
+              <a:ext uri="{FF2B5EF4-FFF2-40B4-BE49-F238E27FC236}">
+                <a16:creationId xmlns:a16="http://schemas.microsoft.com/office/drawing/2014/main" id="{EF101632-1576-40E0-45F2-2B0E5B1D4F74}"/>
+              </a:ext>
+            </a:extLst>
+          </p:cNvPr>
+          <p:cNvSpPr txBox="1"/>
+          <p:nvPr/>
+        </p:nvSpPr>
+        <p:spPr>
+          <a:xfrm>
+            <a:off x="658761" y="462116"/>
+            <a:ext cx="11330039" cy="4708981"/>
+          </a:xfrm>
+          <a:prstGeom prst="rect">
+            <a:avLst/>
+          </a:prstGeom>
+          <a:noFill/>
+        </p:spPr>
+        <p:txBody>
+          <a:bodyPr wrap="square" rtlCol="0">
+            <a:spAutoFit/>
+          </a:bodyPr>
+          <a:lstStyle/>
+          <a:p>
+            <a:pPr marL="342900" indent="-342900">
+              <a:buFont typeface="+mj-lt"/>
+              <a:buAutoNum type="arabicPeriod"/>
+            </a:pPr>
+            <a:r>
+              <a:rPr lang="en-CA" sz="2000" dirty="0"/>
+              <a:t>Introduction to thesis</a:t>
+            </a:r>
+          </a:p>
+          <a:p>
+            <a:pPr marL="800100" lvl="1" indent="-342900">
+              <a:buFont typeface="Arial" panose="020B0604020202020204" pitchFamily="34" charset="0"/>
+              <a:buChar char="•"/>
+            </a:pPr>
+            <a:r>
+              <a:rPr lang="en-CA" sz="2000" dirty="0"/>
+              <a:t>Provide context for research and summarize the content of the thesis</a:t>
+            </a:r>
+          </a:p>
+          <a:p>
+            <a:pPr marL="342900" indent="-342900">
+              <a:buFont typeface="+mj-lt"/>
+              <a:buAutoNum type="arabicPeriod"/>
+            </a:pPr>
+            <a:r>
+              <a:rPr lang="en-CA" sz="2000" dirty="0"/>
+              <a:t>Introduction to Radiation Therapy </a:t>
+            </a:r>
+          </a:p>
+          <a:p>
+            <a:pPr marL="800100" lvl="1" indent="-342900">
+              <a:buFont typeface="Arial" panose="020B0604020202020204" pitchFamily="34" charset="0"/>
+              <a:buChar char="•"/>
+            </a:pPr>
+            <a:r>
+              <a:rPr lang="en-CA" sz="2000" dirty="0"/>
+              <a:t>Principles of RT </a:t>
+            </a:r>
+          </a:p>
+          <a:p>
+            <a:pPr marL="800100" lvl="1" indent="-342900">
+              <a:buFont typeface="Arial" panose="020B0604020202020204" pitchFamily="34" charset="0"/>
+              <a:buChar char="•"/>
+            </a:pPr>
+            <a:r>
+              <a:rPr lang="en-CA" sz="2000" dirty="0"/>
+              <a:t>Treatment Devices (Co-60 and Linac)</a:t>
+            </a:r>
+          </a:p>
+          <a:p>
+            <a:pPr marL="342900" indent="-342900">
+              <a:buFont typeface="+mj-lt"/>
+              <a:buAutoNum type="arabicPeriod"/>
+            </a:pPr>
+            <a:r>
+              <a:rPr lang="en-CA" sz="2000" dirty="0"/>
+              <a:t>Introduction to Total Body Irradiation</a:t>
+            </a:r>
+          </a:p>
+          <a:p>
+            <a:pPr marL="800100" lvl="1" indent="-342900">
+              <a:buFont typeface="Arial" panose="020B0604020202020204" pitchFamily="34" charset="0"/>
+              <a:buChar char="•"/>
+            </a:pPr>
+            <a:r>
+              <a:rPr lang="en-CA" sz="2000" dirty="0"/>
+              <a:t>Hematological malignancies</a:t>
+            </a:r>
+          </a:p>
+          <a:p>
+            <a:pPr marL="800100" lvl="1" indent="-342900">
+              <a:buFont typeface="Arial" panose="020B0604020202020204" pitchFamily="34" charset="0"/>
+              <a:buChar char="•"/>
+            </a:pPr>
+            <a:r>
+              <a:rPr lang="en-CA" sz="2000" dirty="0"/>
+              <a:t>History of TBI </a:t>
+            </a:r>
+          </a:p>
+          <a:p>
+            <a:pPr marL="800100" lvl="1" indent="-342900">
+              <a:buFont typeface="Arial" panose="020B0604020202020204" pitchFamily="34" charset="0"/>
+              <a:buChar char="•"/>
+            </a:pPr>
+            <a:r>
+              <a:rPr lang="en-CA" sz="2000" dirty="0"/>
+              <a:t>Modern TBI</a:t>
+            </a:r>
+          </a:p>
+          <a:p>
+            <a:pPr marL="342900" indent="-342900">
+              <a:buFont typeface="+mj-lt"/>
+              <a:buAutoNum type="arabicPeriod"/>
+            </a:pPr>
+            <a:r>
+              <a:rPr lang="en-CA" sz="2000" dirty="0"/>
+              <a:t>Developing a Whole-Body Blood Flow Model for Dosimetric Applications</a:t>
+            </a:r>
+          </a:p>
+          <a:p>
+            <a:pPr marL="800100" lvl="1" indent="-342900">
+              <a:buFont typeface="Arial" panose="020B0604020202020204" pitchFamily="34" charset="0"/>
+              <a:buChar char="•"/>
+            </a:pPr>
+            <a:r>
+              <a:rPr lang="en-CA" sz="2000" dirty="0"/>
+              <a:t>Intro to Blood Flow Modelling </a:t>
+            </a:r>
+          </a:p>
+          <a:p>
+            <a:pPr marL="800100" lvl="1" indent="-342900">
+              <a:buFont typeface="Arial" panose="020B0604020202020204" pitchFamily="34" charset="0"/>
+              <a:buChar char="•"/>
+            </a:pPr>
+            <a:r>
+              <a:rPr lang="en-CA" sz="2000" dirty="0"/>
+              <a:t>Methodology, Results, Discussion</a:t>
+            </a:r>
+          </a:p>
+          <a:p>
+            <a:pPr marL="342900" indent="-342900">
+              <a:buFont typeface="+mj-lt"/>
+              <a:buAutoNum type="arabicPeriod"/>
+            </a:pPr>
+            <a:r>
+              <a:rPr lang="en-CA" sz="2000" dirty="0"/>
+              <a:t>Determining Dose to the Circulating Blood</a:t>
+            </a:r>
+          </a:p>
+          <a:p>
+            <a:pPr marL="800100" lvl="1" indent="-342900">
+              <a:buFont typeface="Arial" panose="020B0604020202020204" pitchFamily="34" charset="0"/>
+              <a:buChar char="•"/>
+            </a:pPr>
+            <a:r>
+              <a:rPr lang="en-CA" sz="2000" dirty="0"/>
+              <a:t>Intro to Monte Carlo, </a:t>
+            </a:r>
+            <a:r>
+              <a:rPr lang="en-CA" sz="2000" dirty="0" err="1"/>
+              <a:t>EGSnrc</a:t>
+            </a:r>
+            <a:r>
+              <a:rPr lang="en-CA" sz="2000" dirty="0"/>
+              <a:t> and 4ddose</a:t>
+            </a:r>
+          </a:p>
+          <a:p>
+            <a:pPr marL="800100" lvl="1" indent="-342900">
+              <a:buFont typeface="Arial" panose="020B0604020202020204" pitchFamily="34" charset="0"/>
+              <a:buChar char="•"/>
+            </a:pPr>
+            <a:r>
+              <a:rPr lang="en-CA" sz="2000" dirty="0"/>
+              <a:t>Methodology, Results, Discussion</a:t>
+            </a:r>
+          </a:p>
+        </p:txBody>
+      </p:sp>
+    </p:spTree>
+    <p:extLst>
+      <p:ext uri="{BB962C8B-B14F-4D97-AF65-F5344CB8AC3E}">
+        <p14:creationId xmlns:p14="http://schemas.microsoft.com/office/powerpoint/2010/main" val="2993256661"/>
+      </p:ext>
+    </p:extLst>
+  </p:cSld>
+  <p:clrMapOvr>
+    <a:masterClrMapping/>
+  </p:clrMapOvr>
+</p:sld>
+</file>
+
+<file path=ppt/slides/slide18.xml><?xml version="1.0" encoding="utf-8"?>
+<p:sld xmlns:a="http://schemas.openxmlformats.org/drawingml/2006/main" xmlns:r="http://schemas.openxmlformats.org/officeDocument/2006/relationships" xmlns:p="http://schemas.openxmlformats.org/presentationml/2006/main">
+  <p:cSld>
+    <p:spTree>
+      <p:nvGrpSpPr>
+        <p:cNvPr id="1" name="">
+          <a:extLst>
+            <a:ext uri="{FF2B5EF4-FFF2-40B4-BE49-F238E27FC236}">
+              <a16:creationId xmlns:a16="http://schemas.microsoft.com/office/drawing/2014/main" id="{6ED28489-79B6-FB87-9AEE-77403C3F51BA}"/>
+            </a:ext>
+          </a:extLst>
+        </p:cNvPr>
+        <p:cNvGrpSpPr/>
+        <p:nvPr/>
+      </p:nvGrpSpPr>
+      <p:grpSpPr>
+        <a:xfrm>
+          <a:off x="0" y="0"/>
+          <a:ext cx="0" cy="0"/>
+          <a:chOff x="0" y="0"/>
+          <a:chExt cx="0" cy="0"/>
+        </a:xfrm>
+      </p:grpSpPr>
+      <p:sp>
+        <p:nvSpPr>
+          <p:cNvPr id="4" name="Slide Number Placeholder 3">
+            <a:extLst>
+              <a:ext uri="{FF2B5EF4-FFF2-40B4-BE49-F238E27FC236}">
+                <a16:creationId xmlns:a16="http://schemas.microsoft.com/office/drawing/2014/main" id="{CA68B34F-1D75-5862-5F16-6C5773F00904}"/>
+              </a:ext>
+            </a:extLst>
+          </p:cNvPr>
+          <p:cNvSpPr>
+            <a:spLocks noGrp="1"/>
+          </p:cNvSpPr>
+          <p:nvPr>
+            <p:ph type="sldNum" sz="quarter" idx="12"/>
+          </p:nvPr>
+        </p:nvSpPr>
+        <p:spPr/>
+        <p:txBody>
+          <a:bodyPr/>
+          <a:lstStyle/>
+          <a:p>
+            <a:fld id="{4BAA6517-F367-4EB3-AFA6-036DD26A3111}" type="slidenum">
+              <a:rPr lang="en-CA" smtClean="0"/>
+              <a:t>18</a:t>
+            </a:fld>
+            <a:endParaRPr lang="en-CA"/>
+          </a:p>
+        </p:txBody>
+      </p:sp>
+      <p:sp>
+        <p:nvSpPr>
+          <p:cNvPr id="5" name="TextBox 4">
+            <a:extLst>
+              <a:ext uri="{FF2B5EF4-FFF2-40B4-BE49-F238E27FC236}">
+                <a16:creationId xmlns:a16="http://schemas.microsoft.com/office/drawing/2014/main" id="{C45CCEE3-7A38-FBB3-7D09-43C0D2D5FF21}"/>
+              </a:ext>
+            </a:extLst>
+          </p:cNvPr>
+          <p:cNvSpPr txBox="1"/>
+          <p:nvPr/>
+        </p:nvSpPr>
+        <p:spPr>
+          <a:xfrm>
+            <a:off x="658761" y="462116"/>
+            <a:ext cx="11330039" cy="5324535"/>
+          </a:xfrm>
+          <a:prstGeom prst="rect">
+            <a:avLst/>
+          </a:prstGeom>
+          <a:noFill/>
+        </p:spPr>
+        <p:txBody>
+          <a:bodyPr wrap="square" rtlCol="0">
+            <a:spAutoFit/>
+          </a:bodyPr>
+          <a:lstStyle/>
+          <a:p>
+            <a:pPr marL="342900" indent="-342900">
+              <a:buFont typeface="+mj-lt"/>
+              <a:buAutoNum type="arabicPeriod"/>
+            </a:pPr>
+            <a:r>
+              <a:rPr lang="en-CA" sz="2000" dirty="0"/>
+              <a:t>Introduction to thesis</a:t>
+            </a:r>
+          </a:p>
+          <a:p>
+            <a:pPr marL="800100" lvl="1" indent="-342900">
+              <a:buFont typeface="Arial" panose="020B0604020202020204" pitchFamily="34" charset="0"/>
+              <a:buChar char="•"/>
+            </a:pPr>
+            <a:r>
+              <a:rPr lang="en-CA" sz="2000" dirty="0"/>
+              <a:t>Provide context for research and summarize the content of the thesis</a:t>
+            </a:r>
+          </a:p>
+          <a:p>
+            <a:pPr marL="342900" indent="-342900">
+              <a:buFont typeface="+mj-lt"/>
+              <a:buAutoNum type="arabicPeriod"/>
+            </a:pPr>
+            <a:r>
+              <a:rPr lang="en-CA" sz="2000" dirty="0"/>
+              <a:t>Introduction to Radiation Therapy </a:t>
+            </a:r>
+          </a:p>
+          <a:p>
+            <a:pPr marL="800100" lvl="1" indent="-342900">
+              <a:buFont typeface="Arial" panose="020B0604020202020204" pitchFamily="34" charset="0"/>
+              <a:buChar char="•"/>
+            </a:pPr>
+            <a:r>
+              <a:rPr lang="en-CA" sz="2000" dirty="0"/>
+              <a:t>Principles of RT </a:t>
+            </a:r>
+          </a:p>
+          <a:p>
+            <a:pPr marL="800100" lvl="1" indent="-342900">
+              <a:buFont typeface="Arial" panose="020B0604020202020204" pitchFamily="34" charset="0"/>
+              <a:buChar char="•"/>
+            </a:pPr>
+            <a:r>
+              <a:rPr lang="en-CA" sz="2000" dirty="0"/>
+              <a:t>Treatment Devices (Co-60 and Linac)</a:t>
+            </a:r>
+          </a:p>
+          <a:p>
+            <a:pPr marL="342900" indent="-342900">
+              <a:buFont typeface="+mj-lt"/>
+              <a:buAutoNum type="arabicPeriod"/>
+            </a:pPr>
+            <a:r>
+              <a:rPr lang="en-CA" sz="2000" dirty="0"/>
+              <a:t>Introduction to Total Body Irradiation</a:t>
+            </a:r>
+          </a:p>
+          <a:p>
+            <a:pPr marL="800100" lvl="1" indent="-342900">
+              <a:buFont typeface="Arial" panose="020B0604020202020204" pitchFamily="34" charset="0"/>
+              <a:buChar char="•"/>
+            </a:pPr>
+            <a:r>
+              <a:rPr lang="en-CA" sz="2000" dirty="0"/>
+              <a:t>Hematological malignancies</a:t>
+            </a:r>
+          </a:p>
+          <a:p>
+            <a:pPr marL="800100" lvl="1" indent="-342900">
+              <a:buFont typeface="Arial" panose="020B0604020202020204" pitchFamily="34" charset="0"/>
+              <a:buChar char="•"/>
+            </a:pPr>
+            <a:r>
+              <a:rPr lang="en-CA" sz="2000" dirty="0"/>
+              <a:t>History of TBI </a:t>
+            </a:r>
+          </a:p>
+          <a:p>
+            <a:pPr marL="800100" lvl="1" indent="-342900">
+              <a:buFont typeface="Arial" panose="020B0604020202020204" pitchFamily="34" charset="0"/>
+              <a:buChar char="•"/>
+            </a:pPr>
+            <a:r>
+              <a:rPr lang="en-CA" sz="2000" dirty="0"/>
+              <a:t>Modern TBI</a:t>
+            </a:r>
+          </a:p>
+          <a:p>
+            <a:pPr marL="342900" indent="-342900">
+              <a:buFont typeface="+mj-lt"/>
+              <a:buAutoNum type="arabicPeriod"/>
+            </a:pPr>
+            <a:r>
+              <a:rPr lang="en-CA" sz="2000" dirty="0"/>
+              <a:t>Developing a Whole-Body Blood Flow Model for Dosimetric Applications</a:t>
+            </a:r>
+          </a:p>
+          <a:p>
+            <a:pPr marL="800100" lvl="1" indent="-342900">
+              <a:buFont typeface="Arial" panose="020B0604020202020204" pitchFamily="34" charset="0"/>
+              <a:buChar char="•"/>
+            </a:pPr>
+            <a:r>
+              <a:rPr lang="en-CA" sz="2000" dirty="0"/>
+              <a:t>Intro to Blood Flow Modelling </a:t>
+            </a:r>
+          </a:p>
+          <a:p>
+            <a:pPr marL="800100" lvl="1" indent="-342900">
+              <a:buFont typeface="Arial" panose="020B0604020202020204" pitchFamily="34" charset="0"/>
+              <a:buChar char="•"/>
+            </a:pPr>
+            <a:r>
+              <a:rPr lang="en-CA" sz="2000" dirty="0"/>
+              <a:t>Methodology, Results, Discussion</a:t>
+            </a:r>
+          </a:p>
+          <a:p>
+            <a:pPr marL="342900" indent="-342900">
+              <a:buFont typeface="+mj-lt"/>
+              <a:buAutoNum type="arabicPeriod"/>
+            </a:pPr>
+            <a:r>
+              <a:rPr lang="en-CA" sz="2000" dirty="0"/>
+              <a:t>Determining Dose to the Circulating Blood</a:t>
+            </a:r>
+          </a:p>
+          <a:p>
+            <a:pPr marL="800100" lvl="1" indent="-342900">
+              <a:buFont typeface="Arial" panose="020B0604020202020204" pitchFamily="34" charset="0"/>
+              <a:buChar char="•"/>
+            </a:pPr>
+            <a:r>
+              <a:rPr lang="en-CA" sz="2000" dirty="0"/>
+              <a:t>Intro to Monte Carlo, </a:t>
+            </a:r>
+            <a:r>
+              <a:rPr lang="en-CA" sz="2000" dirty="0" err="1"/>
+              <a:t>EGSnrc</a:t>
+            </a:r>
+            <a:r>
+              <a:rPr lang="en-CA" sz="2000" dirty="0"/>
+              <a:t> and 4ddose</a:t>
+            </a:r>
+          </a:p>
+          <a:p>
+            <a:pPr marL="800100" lvl="1" indent="-342900">
+              <a:buFont typeface="Arial" panose="020B0604020202020204" pitchFamily="34" charset="0"/>
+              <a:buChar char="•"/>
+            </a:pPr>
+            <a:r>
+              <a:rPr lang="en-CA" sz="2000" dirty="0"/>
+              <a:t>Methodology, Results, Discussion</a:t>
+            </a:r>
+          </a:p>
+          <a:p>
+            <a:pPr marL="342900" indent="-342900">
+              <a:buFont typeface="+mj-lt"/>
+              <a:buAutoNum type="arabicPeriod"/>
+            </a:pPr>
+            <a:r>
+              <a:rPr lang="en-CA" sz="2000" dirty="0"/>
+              <a:t>Comparing Dose to Blood Achieved by Various TBI Delivery Methods</a:t>
+            </a:r>
+          </a:p>
+          <a:p>
+            <a:pPr marL="800100" lvl="1" indent="-342900">
+              <a:buFont typeface="Arial" panose="020B0604020202020204" pitchFamily="34" charset="0"/>
+              <a:buChar char="•"/>
+            </a:pPr>
+            <a:r>
+              <a:rPr lang="en-CA" sz="2000" dirty="0"/>
+              <a:t>Methods, Results, Discussion</a:t>
+            </a:r>
+          </a:p>
+        </p:txBody>
+      </p:sp>
+    </p:spTree>
+    <p:extLst>
+      <p:ext uri="{BB962C8B-B14F-4D97-AF65-F5344CB8AC3E}">
+        <p14:creationId xmlns:p14="http://schemas.microsoft.com/office/powerpoint/2010/main" val="4283616096"/>
+      </p:ext>
+    </p:extLst>
+  </p:cSld>
+  <p:clrMapOvr>
+    <a:masterClrMapping/>
+  </p:clrMapOvr>
+</p:sld>
+</file>
+
+<file path=ppt/slides/slide19.xml><?xml version="1.0" encoding="utf-8"?>
+<p:sld xmlns:a="http://schemas.openxmlformats.org/drawingml/2006/main" xmlns:r="http://schemas.openxmlformats.org/officeDocument/2006/relationships" xmlns:p="http://schemas.openxmlformats.org/presentationml/2006/main">
+  <p:cSld>
+    <p:spTree>
+      <p:nvGrpSpPr>
+        <p:cNvPr id="1" name="">
+          <a:extLst>
+            <a:ext uri="{FF2B5EF4-FFF2-40B4-BE49-F238E27FC236}">
+              <a16:creationId xmlns:a16="http://schemas.microsoft.com/office/drawing/2014/main" id="{C9D5E25F-0FEA-C46A-D7B5-0D75365D7D40}"/>
+            </a:ext>
+          </a:extLst>
+        </p:cNvPr>
+        <p:cNvGrpSpPr/>
+        <p:nvPr/>
+      </p:nvGrpSpPr>
+      <p:grpSpPr>
+        <a:xfrm>
+          <a:off x="0" y="0"/>
+          <a:ext cx="0" cy="0"/>
+          <a:chOff x="0" y="0"/>
+          <a:chExt cx="0" cy="0"/>
+        </a:xfrm>
+      </p:grpSpPr>
+      <p:sp>
+        <p:nvSpPr>
+          <p:cNvPr id="4" name="Slide Number Placeholder 3">
+            <a:extLst>
+              <a:ext uri="{FF2B5EF4-FFF2-40B4-BE49-F238E27FC236}">
+                <a16:creationId xmlns:a16="http://schemas.microsoft.com/office/drawing/2014/main" id="{FF6A47ED-8994-B80A-6EB4-1D1067446462}"/>
+              </a:ext>
+            </a:extLst>
+          </p:cNvPr>
+          <p:cNvSpPr>
+            <a:spLocks noGrp="1"/>
+          </p:cNvSpPr>
+          <p:nvPr>
+            <p:ph type="sldNum" sz="quarter" idx="12"/>
+          </p:nvPr>
+        </p:nvSpPr>
+        <p:spPr/>
+        <p:txBody>
+          <a:bodyPr/>
+          <a:lstStyle/>
+          <a:p>
+            <a:fld id="{4BAA6517-F367-4EB3-AFA6-036DD26A3111}" type="slidenum">
+              <a:rPr lang="en-CA" smtClean="0"/>
+              <a:t>19</a:t>
+            </a:fld>
+            <a:endParaRPr lang="en-CA"/>
+          </a:p>
+        </p:txBody>
+      </p:sp>
+      <p:sp>
+        <p:nvSpPr>
+          <p:cNvPr id="5" name="TextBox 4">
+            <a:extLst>
+              <a:ext uri="{FF2B5EF4-FFF2-40B4-BE49-F238E27FC236}">
+                <a16:creationId xmlns:a16="http://schemas.microsoft.com/office/drawing/2014/main" id="{BB7C81F9-6851-EBEF-4A33-D2BC824DFF4C}"/>
+              </a:ext>
+            </a:extLst>
+          </p:cNvPr>
+          <p:cNvSpPr txBox="1"/>
+          <p:nvPr/>
+        </p:nvSpPr>
+        <p:spPr>
+          <a:xfrm>
+            <a:off x="658761" y="462116"/>
+            <a:ext cx="11330039" cy="5632311"/>
+          </a:xfrm>
+          <a:prstGeom prst="rect">
+            <a:avLst/>
+          </a:prstGeom>
+          <a:noFill/>
+        </p:spPr>
+        <p:txBody>
+          <a:bodyPr wrap="square" rtlCol="0">
+            <a:spAutoFit/>
+          </a:bodyPr>
+          <a:lstStyle/>
+          <a:p>
+            <a:pPr marL="342900" indent="-342900">
+              <a:buFont typeface="+mj-lt"/>
+              <a:buAutoNum type="arabicPeriod"/>
+            </a:pPr>
+            <a:r>
+              <a:rPr lang="en-CA" sz="2000" dirty="0"/>
+              <a:t>Introduction to thesis</a:t>
+            </a:r>
+          </a:p>
+          <a:p>
+            <a:pPr marL="800100" lvl="1" indent="-342900">
+              <a:buFont typeface="Arial" panose="020B0604020202020204" pitchFamily="34" charset="0"/>
+              <a:buChar char="•"/>
+            </a:pPr>
+            <a:r>
+              <a:rPr lang="en-CA" sz="2000" dirty="0"/>
+              <a:t>Provide context for research and summarize the content of the thesis</a:t>
+            </a:r>
+          </a:p>
+          <a:p>
+            <a:pPr marL="342900" indent="-342900">
+              <a:buFont typeface="+mj-lt"/>
+              <a:buAutoNum type="arabicPeriod"/>
+            </a:pPr>
+            <a:r>
+              <a:rPr lang="en-CA" sz="2000" dirty="0"/>
+              <a:t>Introduction to Radiation Therapy </a:t>
+            </a:r>
+          </a:p>
+          <a:p>
+            <a:pPr marL="800100" lvl="1" indent="-342900">
+              <a:buFont typeface="Arial" panose="020B0604020202020204" pitchFamily="34" charset="0"/>
+              <a:buChar char="•"/>
+            </a:pPr>
+            <a:r>
+              <a:rPr lang="en-CA" sz="2000" dirty="0"/>
+              <a:t>Principles of RT </a:t>
+            </a:r>
+          </a:p>
+          <a:p>
+            <a:pPr marL="800100" lvl="1" indent="-342900">
+              <a:buFont typeface="Arial" panose="020B0604020202020204" pitchFamily="34" charset="0"/>
+              <a:buChar char="•"/>
+            </a:pPr>
+            <a:r>
+              <a:rPr lang="en-CA" sz="2000" dirty="0"/>
+              <a:t>Treatment Devices (Co-60 and Linac)</a:t>
+            </a:r>
+          </a:p>
+          <a:p>
+            <a:pPr marL="342900" indent="-342900">
+              <a:buFont typeface="+mj-lt"/>
+              <a:buAutoNum type="arabicPeriod"/>
+            </a:pPr>
+            <a:r>
+              <a:rPr lang="en-CA" sz="2000" dirty="0"/>
+              <a:t>Introduction to Total Body Irradiation</a:t>
+            </a:r>
+          </a:p>
+          <a:p>
+            <a:pPr marL="800100" lvl="1" indent="-342900">
+              <a:buFont typeface="Arial" panose="020B0604020202020204" pitchFamily="34" charset="0"/>
+              <a:buChar char="•"/>
+            </a:pPr>
+            <a:r>
+              <a:rPr lang="en-CA" sz="2000" dirty="0"/>
+              <a:t>Hematological malignancies</a:t>
+            </a:r>
+          </a:p>
+          <a:p>
+            <a:pPr marL="800100" lvl="1" indent="-342900">
+              <a:buFont typeface="Arial" panose="020B0604020202020204" pitchFamily="34" charset="0"/>
+              <a:buChar char="•"/>
+            </a:pPr>
+            <a:r>
+              <a:rPr lang="en-CA" sz="2000" dirty="0"/>
+              <a:t>History of TBI </a:t>
+            </a:r>
+          </a:p>
+          <a:p>
+            <a:pPr marL="800100" lvl="1" indent="-342900">
+              <a:buFont typeface="Arial" panose="020B0604020202020204" pitchFamily="34" charset="0"/>
+              <a:buChar char="•"/>
+            </a:pPr>
+            <a:r>
+              <a:rPr lang="en-CA" sz="2000" dirty="0"/>
+              <a:t>Modern TBI</a:t>
+            </a:r>
+          </a:p>
+          <a:p>
+            <a:pPr marL="342900" indent="-342900">
+              <a:buFont typeface="+mj-lt"/>
+              <a:buAutoNum type="arabicPeriod"/>
+            </a:pPr>
+            <a:r>
+              <a:rPr lang="en-CA" sz="2000" dirty="0"/>
+              <a:t>Developing a Whole-Body Blood Flow Model for Dosimetric Applications</a:t>
+            </a:r>
+          </a:p>
+          <a:p>
+            <a:pPr marL="800100" lvl="1" indent="-342900">
+              <a:buFont typeface="Arial" panose="020B0604020202020204" pitchFamily="34" charset="0"/>
+              <a:buChar char="•"/>
+            </a:pPr>
+            <a:r>
+              <a:rPr lang="en-CA" sz="2000" dirty="0"/>
+              <a:t>Intro to Blood Flow Modelling </a:t>
+            </a:r>
+          </a:p>
+          <a:p>
+            <a:pPr marL="800100" lvl="1" indent="-342900">
+              <a:buFont typeface="Arial" panose="020B0604020202020204" pitchFamily="34" charset="0"/>
+              <a:buChar char="•"/>
+            </a:pPr>
+            <a:r>
+              <a:rPr lang="en-CA" sz="2000" dirty="0"/>
+              <a:t>Methodology, Results, Discussion</a:t>
+            </a:r>
+          </a:p>
+          <a:p>
+            <a:pPr marL="342900" indent="-342900">
+              <a:buFont typeface="+mj-lt"/>
+              <a:buAutoNum type="arabicPeriod"/>
+            </a:pPr>
+            <a:r>
+              <a:rPr lang="en-CA" sz="2000" dirty="0"/>
+              <a:t>Determining Dose to the Circulating Blood</a:t>
+            </a:r>
+          </a:p>
+          <a:p>
+            <a:pPr marL="800100" lvl="1" indent="-342900">
+              <a:buFont typeface="Arial" panose="020B0604020202020204" pitchFamily="34" charset="0"/>
+              <a:buChar char="•"/>
+            </a:pPr>
+            <a:r>
+              <a:rPr lang="en-CA" sz="2000" dirty="0"/>
+              <a:t>Intro to Monte Carlo, </a:t>
+            </a:r>
+            <a:r>
+              <a:rPr lang="en-CA" sz="2000" dirty="0" err="1"/>
+              <a:t>EGSnrc</a:t>
+            </a:r>
+            <a:r>
+              <a:rPr lang="en-CA" sz="2000" dirty="0"/>
+              <a:t> and 4ddose</a:t>
+            </a:r>
+          </a:p>
+          <a:p>
+            <a:pPr marL="800100" lvl="1" indent="-342900">
+              <a:buFont typeface="Arial" panose="020B0604020202020204" pitchFamily="34" charset="0"/>
+              <a:buChar char="•"/>
+            </a:pPr>
+            <a:r>
+              <a:rPr lang="en-CA" sz="2000" dirty="0"/>
+              <a:t>Methodology, Results, Discussion</a:t>
+            </a:r>
+          </a:p>
+          <a:p>
+            <a:pPr marL="342900" indent="-342900">
+              <a:buFont typeface="+mj-lt"/>
+              <a:buAutoNum type="arabicPeriod"/>
+            </a:pPr>
+            <a:r>
+              <a:rPr lang="en-CA" sz="2000" dirty="0"/>
+              <a:t>Comparing Dose to Blood Achieved by Various TBI Delivery Methods</a:t>
+            </a:r>
+          </a:p>
+          <a:p>
+            <a:pPr marL="800100" lvl="1" indent="-342900">
+              <a:buFont typeface="Arial" panose="020B0604020202020204" pitchFamily="34" charset="0"/>
+              <a:buChar char="•"/>
+            </a:pPr>
+            <a:r>
+              <a:rPr lang="en-CA" sz="2000" dirty="0"/>
+              <a:t>Methods, Results, Discussion</a:t>
+            </a:r>
+          </a:p>
+          <a:p>
+            <a:pPr marL="342900" indent="-342900">
+              <a:buFont typeface="+mj-lt"/>
+              <a:buAutoNum type="arabicPeriod"/>
+            </a:pPr>
+            <a:r>
+              <a:rPr lang="en-CA" sz="2000" dirty="0"/>
+              <a:t>Future Work and Conclusion </a:t>
+            </a:r>
+          </a:p>
+        </p:txBody>
+      </p:sp>
+    </p:spTree>
+    <p:extLst>
+      <p:ext uri="{BB962C8B-B14F-4D97-AF65-F5344CB8AC3E}">
+        <p14:creationId xmlns:p14="http://schemas.microsoft.com/office/powerpoint/2010/main" val="3878184757"/>
+      </p:ext>
+    </p:extLst>
+  </p:cSld>
+  <p:clrMapOvr>
+    <a:masterClrMapping/>
+  </p:clrMapOvr>
+</p:sld>
+</file>
+
+<file path=ppt/slides/slide2.xml><?xml version="1.0" encoding="utf-8"?>
+<p:sld xmlns:a="http://schemas.openxmlformats.org/drawingml/2006/main" xmlns:r="http://schemas.openxmlformats.org/officeDocument/2006/relationships" xmlns:p="http://schemas.openxmlformats.org/presentationml/2006/main">
+  <p:cSld>
+    <p:spTree>
+      <p:nvGrpSpPr>
+        <p:cNvPr id="1" name=""/>
+        <p:cNvGrpSpPr/>
+        <p:nvPr/>
+      </p:nvGrpSpPr>
+      <p:grpSpPr>
+        <a:xfrm>
+          <a:off x="0" y="0"/>
+          <a:ext cx="0" cy="0"/>
+          <a:chOff x="0" y="0"/>
+          <a:chExt cx="0" cy="0"/>
+        </a:xfrm>
+      </p:grpSpPr>
+      <p:sp>
+        <p:nvSpPr>
+          <p:cNvPr id="2" name="Title 1">
+            <a:extLst>
+              <a:ext uri="{FF2B5EF4-FFF2-40B4-BE49-F238E27FC236}">
+                <a16:creationId xmlns:a16="http://schemas.microsoft.com/office/drawing/2014/main" id="{E2B5876F-7321-AB1C-1311-FBA15F99094A}"/>
+              </a:ext>
+            </a:extLst>
+          </p:cNvPr>
+          <p:cNvSpPr>
+            <a:spLocks noGrp="1"/>
+          </p:cNvSpPr>
+          <p:nvPr>
+            <p:ph type="title"/>
+          </p:nvPr>
+        </p:nvSpPr>
+        <p:spPr/>
+        <p:txBody>
+          <a:bodyPr/>
+          <a:lstStyle/>
+          <a:p>
+            <a:r>
+              <a:rPr lang="en-CA" dirty="0"/>
+              <a:t>Agenda</a:t>
+            </a:r>
+          </a:p>
+        </p:txBody>
+      </p:sp>
+      <p:sp>
+        <p:nvSpPr>
+          <p:cNvPr id="3" name="Content Placeholder 2">
+            <a:extLst>
+              <a:ext uri="{FF2B5EF4-FFF2-40B4-BE49-F238E27FC236}">
+                <a16:creationId xmlns:a16="http://schemas.microsoft.com/office/drawing/2014/main" id="{EF9EB8A0-D3E8-31F9-6054-2B57F998BA0E}"/>
+              </a:ext>
+            </a:extLst>
+          </p:cNvPr>
+          <p:cNvSpPr>
+            <a:spLocks noGrp="1"/>
+          </p:cNvSpPr>
+          <p:nvPr>
+            <p:ph idx="1"/>
+          </p:nvPr>
+        </p:nvSpPr>
+        <p:spPr/>
+        <p:txBody>
+          <a:bodyPr/>
+          <a:lstStyle/>
+          <a:p>
+            <a:pPr>
+              <a:buFont typeface="Arial" panose="020B0604020202020204" pitchFamily="34" charset="0"/>
+              <a:buChar char="•"/>
+            </a:pPr>
+            <a:r>
+              <a:rPr lang="en-CA" sz="2400" dirty="0"/>
+              <a:t>Review Thesis Question</a:t>
+            </a:r>
+          </a:p>
+          <a:p>
+            <a:pPr>
+              <a:buFont typeface="Arial" panose="020B0604020202020204" pitchFamily="34" charset="0"/>
+              <a:buChar char="•"/>
+            </a:pPr>
+            <a:r>
+              <a:rPr lang="en-CA" sz="2400" dirty="0"/>
+              <a:t>Present Current Methodology: Determining Dose to Circulating Blood </a:t>
+            </a:r>
+          </a:p>
+          <a:p>
+            <a:pPr>
+              <a:buFont typeface="Arial" panose="020B0604020202020204" pitchFamily="34" charset="0"/>
+              <a:buChar char="•"/>
+            </a:pPr>
+            <a:r>
+              <a:rPr lang="en-CA" sz="2400" dirty="0"/>
+              <a:t>Review Thesis Chapters: </a:t>
+            </a:r>
+            <a:r>
+              <a:rPr lang="en-CA" sz="2400" i="1" dirty="0"/>
+              <a:t>Seeking Committee Feedback</a:t>
+            </a:r>
+            <a:endParaRPr lang="en-CA" sz="2400" dirty="0"/>
+          </a:p>
+          <a:p>
+            <a:pPr>
+              <a:buFont typeface="Arial" panose="020B0604020202020204" pitchFamily="34" charset="0"/>
+              <a:buChar char="•"/>
+            </a:pPr>
+            <a:r>
+              <a:rPr lang="en-CA" sz="2400" dirty="0"/>
+              <a:t>Graduation Timeline </a:t>
+            </a:r>
+          </a:p>
+          <a:p>
+            <a:pPr>
+              <a:buFont typeface="Arial" panose="020B0604020202020204" pitchFamily="34" charset="0"/>
+              <a:buChar char="•"/>
+            </a:pPr>
+            <a:r>
+              <a:rPr lang="en-CA" sz="2400" dirty="0"/>
+              <a:t>Questions and Discussion</a:t>
+            </a:r>
+          </a:p>
+          <a:p>
+            <a:pPr marL="0" indent="0">
+              <a:buNone/>
+            </a:pPr>
+            <a:r>
+              <a:rPr lang="en-CA" dirty="0"/>
+              <a:t>	</a:t>
+            </a:r>
+          </a:p>
+        </p:txBody>
+      </p:sp>
+      <p:sp>
+        <p:nvSpPr>
+          <p:cNvPr id="4" name="Slide Number Placeholder 3">
+            <a:extLst>
+              <a:ext uri="{FF2B5EF4-FFF2-40B4-BE49-F238E27FC236}">
+                <a16:creationId xmlns:a16="http://schemas.microsoft.com/office/drawing/2014/main" id="{555C3F1F-161F-9BD6-659F-A051976AFDBF}"/>
+              </a:ext>
+            </a:extLst>
+          </p:cNvPr>
+          <p:cNvSpPr>
+            <a:spLocks noGrp="1"/>
+          </p:cNvSpPr>
+          <p:nvPr>
+            <p:ph type="sldNum" sz="quarter" idx="12"/>
+          </p:nvPr>
+        </p:nvSpPr>
+        <p:spPr/>
+        <p:txBody>
+          <a:bodyPr/>
+          <a:lstStyle/>
+          <a:p>
+            <a:fld id="{4BAA6517-F367-4EB3-AFA6-036DD26A3111}" type="slidenum">
+              <a:rPr lang="en-CA" smtClean="0"/>
+              <a:t>2</a:t>
+            </a:fld>
+            <a:endParaRPr lang="en-CA"/>
+          </a:p>
+        </p:txBody>
+      </p:sp>
+    </p:spTree>
+    <p:extLst>
+      <p:ext uri="{BB962C8B-B14F-4D97-AF65-F5344CB8AC3E}">
+        <p14:creationId xmlns:p14="http://schemas.microsoft.com/office/powerpoint/2010/main" val="3278247"/>
+      </p:ext>
+    </p:extLst>
+  </p:cSld>
+  <p:clrMapOvr>
+    <a:masterClrMapping/>
+  </p:clrMapOvr>
+</p:sld>
+</file>
+
+<file path=ppt/slides/slide20.xml><?xml version="1.0" encoding="utf-8"?>
+<p:sld xmlns:a="http://schemas.openxmlformats.org/drawingml/2006/main" xmlns:r="http://schemas.openxmlformats.org/officeDocument/2006/relationships" xmlns:p="http://schemas.openxmlformats.org/presentationml/2006/main">
+  <p:cSld>
+    <p:spTree>
+      <p:nvGrpSpPr>
+        <p:cNvPr id="1" name=""/>
+        <p:cNvGrpSpPr/>
+        <p:nvPr/>
+      </p:nvGrpSpPr>
+      <p:grpSpPr>
+        <a:xfrm>
+          <a:off x="0" y="0"/>
+          <a:ext cx="0" cy="0"/>
+          <a:chOff x="0" y="0"/>
+          <a:chExt cx="0" cy="0"/>
+        </a:xfrm>
+      </p:grpSpPr>
+      <p:sp>
+        <p:nvSpPr>
+          <p:cNvPr id="2" name="Title 1">
+            <a:extLst>
+              <a:ext uri="{FF2B5EF4-FFF2-40B4-BE49-F238E27FC236}">
+                <a16:creationId xmlns:a16="http://schemas.microsoft.com/office/drawing/2014/main" id="{D9737106-55F0-72D6-E38C-FA3C695471AB}"/>
+              </a:ext>
+            </a:extLst>
+          </p:cNvPr>
+          <p:cNvSpPr>
+            <a:spLocks noGrp="1"/>
+          </p:cNvSpPr>
+          <p:nvPr>
+            <p:ph type="ctrTitle"/>
+          </p:nvPr>
+        </p:nvSpPr>
+        <p:spPr/>
+        <p:txBody>
+          <a:bodyPr/>
+          <a:lstStyle/>
+          <a:p>
+            <a:r>
+              <a:rPr lang="en-CA" dirty="0"/>
+              <a:t>Timeline Update</a:t>
+            </a:r>
+          </a:p>
+        </p:txBody>
+      </p:sp>
+      <p:sp>
+        <p:nvSpPr>
+          <p:cNvPr id="3" name="Subtitle 2">
+            <a:extLst>
+              <a:ext uri="{FF2B5EF4-FFF2-40B4-BE49-F238E27FC236}">
+                <a16:creationId xmlns:a16="http://schemas.microsoft.com/office/drawing/2014/main" id="{169E0A3F-B2A3-D9DA-E0B8-BAD60169EABE}"/>
+              </a:ext>
+            </a:extLst>
+          </p:cNvPr>
+          <p:cNvSpPr>
+            <a:spLocks noGrp="1"/>
+          </p:cNvSpPr>
+          <p:nvPr>
+            <p:ph type="subTitle" idx="1"/>
+          </p:nvPr>
+        </p:nvSpPr>
+        <p:spPr/>
+        <p:txBody>
+          <a:bodyPr/>
+          <a:lstStyle/>
+          <a:p>
+            <a:endParaRPr lang="en-CA"/>
+          </a:p>
+        </p:txBody>
+      </p:sp>
+      <p:sp>
+        <p:nvSpPr>
+          <p:cNvPr id="4" name="Slide Number Placeholder 3">
+            <a:extLst>
+              <a:ext uri="{FF2B5EF4-FFF2-40B4-BE49-F238E27FC236}">
+                <a16:creationId xmlns:a16="http://schemas.microsoft.com/office/drawing/2014/main" id="{00849765-9749-4810-C154-9B68EF62C4A6}"/>
+              </a:ext>
+            </a:extLst>
+          </p:cNvPr>
+          <p:cNvSpPr>
+            <a:spLocks noGrp="1"/>
+          </p:cNvSpPr>
+          <p:nvPr>
+            <p:ph type="sldNum" sz="quarter" idx="12"/>
+          </p:nvPr>
+        </p:nvSpPr>
+        <p:spPr/>
+        <p:txBody>
+          <a:bodyPr/>
+          <a:lstStyle/>
+          <a:p>
+            <a:fld id="{4BAA6517-F367-4EB3-AFA6-036DD26A3111}" type="slidenum">
+              <a:rPr lang="en-CA" smtClean="0"/>
+              <a:t>20</a:t>
+            </a:fld>
+            <a:endParaRPr lang="en-CA"/>
+          </a:p>
+        </p:txBody>
+      </p:sp>
+    </p:spTree>
+    <p:extLst>
+      <p:ext uri="{BB962C8B-B14F-4D97-AF65-F5344CB8AC3E}">
+        <p14:creationId xmlns:p14="http://schemas.microsoft.com/office/powerpoint/2010/main" val="879825129"/>
+      </p:ext>
+    </p:extLst>
+  </p:cSld>
+  <p:clrMapOvr>
+    <a:masterClrMapping/>
+  </p:clrMapOvr>
+</p:sld>
+</file>
+
+<file path=ppt/slides/slide21.xml><?xml version="1.0" encoding="utf-8"?>
+<p:sld xmlns:a="http://schemas.openxmlformats.org/drawingml/2006/main" xmlns:r="http://schemas.openxmlformats.org/officeDocument/2006/relationships" xmlns:p="http://schemas.openxmlformats.org/presentationml/2006/main">
+  <p:cSld>
+    <p:spTree>
+      <p:nvGrpSpPr>
+        <p:cNvPr id="1" name=""/>
+        <p:cNvGrpSpPr/>
+        <p:nvPr/>
+      </p:nvGrpSpPr>
+      <p:grpSpPr>
+        <a:xfrm>
+          <a:off x="0" y="0"/>
+          <a:ext cx="0" cy="0"/>
+          <a:chOff x="0" y="0"/>
+          <a:chExt cx="0" cy="0"/>
+        </a:xfrm>
+      </p:grpSpPr>
+      <p:sp>
+        <p:nvSpPr>
+          <p:cNvPr id="2" name="Title 1">
+            <a:extLst>
+              <a:ext uri="{FF2B5EF4-FFF2-40B4-BE49-F238E27FC236}">
+                <a16:creationId xmlns:a16="http://schemas.microsoft.com/office/drawing/2014/main" id="{BA45A03C-ECD6-AD9B-70ED-91279B51D2AD}"/>
+              </a:ext>
+            </a:extLst>
+          </p:cNvPr>
+          <p:cNvSpPr>
+            <a:spLocks noGrp="1"/>
+          </p:cNvSpPr>
+          <p:nvPr>
+            <p:ph type="title"/>
+          </p:nvPr>
+        </p:nvSpPr>
+        <p:spPr/>
+        <p:txBody>
+          <a:bodyPr/>
+          <a:lstStyle/>
+          <a:p>
+            <a:r>
+              <a:rPr lang="en-CA" dirty="0"/>
+              <a:t>Timeline</a:t>
+            </a:r>
+          </a:p>
+        </p:txBody>
+      </p:sp>
+      <p:sp>
+        <p:nvSpPr>
+          <p:cNvPr id="3" name="Content Placeholder 2">
+            <a:extLst>
+              <a:ext uri="{FF2B5EF4-FFF2-40B4-BE49-F238E27FC236}">
+                <a16:creationId xmlns:a16="http://schemas.microsoft.com/office/drawing/2014/main" id="{9EADE98C-AF71-3EC2-1AA2-48A07353A80B}"/>
+              </a:ext>
+            </a:extLst>
+          </p:cNvPr>
+          <p:cNvSpPr>
+            <a:spLocks noGrp="1"/>
+          </p:cNvSpPr>
+          <p:nvPr>
+            <p:ph idx="1"/>
+          </p:nvPr>
+        </p:nvSpPr>
+        <p:spPr/>
+        <p:txBody>
+          <a:bodyPr/>
+          <a:lstStyle/>
+          <a:p>
+            <a:r>
+              <a:rPr lang="en-CA" dirty="0"/>
+              <a:t>Began September 2020 -&gt; Deadline would be August 2026</a:t>
+            </a:r>
+          </a:p>
+          <a:p>
+            <a:r>
+              <a:rPr lang="en-CA" dirty="0"/>
+              <a:t>Request an extension to this deadline (2 term)</a:t>
+            </a:r>
+          </a:p>
+          <a:p>
+            <a:endParaRPr lang="en-CA" dirty="0"/>
+          </a:p>
+          <a:p>
+            <a:pPr marL="0" indent="0">
+              <a:buNone/>
+            </a:pPr>
+            <a:endParaRPr lang="en-CA" dirty="0"/>
+          </a:p>
+          <a:p>
+            <a:pPr marL="0" indent="0">
+              <a:buNone/>
+            </a:pPr>
+            <a:endParaRPr lang="en-CA" dirty="0"/>
+          </a:p>
+          <a:p>
+            <a:pPr lvl="1">
+              <a:buFont typeface="Arial" panose="020B0604020202020204" pitchFamily="34" charset="0"/>
+              <a:buChar char="•"/>
+            </a:pPr>
+            <a:endParaRPr lang="en-CA" dirty="0"/>
+          </a:p>
+          <a:p>
+            <a:endParaRPr lang="en-CA" dirty="0"/>
+          </a:p>
+        </p:txBody>
+      </p:sp>
+      <p:sp>
+        <p:nvSpPr>
+          <p:cNvPr id="4" name="Slide Number Placeholder 3">
+            <a:extLst>
+              <a:ext uri="{FF2B5EF4-FFF2-40B4-BE49-F238E27FC236}">
+                <a16:creationId xmlns:a16="http://schemas.microsoft.com/office/drawing/2014/main" id="{EF5D6FCF-7365-8B41-934E-10F60AE6CACF}"/>
+              </a:ext>
+            </a:extLst>
+          </p:cNvPr>
+          <p:cNvSpPr>
+            <a:spLocks noGrp="1"/>
+          </p:cNvSpPr>
+          <p:nvPr>
+            <p:ph type="sldNum" sz="quarter" idx="12"/>
+          </p:nvPr>
+        </p:nvSpPr>
+        <p:spPr/>
+        <p:txBody>
+          <a:bodyPr/>
+          <a:lstStyle/>
+          <a:p>
+            <a:fld id="{4BAA6517-F367-4EB3-AFA6-036DD26A3111}" type="slidenum">
+              <a:rPr lang="en-CA" smtClean="0"/>
+              <a:t>21</a:t>
+            </a:fld>
+            <a:endParaRPr lang="en-CA"/>
+          </a:p>
+        </p:txBody>
+      </p:sp>
+    </p:spTree>
+    <p:extLst>
+      <p:ext uri="{BB962C8B-B14F-4D97-AF65-F5344CB8AC3E}">
+        <p14:creationId xmlns:p14="http://schemas.microsoft.com/office/powerpoint/2010/main" val="1766117193"/>
+      </p:ext>
+    </p:extLst>
+  </p:cSld>
+  <p:clrMapOvr>
+    <a:masterClrMapping/>
+  </p:clrMapOvr>
+</p:sld>
+</file>
+
+<file path=ppt/slides/slide22.xml><?xml version="1.0" encoding="utf-8"?>
+<p:sld xmlns:a="http://schemas.openxmlformats.org/drawingml/2006/main" xmlns:r="http://schemas.openxmlformats.org/officeDocument/2006/relationships" xmlns:p="http://schemas.openxmlformats.org/presentationml/2006/main">
+  <p:cSld>
+    <p:spTree>
+      <p:nvGrpSpPr>
+        <p:cNvPr id="1" name=""/>
+        <p:cNvGrpSpPr/>
+        <p:nvPr/>
+      </p:nvGrpSpPr>
+      <p:grpSpPr>
+        <a:xfrm>
+          <a:off x="0" y="0"/>
+          <a:ext cx="0" cy="0"/>
+          <a:chOff x="0" y="0"/>
+          <a:chExt cx="0" cy="0"/>
+        </a:xfrm>
+      </p:grpSpPr>
+      <p:sp>
+        <p:nvSpPr>
+          <p:cNvPr id="2" name="Title 1">
+            <a:extLst>
+              <a:ext uri="{FF2B5EF4-FFF2-40B4-BE49-F238E27FC236}">
+                <a16:creationId xmlns:a16="http://schemas.microsoft.com/office/drawing/2014/main" id="{E278983D-EBB6-683C-94AD-CAED3B799030}"/>
+              </a:ext>
+            </a:extLst>
+          </p:cNvPr>
+          <p:cNvSpPr>
+            <a:spLocks noGrp="1"/>
+          </p:cNvSpPr>
+          <p:nvPr>
+            <p:ph type="title"/>
+          </p:nvPr>
+        </p:nvSpPr>
+        <p:spPr/>
+        <p:txBody>
+          <a:bodyPr/>
+          <a:lstStyle/>
+          <a:p>
+            <a:r>
+              <a:rPr lang="en-CA" dirty="0"/>
+              <a:t>Thank you.</a:t>
+            </a:r>
+          </a:p>
+        </p:txBody>
+      </p:sp>
+      <p:sp>
+        <p:nvSpPr>
+          <p:cNvPr id="3" name="Slide Number Placeholder 2">
+            <a:extLst>
+              <a:ext uri="{FF2B5EF4-FFF2-40B4-BE49-F238E27FC236}">
+                <a16:creationId xmlns:a16="http://schemas.microsoft.com/office/drawing/2014/main" id="{07CB0118-3CE2-03A0-E7ED-D643FAD19369}"/>
+              </a:ext>
+            </a:extLst>
+          </p:cNvPr>
+          <p:cNvSpPr>
+            <a:spLocks noGrp="1"/>
+          </p:cNvSpPr>
+          <p:nvPr>
+            <p:ph type="sldNum" sz="quarter" idx="12"/>
+          </p:nvPr>
+        </p:nvSpPr>
+        <p:spPr/>
+        <p:txBody>
+          <a:bodyPr/>
+          <a:lstStyle/>
+          <a:p>
+            <a:fld id="{4BAA6517-F367-4EB3-AFA6-036DD26A3111}" type="slidenum">
+              <a:rPr lang="en-CA" smtClean="0"/>
+              <a:t>22</a:t>
+            </a:fld>
+            <a:endParaRPr lang="en-CA"/>
+          </a:p>
+        </p:txBody>
+      </p:sp>
+    </p:spTree>
+    <p:extLst>
+      <p:ext uri="{BB962C8B-B14F-4D97-AF65-F5344CB8AC3E}">
+        <p14:creationId xmlns:p14="http://schemas.microsoft.com/office/powerpoint/2010/main" val="4088362699"/>
+      </p:ext>
+    </p:extLst>
+  </p:cSld>
+  <p:clrMapOvr>
+    <a:masterClrMapping/>
+  </p:clrMapOvr>
+</p:sld>
+</file>
+
+<file path=ppt/slides/slide23.xml><?xml version="1.0" encoding="utf-8"?>
+<p:sld xmlns:a="http://schemas.openxmlformats.org/drawingml/2006/main" xmlns:r="http://schemas.openxmlformats.org/officeDocument/2006/relationships" xmlns:p="http://schemas.openxmlformats.org/presentationml/2006/main">
+  <p:cSld>
+    <p:spTree>
+      <p:nvGrpSpPr>
         <p:cNvPr id="1" name=""/>
         <p:cNvGrpSpPr/>
         <p:nvPr/>
@@ -7470,7 +10114,7 @@
           <a:p>
             <a:fld id="{4BAA6517-F367-4EB3-AFA6-036DD26A3111}" type="slidenum">
               <a:rPr lang="en-CA" smtClean="0"/>
-              <a:t>10</a:t>
+              <a:t>23</a:t>
             </a:fld>
             <a:endParaRPr lang="en-CA"/>
           </a:p>
@@ -7594,7 +10238,523 @@
 </p:sld>
 </file>
 
-<file path=ppt/slides/slide11.xml><?xml version="1.0" encoding="utf-8"?>
+<file path=ppt/slides/slide24.xml><?xml version="1.0" encoding="utf-8"?>
+<p:sld xmlns:a="http://schemas.openxmlformats.org/drawingml/2006/main" xmlns:r="http://schemas.openxmlformats.org/officeDocument/2006/relationships" xmlns:p="http://schemas.openxmlformats.org/presentationml/2006/main">
+  <p:cSld>
+    <p:spTree>
+      <p:nvGrpSpPr>
+        <p:cNvPr id="1" name="">
+          <a:extLst>
+            <a:ext uri="{FF2B5EF4-FFF2-40B4-BE49-F238E27FC236}">
+              <a16:creationId xmlns:a16="http://schemas.microsoft.com/office/drawing/2014/main" id="{D0DB8130-042B-B4E1-C9AA-68BC013FB4D1}"/>
+            </a:ext>
+          </a:extLst>
+        </p:cNvPr>
+        <p:cNvGrpSpPr/>
+        <p:nvPr/>
+      </p:nvGrpSpPr>
+      <p:grpSpPr>
+        <a:xfrm>
+          <a:off x="0" y="0"/>
+          <a:ext cx="0" cy="0"/>
+          <a:chOff x="0" y="0"/>
+          <a:chExt cx="0" cy="0"/>
+        </a:xfrm>
+      </p:grpSpPr>
+      <p:sp>
+        <p:nvSpPr>
+          <p:cNvPr id="6" name="Slide Number Placeholder 5">
+            <a:extLst>
+              <a:ext uri="{FF2B5EF4-FFF2-40B4-BE49-F238E27FC236}">
+                <a16:creationId xmlns:a16="http://schemas.microsoft.com/office/drawing/2014/main" id="{8FCD4CA3-D4E6-1779-B582-CDACDAEF05DD}"/>
+              </a:ext>
+            </a:extLst>
+          </p:cNvPr>
+          <p:cNvSpPr>
+            <a:spLocks noGrp="1"/>
+          </p:cNvSpPr>
+          <p:nvPr>
+            <p:ph type="sldNum" sz="quarter" idx="12"/>
+          </p:nvPr>
+        </p:nvSpPr>
+        <p:spPr>
+          <a:xfrm>
+            <a:off x="9282793" y="6420757"/>
+            <a:ext cx="2743200" cy="365125"/>
+          </a:xfrm>
+        </p:spPr>
+        <p:txBody>
+          <a:bodyPr/>
+          <a:lstStyle/>
+          <a:p>
+            <a:fld id="{1E5564C7-97C0-40C1-9717-452594735347}" type="slidenum">
+              <a:rPr lang="en-CA" smtClean="0"/>
+              <a:t>24</a:t>
+            </a:fld>
+            <a:endParaRPr lang="en-CA" dirty="0"/>
+          </a:p>
+        </p:txBody>
+      </p:sp>
+      <p:sp>
+        <p:nvSpPr>
+          <p:cNvPr id="4" name="Rectangle: Rounded Corners 3">
+            <a:extLst>
+              <a:ext uri="{FF2B5EF4-FFF2-40B4-BE49-F238E27FC236}">
+                <a16:creationId xmlns:a16="http://schemas.microsoft.com/office/drawing/2014/main" id="{F258722A-0186-76C8-81DB-DBCB03E12997}"/>
+              </a:ext>
+            </a:extLst>
+          </p:cNvPr>
+          <p:cNvSpPr/>
+          <p:nvPr/>
+        </p:nvSpPr>
+        <p:spPr>
+          <a:xfrm>
+            <a:off x="2351314" y="751957"/>
+            <a:ext cx="7489371" cy="2008409"/>
+          </a:xfrm>
+          <a:prstGeom prst="roundRect">
+            <a:avLst/>
+          </a:prstGeom>
+          <a:solidFill>
+            <a:schemeClr val="accent1"/>
+          </a:solidFill>
+          <a:ln>
+            <a:noFill/>
+          </a:ln>
+        </p:spPr>
+        <p:style>
+          <a:lnRef idx="2">
+            <a:schemeClr val="accent1">
+              <a:shade val="15000"/>
+            </a:schemeClr>
+          </a:lnRef>
+          <a:fillRef idx="1">
+            <a:schemeClr val="accent1"/>
+          </a:fillRef>
+          <a:effectRef idx="0">
+            <a:schemeClr val="accent1"/>
+          </a:effectRef>
+          <a:fontRef idx="minor">
+            <a:schemeClr val="lt1"/>
+          </a:fontRef>
+        </p:style>
+        <p:txBody>
+          <a:bodyPr rtlCol="0" anchor="ctr"/>
+          <a:lstStyle/>
+          <a:p>
+            <a:pPr algn="ctr"/>
+            <a:r>
+              <a:rPr lang="en-US" sz="3600" dirty="0">
+                <a:solidFill>
+                  <a:schemeClr val="bg1"/>
+                </a:solidFill>
+              </a:rPr>
+              <a:t>What is the heterogeneity of dose to the circulating blood volume during TBI?</a:t>
+            </a:r>
+            <a:endParaRPr lang="en-CA" sz="3600" dirty="0">
+              <a:solidFill>
+                <a:schemeClr val="bg1"/>
+              </a:solidFill>
+            </a:endParaRPr>
+          </a:p>
+        </p:txBody>
+      </p:sp>
+      <p:sp>
+        <p:nvSpPr>
+          <p:cNvPr id="14" name="Rectangle: Rounded Corners 13">
+            <a:extLst>
+              <a:ext uri="{FF2B5EF4-FFF2-40B4-BE49-F238E27FC236}">
+                <a16:creationId xmlns:a16="http://schemas.microsoft.com/office/drawing/2014/main" id="{9B69EA45-4B9B-A788-FC47-69F62B2EFCCD}"/>
+              </a:ext>
+            </a:extLst>
+          </p:cNvPr>
+          <p:cNvSpPr/>
+          <p:nvPr/>
+        </p:nvSpPr>
+        <p:spPr>
+          <a:xfrm>
+            <a:off x="342000" y="3953361"/>
+            <a:ext cx="3197678" cy="2277835"/>
+          </a:xfrm>
+          <a:prstGeom prst="roundRect">
+            <a:avLst/>
+          </a:prstGeom>
+          <a:solidFill>
+            <a:schemeClr val="bg1">
+              <a:lumMod val="50000"/>
+            </a:schemeClr>
+          </a:solidFill>
+          <a:ln>
+            <a:noFill/>
+          </a:ln>
+        </p:spPr>
+        <p:style>
+          <a:lnRef idx="2">
+            <a:schemeClr val="accent1">
+              <a:shade val="15000"/>
+            </a:schemeClr>
+          </a:lnRef>
+          <a:fillRef idx="1">
+            <a:schemeClr val="accent1"/>
+          </a:fillRef>
+          <a:effectRef idx="0">
+            <a:schemeClr val="accent1"/>
+          </a:effectRef>
+          <a:fontRef idx="minor">
+            <a:schemeClr val="lt1"/>
+          </a:fontRef>
+        </p:style>
+        <p:txBody>
+          <a:bodyPr rtlCol="0" anchor="ctr"/>
+          <a:lstStyle/>
+          <a:p>
+            <a:pPr algn="ctr"/>
+            <a:r>
+              <a:rPr lang="en-US" sz="3600" dirty="0"/>
+              <a:t>Determine dose deposition in time</a:t>
+            </a:r>
+            <a:endParaRPr lang="en-CA" sz="3600" dirty="0"/>
+          </a:p>
+        </p:txBody>
+      </p:sp>
+      <p:sp>
+        <p:nvSpPr>
+          <p:cNvPr id="15" name="Rectangle: Rounded Corners 14">
+            <a:extLst>
+              <a:ext uri="{FF2B5EF4-FFF2-40B4-BE49-F238E27FC236}">
+                <a16:creationId xmlns:a16="http://schemas.microsoft.com/office/drawing/2014/main" id="{A7B3B9F3-CB13-05BF-F629-5A4735F3A304}"/>
+              </a:ext>
+            </a:extLst>
+          </p:cNvPr>
+          <p:cNvSpPr/>
+          <p:nvPr/>
+        </p:nvSpPr>
+        <p:spPr>
+          <a:xfrm>
+            <a:off x="4497161" y="3961881"/>
+            <a:ext cx="3197678" cy="2277835"/>
+          </a:xfrm>
+          <a:prstGeom prst="roundRect">
+            <a:avLst/>
+          </a:prstGeom>
+          <a:solidFill>
+            <a:schemeClr val="bg1">
+              <a:lumMod val="50000"/>
+            </a:schemeClr>
+          </a:solidFill>
+          <a:ln>
+            <a:noFill/>
+          </a:ln>
+        </p:spPr>
+        <p:style>
+          <a:lnRef idx="2">
+            <a:schemeClr val="accent1">
+              <a:shade val="15000"/>
+            </a:schemeClr>
+          </a:lnRef>
+          <a:fillRef idx="1">
+            <a:schemeClr val="accent1"/>
+          </a:fillRef>
+          <a:effectRef idx="0">
+            <a:schemeClr val="accent1"/>
+          </a:effectRef>
+          <a:fontRef idx="minor">
+            <a:schemeClr val="lt1"/>
+          </a:fontRef>
+        </p:style>
+        <p:txBody>
+          <a:bodyPr rtlCol="0" anchor="ctr"/>
+          <a:lstStyle/>
+          <a:p>
+            <a:pPr algn="ctr"/>
+            <a:r>
+              <a:rPr lang="en-US" sz="3600" dirty="0"/>
+              <a:t>Track blood flow through the body</a:t>
+            </a:r>
+            <a:endParaRPr lang="en-CA" sz="3600" dirty="0"/>
+          </a:p>
+        </p:txBody>
+      </p:sp>
+      <p:sp>
+        <p:nvSpPr>
+          <p:cNvPr id="17" name="Rectangle: Rounded Corners 16">
+            <a:extLst>
+              <a:ext uri="{FF2B5EF4-FFF2-40B4-BE49-F238E27FC236}">
+                <a16:creationId xmlns:a16="http://schemas.microsoft.com/office/drawing/2014/main" id="{F19784DD-7BC5-8411-A8DD-A6866B6B3705}"/>
+              </a:ext>
+            </a:extLst>
+          </p:cNvPr>
+          <p:cNvSpPr/>
+          <p:nvPr/>
+        </p:nvSpPr>
+        <p:spPr>
+          <a:xfrm>
+            <a:off x="8652322" y="3953360"/>
+            <a:ext cx="3197678" cy="2277835"/>
+          </a:xfrm>
+          <a:prstGeom prst="roundRect">
+            <a:avLst/>
+          </a:prstGeom>
+          <a:solidFill>
+            <a:schemeClr val="accent1"/>
+          </a:solidFill>
+          <a:ln>
+            <a:solidFill>
+              <a:schemeClr val="accent2">
+                <a:lumMod val="75000"/>
+              </a:schemeClr>
+            </a:solidFill>
+          </a:ln>
+        </p:spPr>
+        <p:style>
+          <a:lnRef idx="2">
+            <a:schemeClr val="accent1">
+              <a:shade val="15000"/>
+            </a:schemeClr>
+          </a:lnRef>
+          <a:fillRef idx="1">
+            <a:schemeClr val="accent1"/>
+          </a:fillRef>
+          <a:effectRef idx="0">
+            <a:schemeClr val="accent1"/>
+          </a:effectRef>
+          <a:fontRef idx="minor">
+            <a:schemeClr val="lt1"/>
+          </a:fontRef>
+        </p:style>
+        <p:txBody>
+          <a:bodyPr rtlCol="0" anchor="ctr"/>
+          <a:lstStyle/>
+          <a:p>
+            <a:pPr algn="ctr"/>
+            <a:r>
+              <a:rPr lang="en-US" sz="3600" dirty="0">
+                <a:solidFill>
+                  <a:schemeClr val="bg1"/>
+                </a:solidFill>
+              </a:rPr>
+              <a:t>Model various TBI treatments</a:t>
+            </a:r>
+            <a:endParaRPr lang="en-CA" sz="3600" dirty="0">
+              <a:solidFill>
+                <a:schemeClr val="bg1"/>
+              </a:solidFill>
+            </a:endParaRPr>
+          </a:p>
+        </p:txBody>
+      </p:sp>
+      <p:cxnSp>
+        <p:nvCxnSpPr>
+          <p:cNvPr id="19" name="Straight Connector 18">
+            <a:extLst>
+              <a:ext uri="{FF2B5EF4-FFF2-40B4-BE49-F238E27FC236}">
+                <a16:creationId xmlns:a16="http://schemas.microsoft.com/office/drawing/2014/main" id="{FD0F56B8-79E3-0FDB-1B88-8599F40DDAB7}"/>
+              </a:ext>
+            </a:extLst>
+          </p:cNvPr>
+          <p:cNvCxnSpPr>
+            <a:stCxn id="14" idx="0"/>
+            <a:endCxn id="4" idx="2"/>
+          </p:cNvCxnSpPr>
+          <p:nvPr/>
+        </p:nvCxnSpPr>
+        <p:spPr>
+          <a:xfrm flipV="1">
+            <a:off x="1940839" y="2760366"/>
+            <a:ext cx="4155161" cy="1192995"/>
+          </a:xfrm>
+          <a:prstGeom prst="line">
+            <a:avLst/>
+          </a:prstGeom>
+          <a:ln w="19050" cap="flat" cmpd="sng" algn="ctr">
+            <a:solidFill>
+              <a:schemeClr val="bg1">
+                <a:lumMod val="50000"/>
+              </a:schemeClr>
+            </a:solidFill>
+            <a:prstDash val="solid"/>
+            <a:round/>
+            <a:headEnd type="none" w="med" len="med"/>
+            <a:tailEnd type="none" w="med" len="med"/>
+          </a:ln>
+        </p:spPr>
+        <p:style>
+          <a:lnRef idx="0">
+            <a:scrgbClr r="0" g="0" b="0"/>
+          </a:lnRef>
+          <a:fillRef idx="0">
+            <a:scrgbClr r="0" g="0" b="0"/>
+          </a:fillRef>
+          <a:effectRef idx="0">
+            <a:scrgbClr r="0" g="0" b="0"/>
+          </a:effectRef>
+          <a:fontRef idx="minor">
+            <a:schemeClr val="tx1"/>
+          </a:fontRef>
+        </p:style>
+      </p:cxnSp>
+      <p:cxnSp>
+        <p:nvCxnSpPr>
+          <p:cNvPr id="20" name="Straight Connector 19">
+            <a:extLst>
+              <a:ext uri="{FF2B5EF4-FFF2-40B4-BE49-F238E27FC236}">
+                <a16:creationId xmlns:a16="http://schemas.microsoft.com/office/drawing/2014/main" id="{62A06013-D998-FFA0-934C-7F382C260B25}"/>
+              </a:ext>
+            </a:extLst>
+          </p:cNvPr>
+          <p:cNvCxnSpPr>
+            <a:cxnSpLocks/>
+            <a:stCxn id="15" idx="0"/>
+            <a:endCxn id="4" idx="2"/>
+          </p:cNvCxnSpPr>
+          <p:nvPr/>
+        </p:nvCxnSpPr>
+        <p:spPr>
+          <a:xfrm flipV="1">
+            <a:off x="6096000" y="2760366"/>
+            <a:ext cx="0" cy="1201515"/>
+          </a:xfrm>
+          <a:prstGeom prst="line">
+            <a:avLst/>
+          </a:prstGeom>
+          <a:ln w="19050" cap="flat" cmpd="sng" algn="ctr">
+            <a:solidFill>
+              <a:schemeClr val="bg1">
+                <a:lumMod val="50000"/>
+              </a:schemeClr>
+            </a:solidFill>
+            <a:prstDash val="solid"/>
+            <a:round/>
+            <a:headEnd type="none" w="med" len="med"/>
+            <a:tailEnd type="none" w="med" len="med"/>
+          </a:ln>
+        </p:spPr>
+        <p:style>
+          <a:lnRef idx="0">
+            <a:scrgbClr r="0" g="0" b="0"/>
+          </a:lnRef>
+          <a:fillRef idx="0">
+            <a:scrgbClr r="0" g="0" b="0"/>
+          </a:fillRef>
+          <a:effectRef idx="0">
+            <a:scrgbClr r="0" g="0" b="0"/>
+          </a:effectRef>
+          <a:fontRef idx="minor">
+            <a:schemeClr val="tx1"/>
+          </a:fontRef>
+        </p:style>
+      </p:cxnSp>
+      <p:cxnSp>
+        <p:nvCxnSpPr>
+          <p:cNvPr id="23" name="Straight Connector 22">
+            <a:extLst>
+              <a:ext uri="{FF2B5EF4-FFF2-40B4-BE49-F238E27FC236}">
+                <a16:creationId xmlns:a16="http://schemas.microsoft.com/office/drawing/2014/main" id="{4968E942-D279-4FAC-52BB-6709C4675376}"/>
+              </a:ext>
+            </a:extLst>
+          </p:cNvPr>
+          <p:cNvCxnSpPr>
+            <a:cxnSpLocks/>
+            <a:stCxn id="17" idx="0"/>
+            <a:endCxn id="4" idx="2"/>
+          </p:cNvCxnSpPr>
+          <p:nvPr/>
+        </p:nvCxnSpPr>
+        <p:spPr>
+          <a:xfrm flipH="1" flipV="1">
+            <a:off x="6096000" y="2760366"/>
+            <a:ext cx="4155161" cy="1192994"/>
+          </a:xfrm>
+          <a:prstGeom prst="line">
+            <a:avLst/>
+          </a:prstGeom>
+          <a:ln w="19050" cap="flat" cmpd="sng" algn="ctr">
+            <a:solidFill>
+              <a:schemeClr val="accent1"/>
+            </a:solidFill>
+            <a:prstDash val="solid"/>
+            <a:round/>
+            <a:headEnd type="none" w="med" len="med"/>
+            <a:tailEnd type="none" w="med" len="med"/>
+          </a:ln>
+        </p:spPr>
+        <p:style>
+          <a:lnRef idx="0">
+            <a:scrgbClr r="0" g="0" b="0"/>
+          </a:lnRef>
+          <a:fillRef idx="0">
+            <a:scrgbClr r="0" g="0" b="0"/>
+          </a:fillRef>
+          <a:effectRef idx="0">
+            <a:scrgbClr r="0" g="0" b="0"/>
+          </a:effectRef>
+          <a:fontRef idx="minor">
+            <a:schemeClr val="tx1"/>
+          </a:fontRef>
+        </p:style>
+      </p:cxnSp>
+      <p:sp>
+        <p:nvSpPr>
+          <p:cNvPr id="2" name="TextBox 1">
+            <a:extLst>
+              <a:ext uri="{FF2B5EF4-FFF2-40B4-BE49-F238E27FC236}">
+                <a16:creationId xmlns:a16="http://schemas.microsoft.com/office/drawing/2014/main" id="{7745A920-7684-4CF8-06D5-E318D761DA50}"/>
+              </a:ext>
+            </a:extLst>
+          </p:cNvPr>
+          <p:cNvSpPr txBox="1"/>
+          <p:nvPr/>
+        </p:nvSpPr>
+        <p:spPr>
+          <a:xfrm>
+            <a:off x="4497161" y="3534032"/>
+            <a:ext cx="3197677" cy="369332"/>
+          </a:xfrm>
+          <a:prstGeom prst="rect">
+            <a:avLst/>
+          </a:prstGeom>
+          <a:solidFill>
+            <a:schemeClr val="accent1">
+              <a:lumMod val="20000"/>
+              <a:lumOff val="80000"/>
+            </a:schemeClr>
+          </a:solidFill>
+          <a:ln>
+            <a:solidFill>
+              <a:schemeClr val="bg1">
+                <a:lumMod val="50000"/>
+              </a:schemeClr>
+            </a:solidFill>
+          </a:ln>
+        </p:spPr>
+        <p:txBody>
+          <a:bodyPr wrap="square" rtlCol="0">
+            <a:spAutoFit/>
+          </a:bodyPr>
+          <a:lstStyle/>
+          <a:p>
+            <a:pPr algn="ctr"/>
+            <a:r>
+              <a:rPr lang="en-CA" dirty="0"/>
+              <a:t>Presented at COMP 2025</a:t>
+            </a:r>
+          </a:p>
+        </p:txBody>
+      </p:sp>
+    </p:spTree>
+    <p:extLst>
+      <p:ext uri="{BB962C8B-B14F-4D97-AF65-F5344CB8AC3E}">
+        <p14:creationId xmlns:p14="http://schemas.microsoft.com/office/powerpoint/2010/main" val="255193766"/>
+      </p:ext>
+    </p:extLst>
+  </p:cSld>
+  <p:clrMapOvr>
+    <a:masterClrMapping/>
+  </p:clrMapOvr>
+</p:sld>
+</file>
+
+<file path=ppt/slides/slide25.xml><?xml version="1.0" encoding="utf-8"?>
 <p:sld xmlns:a="http://schemas.openxmlformats.org/drawingml/2006/main" xmlns:r="http://schemas.openxmlformats.org/officeDocument/2006/relationships" xmlns:p="http://schemas.openxmlformats.org/presentationml/2006/main">
   <p:cSld>
     <p:spTree>
@@ -7613,724 +10773,6 @@
       </p:grpSpPr>
       <p:sp>
         <p:nvSpPr>
-          <p:cNvPr id="2" name="Title 1">
-            <a:extLst>
-              <a:ext uri="{FF2B5EF4-FFF2-40B4-BE49-F238E27FC236}">
-                <a16:creationId xmlns:a16="http://schemas.microsoft.com/office/drawing/2014/main" id="{1D7ED77B-6BF2-1082-1FF3-25EF66FDBBF6}"/>
-              </a:ext>
-            </a:extLst>
-          </p:cNvPr>
-          <p:cNvSpPr>
-            <a:spLocks noGrp="1"/>
-          </p:cNvSpPr>
-          <p:nvPr>
-            <p:ph type="ctrTitle"/>
-          </p:nvPr>
-        </p:nvSpPr>
-        <p:spPr/>
-        <p:txBody>
-          <a:bodyPr/>
-          <a:lstStyle/>
-          <a:p>
-            <a:r>
-              <a:rPr lang="en-CA" dirty="0"/>
-              <a:t>Thesis Chapter Outline</a:t>
-            </a:r>
-          </a:p>
-        </p:txBody>
-      </p:sp>
-      <p:sp>
-        <p:nvSpPr>
-          <p:cNvPr id="3" name="Subtitle 2">
-            <a:extLst>
-              <a:ext uri="{FF2B5EF4-FFF2-40B4-BE49-F238E27FC236}">
-                <a16:creationId xmlns:a16="http://schemas.microsoft.com/office/drawing/2014/main" id="{194D0E9B-5E79-2430-38F0-B7BA297DC9EE}"/>
-              </a:ext>
-            </a:extLst>
-          </p:cNvPr>
-          <p:cNvSpPr>
-            <a:spLocks noGrp="1"/>
-          </p:cNvSpPr>
-          <p:nvPr>
-            <p:ph type="subTitle" idx="1"/>
-          </p:nvPr>
-        </p:nvSpPr>
-        <p:spPr/>
-        <p:txBody>
-          <a:bodyPr/>
-          <a:lstStyle/>
-          <a:p>
-            <a:endParaRPr lang="en-CA"/>
-          </a:p>
-        </p:txBody>
-      </p:sp>
-      <p:sp>
-        <p:nvSpPr>
-          <p:cNvPr id="4" name="Slide Number Placeholder 3">
-            <a:extLst>
-              <a:ext uri="{FF2B5EF4-FFF2-40B4-BE49-F238E27FC236}">
-                <a16:creationId xmlns:a16="http://schemas.microsoft.com/office/drawing/2014/main" id="{FEA41E02-FA88-6CA8-C1F0-FA56D37E67C0}"/>
-              </a:ext>
-            </a:extLst>
-          </p:cNvPr>
-          <p:cNvSpPr>
-            <a:spLocks noGrp="1"/>
-          </p:cNvSpPr>
-          <p:nvPr>
-            <p:ph type="sldNum" sz="quarter" idx="12"/>
-          </p:nvPr>
-        </p:nvSpPr>
-        <p:spPr/>
-        <p:txBody>
-          <a:bodyPr/>
-          <a:lstStyle/>
-          <a:p>
-            <a:fld id="{4BAA6517-F367-4EB3-AFA6-036DD26A3111}" type="slidenum">
-              <a:rPr lang="en-CA" smtClean="0"/>
-              <a:t>11</a:t>
-            </a:fld>
-            <a:endParaRPr lang="en-CA"/>
-          </a:p>
-        </p:txBody>
-      </p:sp>
-    </p:spTree>
-    <p:extLst>
-      <p:ext uri="{BB962C8B-B14F-4D97-AF65-F5344CB8AC3E}">
-        <p14:creationId xmlns:p14="http://schemas.microsoft.com/office/powerpoint/2010/main" val="2890205982"/>
-      </p:ext>
-    </p:extLst>
-  </p:cSld>
-  <p:clrMapOvr>
-    <a:masterClrMapping/>
-  </p:clrMapOvr>
-</p:sld>
-</file>
-
-<file path=ppt/slides/slide12.xml><?xml version="1.0" encoding="utf-8"?>
-<p:sld xmlns:a="http://schemas.openxmlformats.org/drawingml/2006/main" xmlns:r="http://schemas.openxmlformats.org/officeDocument/2006/relationships" xmlns:p="http://schemas.openxmlformats.org/presentationml/2006/main">
-  <p:cSld>
-    <p:spTree>
-      <p:nvGrpSpPr>
-        <p:cNvPr id="1" name=""/>
-        <p:cNvGrpSpPr/>
-        <p:nvPr/>
-      </p:nvGrpSpPr>
-      <p:grpSpPr>
-        <a:xfrm>
-          <a:off x="0" y="0"/>
-          <a:ext cx="0" cy="0"/>
-          <a:chOff x="0" y="0"/>
-          <a:chExt cx="0" cy="0"/>
-        </a:xfrm>
-      </p:grpSpPr>
-      <p:sp>
-        <p:nvSpPr>
-          <p:cNvPr id="4" name="Slide Number Placeholder 3">
-            <a:extLst>
-              <a:ext uri="{FF2B5EF4-FFF2-40B4-BE49-F238E27FC236}">
-                <a16:creationId xmlns:a16="http://schemas.microsoft.com/office/drawing/2014/main" id="{B84047AA-E93E-D398-80E2-EE3511D69866}"/>
-              </a:ext>
-            </a:extLst>
-          </p:cNvPr>
-          <p:cNvSpPr>
-            <a:spLocks noGrp="1"/>
-          </p:cNvSpPr>
-          <p:nvPr>
-            <p:ph type="sldNum" sz="quarter" idx="12"/>
-          </p:nvPr>
-        </p:nvSpPr>
-        <p:spPr/>
-        <p:txBody>
-          <a:bodyPr/>
-          <a:lstStyle/>
-          <a:p>
-            <a:fld id="{4BAA6517-F367-4EB3-AFA6-036DD26A3111}" type="slidenum">
-              <a:rPr lang="en-CA" smtClean="0"/>
-              <a:t>12</a:t>
-            </a:fld>
-            <a:endParaRPr lang="en-CA"/>
-          </a:p>
-        </p:txBody>
-      </p:sp>
-      <p:sp>
-        <p:nvSpPr>
-          <p:cNvPr id="5" name="TextBox 4">
-            <a:extLst>
-              <a:ext uri="{FF2B5EF4-FFF2-40B4-BE49-F238E27FC236}">
-                <a16:creationId xmlns:a16="http://schemas.microsoft.com/office/drawing/2014/main" id="{64544A77-A0BB-FE78-6EC9-38299DB6DA6A}"/>
-              </a:ext>
-            </a:extLst>
-          </p:cNvPr>
-          <p:cNvSpPr txBox="1"/>
-          <p:nvPr/>
-        </p:nvSpPr>
-        <p:spPr>
-          <a:xfrm>
-            <a:off x="658761" y="462116"/>
-            <a:ext cx="11330039" cy="5632311"/>
-          </a:xfrm>
-          <a:prstGeom prst="rect">
-            <a:avLst/>
-          </a:prstGeom>
-          <a:noFill/>
-        </p:spPr>
-        <p:txBody>
-          <a:bodyPr wrap="square" rtlCol="0">
-            <a:spAutoFit/>
-          </a:bodyPr>
-          <a:lstStyle/>
-          <a:p>
-            <a:pPr marL="342900" indent="-342900">
-              <a:buFont typeface="+mj-lt"/>
-              <a:buAutoNum type="arabicPeriod"/>
-            </a:pPr>
-            <a:r>
-              <a:rPr lang="en-CA" sz="2000" dirty="0"/>
-              <a:t>Introduction to thesis</a:t>
-            </a:r>
-          </a:p>
-          <a:p>
-            <a:pPr marL="800100" lvl="1" indent="-342900">
-              <a:buFont typeface="Arial" panose="020B0604020202020204" pitchFamily="34" charset="0"/>
-              <a:buChar char="•"/>
-            </a:pPr>
-            <a:r>
-              <a:rPr lang="en-CA" sz="2000" dirty="0"/>
-              <a:t>Provide context for research and summarize the content of the thesis</a:t>
-            </a:r>
-          </a:p>
-          <a:p>
-            <a:pPr marL="342900" indent="-342900">
-              <a:buFont typeface="+mj-lt"/>
-              <a:buAutoNum type="arabicPeriod"/>
-            </a:pPr>
-            <a:r>
-              <a:rPr lang="en-CA" sz="2000" dirty="0"/>
-              <a:t>Introduction to Radiation Therapy </a:t>
-            </a:r>
-          </a:p>
-          <a:p>
-            <a:pPr marL="800100" lvl="1" indent="-342900">
-              <a:buFont typeface="Arial" panose="020B0604020202020204" pitchFamily="34" charset="0"/>
-              <a:buChar char="•"/>
-            </a:pPr>
-            <a:r>
-              <a:rPr lang="en-CA" sz="2000" dirty="0"/>
-              <a:t>Principles of RT </a:t>
-            </a:r>
-          </a:p>
-          <a:p>
-            <a:pPr marL="800100" lvl="1" indent="-342900">
-              <a:buFont typeface="Arial" panose="020B0604020202020204" pitchFamily="34" charset="0"/>
-              <a:buChar char="•"/>
-            </a:pPr>
-            <a:r>
-              <a:rPr lang="en-CA" sz="2000" dirty="0"/>
-              <a:t>Treatment Devices (Co-60 and Linac)</a:t>
-            </a:r>
-          </a:p>
-          <a:p>
-            <a:pPr marL="342900" indent="-342900">
-              <a:buFont typeface="+mj-lt"/>
-              <a:buAutoNum type="arabicPeriod"/>
-            </a:pPr>
-            <a:r>
-              <a:rPr lang="en-CA" sz="2000" dirty="0"/>
-              <a:t>Introduction to Total Body Irradiation</a:t>
-            </a:r>
-          </a:p>
-          <a:p>
-            <a:pPr marL="800100" lvl="1" indent="-342900">
-              <a:buFont typeface="Arial" panose="020B0604020202020204" pitchFamily="34" charset="0"/>
-              <a:buChar char="•"/>
-            </a:pPr>
-            <a:r>
-              <a:rPr lang="en-CA" sz="2000" dirty="0"/>
-              <a:t>Hematological malignancies</a:t>
-            </a:r>
-          </a:p>
-          <a:p>
-            <a:pPr marL="800100" lvl="1" indent="-342900">
-              <a:buFont typeface="Arial" panose="020B0604020202020204" pitchFamily="34" charset="0"/>
-              <a:buChar char="•"/>
-            </a:pPr>
-            <a:r>
-              <a:rPr lang="en-CA" sz="2000" dirty="0"/>
-              <a:t>History of TBI </a:t>
-            </a:r>
-          </a:p>
-          <a:p>
-            <a:pPr marL="800100" lvl="1" indent="-342900">
-              <a:buFont typeface="Arial" panose="020B0604020202020204" pitchFamily="34" charset="0"/>
-              <a:buChar char="•"/>
-            </a:pPr>
-            <a:r>
-              <a:rPr lang="en-CA" sz="2000" dirty="0"/>
-              <a:t>Modern TBI</a:t>
-            </a:r>
-          </a:p>
-          <a:p>
-            <a:pPr marL="342900" indent="-342900">
-              <a:buFont typeface="+mj-lt"/>
-              <a:buAutoNum type="arabicPeriod"/>
-            </a:pPr>
-            <a:r>
-              <a:rPr lang="en-CA" sz="2000" dirty="0"/>
-              <a:t>Developing a Whole-Body Blood Flow Model for Dosimetric Applications</a:t>
-            </a:r>
-          </a:p>
-          <a:p>
-            <a:pPr marL="800100" lvl="1" indent="-342900">
-              <a:buFont typeface="Arial" panose="020B0604020202020204" pitchFamily="34" charset="0"/>
-              <a:buChar char="•"/>
-            </a:pPr>
-            <a:r>
-              <a:rPr lang="en-CA" sz="2000" dirty="0"/>
-              <a:t>Intro to Blood Flow Modelling </a:t>
-            </a:r>
-          </a:p>
-          <a:p>
-            <a:pPr marL="800100" lvl="1" indent="-342900">
-              <a:buFont typeface="Arial" panose="020B0604020202020204" pitchFamily="34" charset="0"/>
-              <a:buChar char="•"/>
-            </a:pPr>
-            <a:r>
-              <a:rPr lang="en-CA" sz="2000" dirty="0"/>
-              <a:t>Methodology, Results, Discussion</a:t>
-            </a:r>
-          </a:p>
-          <a:p>
-            <a:pPr marL="342900" indent="-342900">
-              <a:buFont typeface="+mj-lt"/>
-              <a:buAutoNum type="arabicPeriod"/>
-            </a:pPr>
-            <a:r>
-              <a:rPr lang="en-CA" sz="2000" dirty="0"/>
-              <a:t>Determining Dose to the Circulating Blood</a:t>
-            </a:r>
-          </a:p>
-          <a:p>
-            <a:pPr marL="800100" lvl="1" indent="-342900">
-              <a:buFont typeface="Arial" panose="020B0604020202020204" pitchFamily="34" charset="0"/>
-              <a:buChar char="•"/>
-            </a:pPr>
-            <a:r>
-              <a:rPr lang="en-CA" sz="2000" dirty="0"/>
-              <a:t>Intro to Monte Carlo, </a:t>
-            </a:r>
-            <a:r>
-              <a:rPr lang="en-CA" sz="2000" dirty="0" err="1"/>
-              <a:t>EGSnrc</a:t>
-            </a:r>
-            <a:r>
-              <a:rPr lang="en-CA" sz="2000" dirty="0"/>
-              <a:t> and 4ddose</a:t>
-            </a:r>
-          </a:p>
-          <a:p>
-            <a:pPr marL="800100" lvl="1" indent="-342900">
-              <a:buFont typeface="Arial" panose="020B0604020202020204" pitchFamily="34" charset="0"/>
-              <a:buChar char="•"/>
-            </a:pPr>
-            <a:r>
-              <a:rPr lang="en-CA" sz="2000" dirty="0"/>
-              <a:t>Methodology, Results, Discussion</a:t>
-            </a:r>
-          </a:p>
-          <a:p>
-            <a:pPr marL="342900" indent="-342900">
-              <a:buFont typeface="+mj-lt"/>
-              <a:buAutoNum type="arabicPeriod"/>
-            </a:pPr>
-            <a:r>
-              <a:rPr lang="en-CA" sz="2000" dirty="0"/>
-              <a:t>Comparing Dose to Blood Achieved by Various TBI Delivery Methods</a:t>
-            </a:r>
-          </a:p>
-          <a:p>
-            <a:pPr marL="800100" lvl="1" indent="-342900">
-              <a:buFont typeface="Arial" panose="020B0604020202020204" pitchFamily="34" charset="0"/>
-              <a:buChar char="•"/>
-            </a:pPr>
-            <a:r>
-              <a:rPr lang="en-CA" sz="2000" dirty="0"/>
-              <a:t>Methods, Results, Discussion</a:t>
-            </a:r>
-          </a:p>
-          <a:p>
-            <a:pPr marL="342900" indent="-342900">
-              <a:buFont typeface="+mj-lt"/>
-              <a:buAutoNum type="arabicPeriod"/>
-            </a:pPr>
-            <a:r>
-              <a:rPr lang="en-CA" sz="2000" dirty="0"/>
-              <a:t>Future Work and Conclusion </a:t>
-            </a:r>
-          </a:p>
-        </p:txBody>
-      </p:sp>
-    </p:spTree>
-    <p:extLst>
-      <p:ext uri="{BB962C8B-B14F-4D97-AF65-F5344CB8AC3E}">
-        <p14:creationId xmlns:p14="http://schemas.microsoft.com/office/powerpoint/2010/main" val="114201971"/>
-      </p:ext>
-    </p:extLst>
-  </p:cSld>
-  <p:clrMapOvr>
-    <a:masterClrMapping/>
-  </p:clrMapOvr>
-</p:sld>
-</file>
-
-<file path=ppt/slides/slide13.xml><?xml version="1.0" encoding="utf-8"?>
-<p:sld xmlns:a="http://schemas.openxmlformats.org/drawingml/2006/main" xmlns:r="http://schemas.openxmlformats.org/officeDocument/2006/relationships" xmlns:p="http://schemas.openxmlformats.org/presentationml/2006/main">
-  <p:cSld>
-    <p:spTree>
-      <p:nvGrpSpPr>
-        <p:cNvPr id="1" name=""/>
-        <p:cNvGrpSpPr/>
-        <p:nvPr/>
-      </p:nvGrpSpPr>
-      <p:grpSpPr>
-        <a:xfrm>
-          <a:off x="0" y="0"/>
-          <a:ext cx="0" cy="0"/>
-          <a:chOff x="0" y="0"/>
-          <a:chExt cx="0" cy="0"/>
-        </a:xfrm>
-      </p:grpSpPr>
-      <p:sp>
-        <p:nvSpPr>
-          <p:cNvPr id="2" name="Title 1">
-            <a:extLst>
-              <a:ext uri="{FF2B5EF4-FFF2-40B4-BE49-F238E27FC236}">
-                <a16:creationId xmlns:a16="http://schemas.microsoft.com/office/drawing/2014/main" id="{D9737106-55F0-72D6-E38C-FA3C695471AB}"/>
-              </a:ext>
-            </a:extLst>
-          </p:cNvPr>
-          <p:cNvSpPr>
-            <a:spLocks noGrp="1"/>
-          </p:cNvSpPr>
-          <p:nvPr>
-            <p:ph type="ctrTitle"/>
-          </p:nvPr>
-        </p:nvSpPr>
-        <p:spPr/>
-        <p:txBody>
-          <a:bodyPr/>
-          <a:lstStyle/>
-          <a:p>
-            <a:r>
-              <a:rPr lang="en-CA"/>
-              <a:t>Graduation Timeline</a:t>
-            </a:r>
-          </a:p>
-        </p:txBody>
-      </p:sp>
-      <p:sp>
-        <p:nvSpPr>
-          <p:cNvPr id="3" name="Subtitle 2">
-            <a:extLst>
-              <a:ext uri="{FF2B5EF4-FFF2-40B4-BE49-F238E27FC236}">
-                <a16:creationId xmlns:a16="http://schemas.microsoft.com/office/drawing/2014/main" id="{169E0A3F-B2A3-D9DA-E0B8-BAD60169EABE}"/>
-              </a:ext>
-            </a:extLst>
-          </p:cNvPr>
-          <p:cNvSpPr>
-            <a:spLocks noGrp="1"/>
-          </p:cNvSpPr>
-          <p:nvPr>
-            <p:ph type="subTitle" idx="1"/>
-          </p:nvPr>
-        </p:nvSpPr>
-        <p:spPr/>
-        <p:txBody>
-          <a:bodyPr/>
-          <a:lstStyle/>
-          <a:p>
-            <a:endParaRPr lang="en-CA"/>
-          </a:p>
-        </p:txBody>
-      </p:sp>
-      <p:sp>
-        <p:nvSpPr>
-          <p:cNvPr id="4" name="Slide Number Placeholder 3">
-            <a:extLst>
-              <a:ext uri="{FF2B5EF4-FFF2-40B4-BE49-F238E27FC236}">
-                <a16:creationId xmlns:a16="http://schemas.microsoft.com/office/drawing/2014/main" id="{00849765-9749-4810-C154-9B68EF62C4A6}"/>
-              </a:ext>
-            </a:extLst>
-          </p:cNvPr>
-          <p:cNvSpPr>
-            <a:spLocks noGrp="1"/>
-          </p:cNvSpPr>
-          <p:nvPr>
-            <p:ph type="sldNum" sz="quarter" idx="12"/>
-          </p:nvPr>
-        </p:nvSpPr>
-        <p:spPr/>
-        <p:txBody>
-          <a:bodyPr/>
-          <a:lstStyle/>
-          <a:p>
-            <a:fld id="{4BAA6517-F367-4EB3-AFA6-036DD26A3111}" type="slidenum">
-              <a:rPr lang="en-CA" smtClean="0"/>
-              <a:t>13</a:t>
-            </a:fld>
-            <a:endParaRPr lang="en-CA"/>
-          </a:p>
-        </p:txBody>
-      </p:sp>
-    </p:spTree>
-    <p:extLst>
-      <p:ext uri="{BB962C8B-B14F-4D97-AF65-F5344CB8AC3E}">
-        <p14:creationId xmlns:p14="http://schemas.microsoft.com/office/powerpoint/2010/main" val="879825129"/>
-      </p:ext>
-    </p:extLst>
-  </p:cSld>
-  <p:clrMapOvr>
-    <a:masterClrMapping/>
-  </p:clrMapOvr>
-</p:sld>
-</file>
-
-<file path=ppt/slides/slide14.xml><?xml version="1.0" encoding="utf-8"?>
-<p:sld xmlns:a="http://schemas.openxmlformats.org/drawingml/2006/main" xmlns:r="http://schemas.openxmlformats.org/officeDocument/2006/relationships" xmlns:p="http://schemas.openxmlformats.org/presentationml/2006/main">
-  <p:cSld>
-    <p:spTree>
-      <p:nvGrpSpPr>
-        <p:cNvPr id="1" name=""/>
-        <p:cNvGrpSpPr/>
-        <p:nvPr/>
-      </p:nvGrpSpPr>
-      <p:grpSpPr>
-        <a:xfrm>
-          <a:off x="0" y="0"/>
-          <a:ext cx="0" cy="0"/>
-          <a:chOff x="0" y="0"/>
-          <a:chExt cx="0" cy="0"/>
-        </a:xfrm>
-      </p:grpSpPr>
-      <p:sp>
-        <p:nvSpPr>
-          <p:cNvPr id="2" name="Title 1">
-            <a:extLst>
-              <a:ext uri="{FF2B5EF4-FFF2-40B4-BE49-F238E27FC236}">
-                <a16:creationId xmlns:a16="http://schemas.microsoft.com/office/drawing/2014/main" id="{BA45A03C-ECD6-AD9B-70ED-91279B51D2AD}"/>
-              </a:ext>
-            </a:extLst>
-          </p:cNvPr>
-          <p:cNvSpPr>
-            <a:spLocks noGrp="1"/>
-          </p:cNvSpPr>
-          <p:nvPr>
-            <p:ph type="title"/>
-          </p:nvPr>
-        </p:nvSpPr>
-        <p:spPr/>
-        <p:txBody>
-          <a:bodyPr/>
-          <a:lstStyle/>
-          <a:p>
-            <a:r>
-              <a:rPr lang="en-CA" dirty="0"/>
-              <a:t>Timeline</a:t>
-            </a:r>
-          </a:p>
-        </p:txBody>
-      </p:sp>
-      <p:sp>
-        <p:nvSpPr>
-          <p:cNvPr id="3" name="Content Placeholder 2">
-            <a:extLst>
-              <a:ext uri="{FF2B5EF4-FFF2-40B4-BE49-F238E27FC236}">
-                <a16:creationId xmlns:a16="http://schemas.microsoft.com/office/drawing/2014/main" id="{9EADE98C-AF71-3EC2-1AA2-48A07353A80B}"/>
-              </a:ext>
-            </a:extLst>
-          </p:cNvPr>
-          <p:cNvSpPr>
-            <a:spLocks noGrp="1"/>
-          </p:cNvSpPr>
-          <p:nvPr>
-            <p:ph idx="1"/>
-          </p:nvPr>
-        </p:nvSpPr>
-        <p:spPr/>
-        <p:txBody>
-          <a:bodyPr/>
-          <a:lstStyle/>
-          <a:p>
-            <a:r>
-              <a:rPr lang="en-CA" dirty="0"/>
-              <a:t>Began September 2020 -&gt; Deadline would be August 2026</a:t>
-            </a:r>
-          </a:p>
-          <a:p>
-            <a:r>
-              <a:rPr lang="en-CA" dirty="0"/>
-              <a:t>Request an extension to this deadline (2 term)</a:t>
-            </a:r>
-          </a:p>
-          <a:p>
-            <a:pPr lvl="1">
-              <a:buFont typeface="Arial" panose="020B0604020202020204" pitchFamily="34" charset="0"/>
-              <a:buChar char="•"/>
-            </a:pPr>
-            <a:endParaRPr lang="en-CA" dirty="0"/>
-          </a:p>
-          <a:p>
-            <a:endParaRPr lang="en-CA" dirty="0"/>
-          </a:p>
-        </p:txBody>
-      </p:sp>
-      <p:sp>
-        <p:nvSpPr>
-          <p:cNvPr id="4" name="Slide Number Placeholder 3">
-            <a:extLst>
-              <a:ext uri="{FF2B5EF4-FFF2-40B4-BE49-F238E27FC236}">
-                <a16:creationId xmlns:a16="http://schemas.microsoft.com/office/drawing/2014/main" id="{EF5D6FCF-7365-8B41-934E-10F60AE6CACF}"/>
-              </a:ext>
-            </a:extLst>
-          </p:cNvPr>
-          <p:cNvSpPr>
-            <a:spLocks noGrp="1"/>
-          </p:cNvSpPr>
-          <p:nvPr>
-            <p:ph type="sldNum" sz="quarter" idx="12"/>
-          </p:nvPr>
-        </p:nvSpPr>
-        <p:spPr/>
-        <p:txBody>
-          <a:bodyPr/>
-          <a:lstStyle/>
-          <a:p>
-            <a:fld id="{4BAA6517-F367-4EB3-AFA6-036DD26A3111}" type="slidenum">
-              <a:rPr lang="en-CA" smtClean="0"/>
-              <a:t>14</a:t>
-            </a:fld>
-            <a:endParaRPr lang="en-CA"/>
-          </a:p>
-        </p:txBody>
-      </p:sp>
-    </p:spTree>
-    <p:extLst>
-      <p:ext uri="{BB962C8B-B14F-4D97-AF65-F5344CB8AC3E}">
-        <p14:creationId xmlns:p14="http://schemas.microsoft.com/office/powerpoint/2010/main" val="1766117193"/>
-      </p:ext>
-    </p:extLst>
-  </p:cSld>
-  <p:clrMapOvr>
-    <a:masterClrMapping/>
-  </p:clrMapOvr>
-</p:sld>
-</file>
-
-<file path=ppt/slides/slide15.xml><?xml version="1.0" encoding="utf-8"?>
-<p:sld xmlns:a="http://schemas.openxmlformats.org/drawingml/2006/main" xmlns:r="http://schemas.openxmlformats.org/officeDocument/2006/relationships" xmlns:p="http://schemas.openxmlformats.org/presentationml/2006/main">
-  <p:cSld>
-    <p:spTree>
-      <p:nvGrpSpPr>
-        <p:cNvPr id="1" name=""/>
-        <p:cNvGrpSpPr/>
-        <p:nvPr/>
-      </p:nvGrpSpPr>
-      <p:grpSpPr>
-        <a:xfrm>
-          <a:off x="0" y="0"/>
-          <a:ext cx="0" cy="0"/>
-          <a:chOff x="0" y="0"/>
-          <a:chExt cx="0" cy="0"/>
-        </a:xfrm>
-      </p:grpSpPr>
-      <p:sp>
-        <p:nvSpPr>
-          <p:cNvPr id="2" name="Title 1">
-            <a:extLst>
-              <a:ext uri="{FF2B5EF4-FFF2-40B4-BE49-F238E27FC236}">
-                <a16:creationId xmlns:a16="http://schemas.microsoft.com/office/drawing/2014/main" id="{E278983D-EBB6-683C-94AD-CAED3B799030}"/>
-              </a:ext>
-            </a:extLst>
-          </p:cNvPr>
-          <p:cNvSpPr>
-            <a:spLocks noGrp="1"/>
-          </p:cNvSpPr>
-          <p:nvPr>
-            <p:ph type="title"/>
-          </p:nvPr>
-        </p:nvSpPr>
-        <p:spPr/>
-        <p:txBody>
-          <a:bodyPr/>
-          <a:lstStyle/>
-          <a:p>
-            <a:r>
-              <a:rPr lang="en-CA" dirty="0"/>
-              <a:t>Thank you.</a:t>
-            </a:r>
-          </a:p>
-        </p:txBody>
-      </p:sp>
-      <p:sp>
-        <p:nvSpPr>
-          <p:cNvPr id="3" name="Slide Number Placeholder 2">
-            <a:extLst>
-              <a:ext uri="{FF2B5EF4-FFF2-40B4-BE49-F238E27FC236}">
-                <a16:creationId xmlns:a16="http://schemas.microsoft.com/office/drawing/2014/main" id="{07CB0118-3CE2-03A0-E7ED-D643FAD19369}"/>
-              </a:ext>
-            </a:extLst>
-          </p:cNvPr>
-          <p:cNvSpPr>
-            <a:spLocks noGrp="1"/>
-          </p:cNvSpPr>
-          <p:nvPr>
-            <p:ph type="sldNum" sz="quarter" idx="12"/>
-          </p:nvPr>
-        </p:nvSpPr>
-        <p:spPr/>
-        <p:txBody>
-          <a:bodyPr/>
-          <a:lstStyle/>
-          <a:p>
-            <a:fld id="{4BAA6517-F367-4EB3-AFA6-036DD26A3111}" type="slidenum">
-              <a:rPr lang="en-CA" smtClean="0"/>
-              <a:t>15</a:t>
-            </a:fld>
-            <a:endParaRPr lang="en-CA"/>
-          </a:p>
-        </p:txBody>
-      </p:sp>
-    </p:spTree>
-    <p:extLst>
-      <p:ext uri="{BB962C8B-B14F-4D97-AF65-F5344CB8AC3E}">
-        <p14:creationId xmlns:p14="http://schemas.microsoft.com/office/powerpoint/2010/main" val="4088362699"/>
-      </p:ext>
-    </p:extLst>
-  </p:cSld>
-  <p:clrMapOvr>
-    <a:masterClrMapping/>
-  </p:clrMapOvr>
-</p:sld>
-</file>
-
-<file path=ppt/slides/slide16.xml><?xml version="1.0" encoding="utf-8"?>
-<p:sld xmlns:a="http://schemas.openxmlformats.org/drawingml/2006/main" xmlns:r="http://schemas.openxmlformats.org/officeDocument/2006/relationships" xmlns:p="http://schemas.openxmlformats.org/presentationml/2006/main">
-  <p:cSld>
-    <p:spTree>
-      <p:nvGrpSpPr>
-        <p:cNvPr id="1" name=""/>
-        <p:cNvGrpSpPr/>
-        <p:nvPr/>
-      </p:nvGrpSpPr>
-      <p:grpSpPr>
-        <a:xfrm>
-          <a:off x="0" y="0"/>
-          <a:ext cx="0" cy="0"/>
-          <a:chOff x="0" y="0"/>
-          <a:chExt cx="0" cy="0"/>
-        </a:xfrm>
-      </p:grpSpPr>
-      <p:sp>
-        <p:nvSpPr>
           <p:cNvPr id="6" name="Slide Number Placeholder 5">
             <a:extLst>
               <a:ext uri="{FF2B5EF4-FFF2-40B4-BE49-F238E27FC236}">
@@ -8357,7 +10799,7 @@
           <a:p>
             <a:fld id="{1E5564C7-97C0-40C1-9717-452594735347}" type="slidenum">
               <a:rPr lang="en-CA" smtClean="0"/>
-              <a:t>16</a:t>
+              <a:t>25</a:t>
             </a:fld>
             <a:endParaRPr lang="en-CA" dirty="0"/>
           </a:p>
@@ -8953,7 +11395,7 @@
 </p:sld>
 </file>
 
-<file path=ppt/slides/slide17.xml><?xml version="1.0" encoding="utf-8"?>
+<file path=ppt/slides/slide26.xml><?xml version="1.0" encoding="utf-8"?>
 <p:sld xmlns:a="http://schemas.openxmlformats.org/drawingml/2006/main" xmlns:r="http://schemas.openxmlformats.org/officeDocument/2006/relationships" xmlns:p="http://schemas.openxmlformats.org/presentationml/2006/main">
   <p:cSld>
     <p:spTree>
@@ -9004,7 +11446,7 @@
           <a:p>
             <a:fld id="{1E5564C7-97C0-40C1-9717-452594735347}" type="slidenum">
               <a:rPr lang="en-CA" smtClean="0"/>
-              <a:t>17</a:t>
+              <a:t>26</a:t>
             </a:fld>
             <a:endParaRPr lang="en-CA" dirty="0"/>
           </a:p>
@@ -9507,7 +11949,7 @@
 </p:sld>
 </file>
 
-<file path=ppt/slides/slide18.xml><?xml version="1.0" encoding="utf-8"?>
+<file path=ppt/slides/slide27.xml><?xml version="1.0" encoding="utf-8"?>
 <p:sld xmlns:a="http://schemas.openxmlformats.org/drawingml/2006/main" xmlns:r="http://schemas.openxmlformats.org/officeDocument/2006/relationships" xmlns:p="http://schemas.openxmlformats.org/presentationml/2006/main">
   <p:cSld>
     <p:spTree>
@@ -9552,7 +11994,7 @@
           <a:p>
             <a:fld id="{1E5564C7-97C0-40C1-9717-452594735347}" type="slidenum">
               <a:rPr lang="en-CA" smtClean="0"/>
-              <a:t>18</a:t>
+              <a:t>27</a:t>
             </a:fld>
             <a:endParaRPr lang="en-CA" dirty="0"/>
           </a:p>
@@ -10663,7 +13105,7 @@
 </p:sld>
 </file>
 
-<file path=ppt/slides/slide19.xml><?xml version="1.0" encoding="utf-8"?>
+<file path=ppt/slides/slide28.xml><?xml version="1.0" encoding="utf-8"?>
 <p:sld xmlns:a="http://schemas.openxmlformats.org/drawingml/2006/main" xmlns:r="http://schemas.openxmlformats.org/officeDocument/2006/relationships" xmlns:p="http://schemas.openxmlformats.org/presentationml/2006/main">
   <p:cSld>
     <p:spTree>
@@ -10708,7 +13150,7 @@
           <a:p>
             <a:fld id="{1E5564C7-97C0-40C1-9717-452594735347}" type="slidenum">
               <a:rPr lang="en-CA" smtClean="0"/>
-              <a:t>19</a:t>
+              <a:t>28</a:t>
             </a:fld>
             <a:endParaRPr lang="en-CA" dirty="0"/>
           </a:p>
@@ -11963,179 +14405,6 @@
 </p:sld>
 </file>
 
-<file path=ppt/slides/slide2.xml><?xml version="1.0" encoding="utf-8"?>
-<p:sld xmlns:a="http://schemas.openxmlformats.org/drawingml/2006/main" xmlns:r="http://schemas.openxmlformats.org/officeDocument/2006/relationships" xmlns:p="http://schemas.openxmlformats.org/presentationml/2006/main">
-  <p:cSld>
-    <p:spTree>
-      <p:nvGrpSpPr>
-        <p:cNvPr id="1" name=""/>
-        <p:cNvGrpSpPr/>
-        <p:nvPr/>
-      </p:nvGrpSpPr>
-      <p:grpSpPr>
-        <a:xfrm>
-          <a:off x="0" y="0"/>
-          <a:ext cx="0" cy="0"/>
-          <a:chOff x="0" y="0"/>
-          <a:chExt cx="0" cy="0"/>
-        </a:xfrm>
-      </p:grpSpPr>
-      <p:sp>
-        <p:nvSpPr>
-          <p:cNvPr id="2" name="Title 1">
-            <a:extLst>
-              <a:ext uri="{FF2B5EF4-FFF2-40B4-BE49-F238E27FC236}">
-                <a16:creationId xmlns:a16="http://schemas.microsoft.com/office/drawing/2014/main" id="{E2B5876F-7321-AB1C-1311-FBA15F99094A}"/>
-              </a:ext>
-            </a:extLst>
-          </p:cNvPr>
-          <p:cNvSpPr>
-            <a:spLocks noGrp="1"/>
-          </p:cNvSpPr>
-          <p:nvPr>
-            <p:ph type="title"/>
-          </p:nvPr>
-        </p:nvSpPr>
-        <p:spPr/>
-        <p:txBody>
-          <a:bodyPr/>
-          <a:lstStyle/>
-          <a:p>
-            <a:r>
-              <a:rPr lang="en-CA" dirty="0"/>
-              <a:t>Agenda</a:t>
-            </a:r>
-          </a:p>
-        </p:txBody>
-      </p:sp>
-      <p:sp>
-        <p:nvSpPr>
-          <p:cNvPr id="3" name="Content Placeholder 2">
-            <a:extLst>
-              <a:ext uri="{FF2B5EF4-FFF2-40B4-BE49-F238E27FC236}">
-                <a16:creationId xmlns:a16="http://schemas.microsoft.com/office/drawing/2014/main" id="{EF9EB8A0-D3E8-31F9-6054-2B57F998BA0E}"/>
-              </a:ext>
-            </a:extLst>
-          </p:cNvPr>
-          <p:cNvSpPr>
-            <a:spLocks noGrp="1"/>
-          </p:cNvSpPr>
-          <p:nvPr>
-            <p:ph idx="1"/>
-          </p:nvPr>
-        </p:nvSpPr>
-        <p:spPr/>
-        <p:txBody>
-          <a:bodyPr/>
-          <a:lstStyle/>
-          <a:p>
-            <a:pPr>
-              <a:buFont typeface="Arial" panose="020B0604020202020204" pitchFamily="34" charset="0"/>
-              <a:buChar char="•"/>
-            </a:pPr>
-            <a:r>
-              <a:rPr lang="en-CA" sz="2400" dirty="0"/>
-              <a:t>Review Thesis Question</a:t>
-            </a:r>
-          </a:p>
-          <a:p>
-            <a:pPr>
-              <a:buFont typeface="Arial" panose="020B0604020202020204" pitchFamily="34" charset="0"/>
-              <a:buChar char="•"/>
-            </a:pPr>
-            <a:r>
-              <a:rPr lang="en-CA" sz="2400" dirty="0"/>
-              <a:t>Present Project 2 – Heterogeneity of Dose: Sweeping Co-60 TBI</a:t>
-            </a:r>
-          </a:p>
-          <a:p>
-            <a:pPr>
-              <a:buFont typeface="Arial" panose="020B0604020202020204" pitchFamily="34" charset="0"/>
-              <a:buChar char="•"/>
-            </a:pPr>
-            <a:r>
-              <a:rPr lang="en-CA" sz="2400" dirty="0"/>
-              <a:t>Review Thesis Chapters: </a:t>
-            </a:r>
-            <a:r>
-              <a:rPr lang="en-CA" sz="2400" i="1" dirty="0"/>
-              <a:t>Seeking Committee Feedback</a:t>
-            </a:r>
-            <a:endParaRPr lang="en-CA" sz="2400" dirty="0"/>
-          </a:p>
-          <a:p>
-            <a:pPr>
-              <a:buFont typeface="Arial" panose="020B0604020202020204" pitchFamily="34" charset="0"/>
-              <a:buChar char="•"/>
-            </a:pPr>
-            <a:r>
-              <a:rPr lang="en-CA" sz="2400" dirty="0"/>
-              <a:t>Graduation Timeline </a:t>
-            </a:r>
-          </a:p>
-          <a:p>
-            <a:pPr>
-              <a:buFont typeface="Arial" panose="020B0604020202020204" pitchFamily="34" charset="0"/>
-              <a:buChar char="•"/>
-            </a:pPr>
-            <a:r>
-              <a:rPr lang="en-CA" sz="2400" dirty="0"/>
-              <a:t>Questions and Discussion</a:t>
-            </a:r>
-          </a:p>
-          <a:p>
-            <a:pPr marL="0" indent="0">
-              <a:buNone/>
-            </a:pPr>
-            <a:r>
-              <a:rPr lang="en-CA" dirty="0"/>
-              <a:t>	</a:t>
-            </a:r>
-          </a:p>
-        </p:txBody>
-      </p:sp>
-      <p:sp>
-        <p:nvSpPr>
-          <p:cNvPr id="4" name="Slide Number Placeholder 3">
-            <a:extLst>
-              <a:ext uri="{FF2B5EF4-FFF2-40B4-BE49-F238E27FC236}">
-                <a16:creationId xmlns:a16="http://schemas.microsoft.com/office/drawing/2014/main" id="{555C3F1F-161F-9BD6-659F-A051976AFDBF}"/>
-              </a:ext>
-            </a:extLst>
-          </p:cNvPr>
-          <p:cNvSpPr>
-            <a:spLocks noGrp="1"/>
-          </p:cNvSpPr>
-          <p:nvPr>
-            <p:ph type="sldNum" sz="quarter" idx="12"/>
-          </p:nvPr>
-        </p:nvSpPr>
-        <p:spPr/>
-        <p:txBody>
-          <a:bodyPr/>
-          <a:lstStyle/>
-          <a:p>
-            <a:fld id="{4BAA6517-F367-4EB3-AFA6-036DD26A3111}" type="slidenum">
-              <a:rPr lang="en-CA" smtClean="0"/>
-              <a:t>2</a:t>
-            </a:fld>
-            <a:endParaRPr lang="en-CA"/>
-          </a:p>
-        </p:txBody>
-      </p:sp>
-    </p:spTree>
-    <p:extLst>
-      <p:ext uri="{BB962C8B-B14F-4D97-AF65-F5344CB8AC3E}">
-        <p14:creationId xmlns:p14="http://schemas.microsoft.com/office/powerpoint/2010/main" val="3278247"/>
-      </p:ext>
-    </p:extLst>
-  </p:cSld>
-  <p:clrMapOvr>
-    <a:masterClrMapping/>
-  </p:clrMapOvr>
-</p:sld>
-</file>
-
 <file path=ppt/slides/slide3.xml><?xml version="1.0" encoding="utf-8"?>
 <p:sld xmlns:a="http://schemas.openxmlformats.org/drawingml/2006/main" xmlns:r="http://schemas.openxmlformats.org/officeDocument/2006/relationships" xmlns:p="http://schemas.openxmlformats.org/presentationml/2006/main">
   <p:cSld>
@@ -13010,7 +15279,7 @@
           <p:cNvPr id="2" name="Title 1">
             <a:extLst>
               <a:ext uri="{FF2B5EF4-FFF2-40B4-BE49-F238E27FC236}">
-                <a16:creationId xmlns:a16="http://schemas.microsoft.com/office/drawing/2014/main" id="{A15E22C5-C2B5-23DF-BF45-19159172DE23}"/>
+                <a16:creationId xmlns:a16="http://schemas.microsoft.com/office/drawing/2014/main" id="{845805E1-63E5-295F-73E3-EEDEBE7086A4}"/>
               </a:ext>
             </a:extLst>
           </p:cNvPr>
@@ -13027,19 +15296,47 @@
           <a:lstStyle/>
           <a:p>
             <a:r>
-              <a:rPr lang="en-US" dirty="0"/>
-              <a:t>How is dose sampled in the blood vessels?</a:t>
-            </a:r>
-            <a:endParaRPr lang="en-CA" dirty="0"/>
+              <a:rPr lang="en-CA" dirty="0"/>
+              <a:t>4ddose Outputs</a:t>
+            </a:r>
+          </a:p>
+        </p:txBody>
+      </p:sp>
+      <p:sp>
+        <p:nvSpPr>
+          <p:cNvPr id="4" name="Slide Number Placeholder 3">
+            <a:extLst>
+              <a:ext uri="{FF2B5EF4-FFF2-40B4-BE49-F238E27FC236}">
+                <a16:creationId xmlns:a16="http://schemas.microsoft.com/office/drawing/2014/main" id="{FAA5038A-3470-6D62-6068-E96098B7DD20}"/>
+              </a:ext>
+            </a:extLst>
+          </p:cNvPr>
+          <p:cNvSpPr>
+            <a:spLocks noGrp="1"/>
+          </p:cNvSpPr>
+          <p:nvPr>
+            <p:ph type="sldNum" sz="quarter" idx="12"/>
+          </p:nvPr>
+        </p:nvSpPr>
+        <p:spPr/>
+        <p:txBody>
+          <a:bodyPr/>
+          <a:lstStyle/>
+          <a:p>
+            <a:fld id="{4BAA6517-F367-4EB3-AFA6-036DD26A3111}" type="slidenum">
+              <a:rPr lang="en-CA" smtClean="0"/>
+              <a:t>6</a:t>
+            </a:fld>
+            <a:endParaRPr lang="en-CA"/>
           </a:p>
         </p:txBody>
       </p:sp>
       <p:pic>
         <p:nvPicPr>
-          <p:cNvPr id="6" name="Content Placeholder 5">
+          <p:cNvPr id="5" name="Content Placeholder 4">
             <a:extLst>
               <a:ext uri="{FF2B5EF4-FFF2-40B4-BE49-F238E27FC236}">
-                <a16:creationId xmlns:a16="http://schemas.microsoft.com/office/drawing/2014/main" id="{D9D91EA4-614D-905C-2885-470C16C4EFF4}"/>
+                <a16:creationId xmlns:a16="http://schemas.microsoft.com/office/drawing/2014/main" id="{D5F1C6F4-AC38-4FFB-DD4F-8C42A2BBD90E}"/>
               </a:ext>
             </a:extLst>
           </p:cNvPr>
@@ -13051,192 +15348,25 @@
           </p:nvPr>
         </p:nvPicPr>
         <p:blipFill>
-          <a:blip r:embed="rId2">
-            <a:extLst>
-              <a:ext uri="{28A0092B-C50C-407E-A947-70E740481C1C}">
-                <a14:useLocalDpi xmlns:a14="http://schemas.microsoft.com/office/drawing/2010/main" val="0"/>
-              </a:ext>
-            </a:extLst>
-          </a:blip>
+          <a:blip r:embed="rId2"/>
           <a:stretch>
             <a:fillRect/>
           </a:stretch>
         </p:blipFill>
         <p:spPr>
           <a:xfrm>
-            <a:off x="3053899" y="1846263"/>
-            <a:ext cx="6144528" cy="4022725"/>
+            <a:off x="1096963" y="2184167"/>
+            <a:ext cx="10058400" cy="3346917"/>
           </a:xfrm>
           <a:prstGeom prst="rect">
             <a:avLst/>
           </a:prstGeom>
         </p:spPr>
       </p:pic>
-      <p:sp>
-        <p:nvSpPr>
-          <p:cNvPr id="4" name="Slide Number Placeholder 3">
-            <a:extLst>
-              <a:ext uri="{FF2B5EF4-FFF2-40B4-BE49-F238E27FC236}">
-                <a16:creationId xmlns:a16="http://schemas.microsoft.com/office/drawing/2014/main" id="{5BD64DB3-73DD-DC12-9EC0-102FD0E34CD5}"/>
-              </a:ext>
-            </a:extLst>
-          </p:cNvPr>
-          <p:cNvSpPr>
-            <a:spLocks noGrp="1"/>
-          </p:cNvSpPr>
-          <p:nvPr>
-            <p:ph type="sldNum" sz="quarter" idx="12"/>
-          </p:nvPr>
-        </p:nvSpPr>
-        <p:spPr/>
-        <p:txBody>
-          <a:bodyPr/>
-          <a:lstStyle/>
-          <a:p>
-            <a:fld id="{4BAA6517-F367-4EB3-AFA6-036DD26A3111}" type="slidenum">
-              <a:rPr lang="en-CA" smtClean="0"/>
-              <a:t>6</a:t>
-            </a:fld>
-            <a:endParaRPr lang="en-CA"/>
-          </a:p>
-        </p:txBody>
-      </p:sp>
-      <p:pic>
-        <p:nvPicPr>
-          <p:cNvPr id="5" name="Picture 4">
-            <a:extLst>
-              <a:ext uri="{FF2B5EF4-FFF2-40B4-BE49-F238E27FC236}">
-                <a16:creationId xmlns:a16="http://schemas.microsoft.com/office/drawing/2014/main" id="{63E91F48-EF63-E670-5CB7-A02DA59D198C}"/>
-              </a:ext>
-            </a:extLst>
-          </p:cNvPr>
-          <p:cNvPicPr>
-            <a:picLocks noChangeAspect="1"/>
-          </p:cNvPicPr>
-          <p:nvPr/>
-        </p:nvPicPr>
-        <p:blipFill>
-          <a:blip r:embed="rId3">
-            <a:extLst>
-              <a:ext uri="{28A0092B-C50C-407E-A947-70E740481C1C}">
-                <a14:useLocalDpi xmlns:a14="http://schemas.microsoft.com/office/drawing/2010/main" val="0"/>
-              </a:ext>
-            </a:extLst>
-          </a:blip>
-          <a:stretch>
-            <a:fillRect/>
-          </a:stretch>
-        </p:blipFill>
-        <p:spPr>
-          <a:xfrm>
-            <a:off x="310208" y="1737360"/>
-            <a:ext cx="2118360" cy="3927237"/>
-          </a:xfrm>
-          <a:prstGeom prst="rect">
-            <a:avLst/>
-          </a:prstGeom>
-        </p:spPr>
-      </p:pic>
-      <p:sp>
-        <p:nvSpPr>
-          <p:cNvPr id="3" name="Rectangle 2">
-            <a:extLst>
-              <a:ext uri="{FF2B5EF4-FFF2-40B4-BE49-F238E27FC236}">
-                <a16:creationId xmlns:a16="http://schemas.microsoft.com/office/drawing/2014/main" id="{FBCA739D-465C-AC0E-C157-56A2C62FA738}"/>
-              </a:ext>
-            </a:extLst>
-          </p:cNvPr>
-          <p:cNvSpPr/>
-          <p:nvPr/>
-        </p:nvSpPr>
-        <p:spPr>
-          <a:xfrm>
-            <a:off x="3524250" y="5266215"/>
-            <a:ext cx="5514975" cy="461010"/>
-          </a:xfrm>
-          <a:prstGeom prst="rect">
-            <a:avLst/>
-          </a:prstGeom>
-          <a:solidFill>
-            <a:schemeClr val="bg1"/>
-          </a:solidFill>
-        </p:spPr>
-        <p:style>
-          <a:lnRef idx="2">
-            <a:schemeClr val="accent1">
-              <a:shade val="15000"/>
-            </a:schemeClr>
-          </a:lnRef>
-          <a:fillRef idx="1">
-            <a:schemeClr val="accent1"/>
-          </a:fillRef>
-          <a:effectRef idx="0">
-            <a:schemeClr val="accent1"/>
-          </a:effectRef>
-          <a:fontRef idx="minor">
-            <a:schemeClr val="lt1"/>
-          </a:fontRef>
-        </p:style>
-        <p:txBody>
-          <a:bodyPr rtlCol="0" anchor="ctr"/>
-          <a:lstStyle/>
-          <a:p>
-            <a:pPr algn="ctr"/>
-            <a:endParaRPr lang="en-CA"/>
-          </a:p>
-        </p:txBody>
-      </p:sp>
-      <p:pic>
-        <p:nvPicPr>
-          <p:cNvPr id="1026" name="Picture 2">
-            <a:extLst>
-              <a:ext uri="{FF2B5EF4-FFF2-40B4-BE49-F238E27FC236}">
-                <a16:creationId xmlns:a16="http://schemas.microsoft.com/office/drawing/2014/main" id="{9F8C1166-9EBE-934F-BEED-95AA3F6CA409}"/>
-              </a:ext>
-            </a:extLst>
-          </p:cNvPr>
-          <p:cNvPicPr>
-            <a:picLocks noChangeAspect="1" noChangeArrowheads="1"/>
-          </p:cNvPicPr>
-          <p:nvPr/>
-        </p:nvPicPr>
-        <p:blipFill>
-          <a:blip r:embed="rId4">
-            <a:extLst>
-              <a:ext uri="{28A0092B-C50C-407E-A947-70E740481C1C}">
-                <a14:useLocalDpi xmlns:a14="http://schemas.microsoft.com/office/drawing/2010/main" val="0"/>
-              </a:ext>
-            </a:extLst>
-          </a:blip>
-          <a:srcRect/>
-          <a:stretch>
-            <a:fillRect/>
-          </a:stretch>
-        </p:blipFill>
-        <p:spPr bwMode="auto">
-          <a:xfrm>
-            <a:off x="3811588" y="5344320"/>
-            <a:ext cx="4629150" cy="304800"/>
-          </a:xfrm>
-          <a:prstGeom prst="rect">
-            <a:avLst/>
-          </a:prstGeom>
-          <a:noFill/>
-          <a:extLst>
-            <a:ext uri="{909E8E84-426E-40DD-AFC4-6F175D3DCCD1}">
-              <a14:hiddenFill xmlns:a14="http://schemas.microsoft.com/office/drawing/2010/main">
-                <a:solidFill>
-                  <a:srgbClr val="FFFFFF"/>
-                </a:solidFill>
-              </a14:hiddenFill>
-            </a:ext>
-          </a:extLst>
-        </p:spPr>
-      </p:pic>
     </p:spTree>
     <p:extLst>
       <p:ext uri="{BB962C8B-B14F-4D97-AF65-F5344CB8AC3E}">
-        <p14:creationId xmlns:p14="http://schemas.microsoft.com/office/powerpoint/2010/main" val="3781331518"/>
+        <p14:creationId xmlns:p14="http://schemas.microsoft.com/office/powerpoint/2010/main" val="760994098"/>
       </p:ext>
     </p:extLst>
   </p:cSld>
@@ -13395,6 +15525,48 @@
           </a:prstGeom>
         </p:spPr>
       </p:pic>
+      <p:sp>
+        <p:nvSpPr>
+          <p:cNvPr id="3" name="TextBox 2">
+            <a:extLst>
+              <a:ext uri="{FF2B5EF4-FFF2-40B4-BE49-F238E27FC236}">
+                <a16:creationId xmlns:a16="http://schemas.microsoft.com/office/drawing/2014/main" id="{2E1529F1-B6F8-7DFA-0E00-D95097C5C022}"/>
+              </a:ext>
+            </a:extLst>
+          </p:cNvPr>
+          <p:cNvSpPr txBox="1"/>
+          <p:nvPr/>
+        </p:nvSpPr>
+        <p:spPr>
+          <a:xfrm>
+            <a:off x="7347242" y="5664964"/>
+            <a:ext cx="489166" cy="230832"/>
+          </a:xfrm>
+          <a:prstGeom prst="rect">
+            <a:avLst/>
+          </a:prstGeom>
+          <a:solidFill>
+            <a:schemeClr val="bg1"/>
+          </a:solidFill>
+        </p:spPr>
+        <p:txBody>
+          <a:bodyPr wrap="square" rtlCol="0">
+            <a:spAutoFit/>
+          </a:bodyPr>
+          <a:lstStyle/>
+          <a:p>
+            <a:pPr algn="ctr"/>
+            <a:r>
+              <a:rPr lang="en-CA" sz="900" dirty="0" err="1"/>
+              <a:t>dst</a:t>
+            </a:r>
+            <a:r>
+              <a:rPr lang="en-CA" sz="900" dirty="0"/>
+              <a:t> (s)</a:t>
+            </a:r>
+          </a:p>
+        </p:txBody>
+      </p:sp>
     </p:spTree>
     <p:extLst>
       <p:ext uri="{BB962C8B-B14F-4D97-AF65-F5344CB8AC3E}">
@@ -13430,7 +15602,7 @@
           <p:cNvPr id="2" name="Title 1">
             <a:extLst>
               <a:ext uri="{FF2B5EF4-FFF2-40B4-BE49-F238E27FC236}">
-                <a16:creationId xmlns:a16="http://schemas.microsoft.com/office/drawing/2014/main" id="{B5F71BD1-4E07-89AD-E95B-E2FCF3F3B4BD}"/>
+                <a16:creationId xmlns:a16="http://schemas.microsoft.com/office/drawing/2014/main" id="{A15E22C5-C2B5-23DF-BF45-19159172DE23}"/>
               </a:ext>
             </a:extLst>
           </p:cNvPr>
@@ -13448,163 +15620,56 @@
           <a:p>
             <a:r>
               <a:rPr lang="en-US" dirty="0"/>
-              <a:t>Experimental Set-Up: </a:t>
-            </a:r>
-            <a:r>
-              <a:rPr lang="en-US" sz="4000" dirty="0"/>
-              <a:t>Minimizing Uncertainty </a:t>
+              <a:t>How is dose sampled in the blood vessels?</a:t>
             </a:r>
             <a:endParaRPr lang="en-CA" dirty="0"/>
           </a:p>
         </p:txBody>
       </p:sp>
-      <p:sp>
-        <p:nvSpPr>
-          <p:cNvPr id="3" name="Content Placeholder 2">
+      <p:pic>
+        <p:nvPicPr>
+          <p:cNvPr id="6" name="Content Placeholder 5">
             <a:extLst>
               <a:ext uri="{FF2B5EF4-FFF2-40B4-BE49-F238E27FC236}">
-                <a16:creationId xmlns:a16="http://schemas.microsoft.com/office/drawing/2014/main" id="{97401A52-1201-D79F-3910-BF7CA817185E}"/>
+                <a16:creationId xmlns:a16="http://schemas.microsoft.com/office/drawing/2014/main" id="{D9D91EA4-614D-905C-2885-470C16C4EFF4}"/>
               </a:ext>
             </a:extLst>
           </p:cNvPr>
-          <p:cNvSpPr>
-            <a:spLocks noGrp="1"/>
-          </p:cNvSpPr>
+          <p:cNvPicPr>
+            <a:picLocks noGrp="1" noChangeAspect="1"/>
+          </p:cNvPicPr>
           <p:nvPr>
             <p:ph idx="1"/>
           </p:nvPr>
-        </p:nvSpPr>
-        <p:spPr/>
-        <p:txBody>
-          <a:bodyPr/>
-          <a:lstStyle/>
-          <a:p>
-            <a:pPr marL="0" indent="0">
-              <a:buNone/>
-            </a:pPr>
-            <a:r>
-              <a:rPr lang="en-US" dirty="0"/>
-              <a:t>Three sources of uncertainty:</a:t>
-            </a:r>
-            <a:endParaRPr lang="en-CA" dirty="0"/>
-          </a:p>
-          <a:p>
-            <a:pPr marL="457200" indent="-457200">
-              <a:buFont typeface="+mj-lt"/>
-              <a:buAutoNum type="arabicPeriod"/>
-            </a:pPr>
-            <a:r>
-              <a:rPr lang="en-CA" dirty="0"/>
-              <a:t>4D Dose Simulations</a:t>
-            </a:r>
-          </a:p>
-          <a:p>
-            <a:pPr marL="749808" lvl="1" indent="-457200">
-              <a:buFont typeface="+mj-lt"/>
-              <a:buAutoNum type="arabicPeriod"/>
-            </a:pPr>
-            <a:r>
-              <a:rPr lang="en-CA" dirty="0"/>
-              <a:t>Number of particles simulated (Stochastic)</a:t>
-            </a:r>
-          </a:p>
-          <a:p>
-            <a:pPr marL="932688" lvl="2" indent="-457200"/>
-            <a:r>
-              <a:rPr lang="en-CA" dirty="0"/>
-              <a:t>↑ the number of particles simulated = ↓ stochastic uncertainty = </a:t>
-            </a:r>
-            <a:r>
-              <a:rPr lang="en-CA" b="1" dirty="0"/>
-              <a:t>↑ simulation time </a:t>
-            </a:r>
-          </a:p>
-          <a:p>
-            <a:pPr marL="932688" lvl="2" indent="-457200"/>
-            <a:r>
-              <a:rPr lang="en-CA" b="1" dirty="0"/>
-              <a:t>Solution: </a:t>
-            </a:r>
-            <a:r>
-              <a:rPr lang="en-CA" dirty="0"/>
-              <a:t> Run each sweep of the Co-60 head as its own simulation with 2E11 particles. Each sweep takes ~20 hrs to calculate </a:t>
-            </a:r>
-          </a:p>
-          <a:p>
-            <a:pPr marL="749808" lvl="1" indent="-457200">
-              <a:buFont typeface="+mj-lt"/>
-              <a:buAutoNum type="arabicPeriod"/>
-            </a:pPr>
-            <a:r>
-              <a:rPr lang="en-CA" dirty="0"/>
-              <a:t>Size of time bin used to sample dose data</a:t>
-            </a:r>
-          </a:p>
-          <a:p>
-            <a:pPr marL="932688" lvl="2" indent="-457200"/>
-            <a:r>
-              <a:rPr lang="en-CA" dirty="0"/>
-              <a:t>↑ time bin size = </a:t>
-            </a:r>
-            <a:r>
-              <a:rPr lang="en-CA" b="1" dirty="0"/>
-              <a:t>↓ time resolution = ↑ positional averaging &amp; ↑ particle number uncertainty</a:t>
-            </a:r>
-          </a:p>
-          <a:p>
-            <a:pPr marL="932688" lvl="2" indent="-457200"/>
-            <a:r>
-              <a:rPr lang="en-CA" b="1" dirty="0"/>
-              <a:t>Solution: </a:t>
-            </a:r>
-            <a:r>
-              <a:rPr lang="en-CA" dirty="0"/>
-              <a:t>Determine the time bin which minimizes </a:t>
-            </a:r>
-            <a:endParaRPr lang="en-CA" b="1" dirty="0"/>
-          </a:p>
-          <a:p>
-            <a:pPr marL="457200" indent="-457200">
-              <a:buFont typeface="+mj-lt"/>
-              <a:buAutoNum type="arabicPeriod"/>
-            </a:pPr>
-            <a:r>
-              <a:rPr lang="en-CA" dirty="0"/>
-              <a:t>Number of BVs Simulated (Stochastic)</a:t>
-            </a:r>
-            <a:endParaRPr lang="en-US" dirty="0"/>
-          </a:p>
-          <a:p>
-            <a:pPr marL="932688" lvl="2" indent="-457200"/>
-            <a:r>
-              <a:rPr lang="en-CA" dirty="0"/>
-              <a:t>↑ the number of particles simulated = ↓ stochastic uncertainty = </a:t>
-            </a:r>
-            <a:r>
-              <a:rPr lang="en-CA" b="1" dirty="0"/>
-              <a:t>↑ simulation time </a:t>
-            </a:r>
-          </a:p>
-          <a:p>
-            <a:pPr marL="932688" lvl="2" indent="-457200"/>
-            <a:r>
-              <a:rPr lang="en-CA" b="1" dirty="0"/>
-              <a:t>Solution: </a:t>
-            </a:r>
-            <a:r>
-              <a:rPr lang="en-CA" dirty="0"/>
-              <a:t>Characterize the mean and std of the dose to the BVs as a function of BV number</a:t>
-            </a:r>
-            <a:endParaRPr lang="en-CA" b="1" dirty="0"/>
-          </a:p>
-        </p:txBody>
-      </p:sp>
+        </p:nvPicPr>
+        <p:blipFill>
+          <a:blip r:embed="rId2">
+            <a:extLst>
+              <a:ext uri="{28A0092B-C50C-407E-A947-70E740481C1C}">
+                <a14:useLocalDpi xmlns:a14="http://schemas.microsoft.com/office/drawing/2010/main" val="0"/>
+              </a:ext>
+            </a:extLst>
+          </a:blip>
+          <a:stretch>
+            <a:fillRect/>
+          </a:stretch>
+        </p:blipFill>
+        <p:spPr>
+          <a:xfrm>
+            <a:off x="3053899" y="1846263"/>
+            <a:ext cx="6144528" cy="4022725"/>
+          </a:xfrm>
+          <a:prstGeom prst="rect">
+            <a:avLst/>
+          </a:prstGeom>
+        </p:spPr>
+      </p:pic>
       <p:sp>
         <p:nvSpPr>
           <p:cNvPr id="4" name="Slide Number Placeholder 3">
             <a:extLst>
               <a:ext uri="{FF2B5EF4-FFF2-40B4-BE49-F238E27FC236}">
-                <a16:creationId xmlns:a16="http://schemas.microsoft.com/office/drawing/2014/main" id="{44F37BDC-2374-9C9A-6430-E0C96632AD0D}"/>
+                <a16:creationId xmlns:a16="http://schemas.microsoft.com/office/drawing/2014/main" id="{5BD64DB3-73DD-DC12-9EC0-102FD0E34CD5}"/>
               </a:ext>
             </a:extLst>
           </p:cNvPr>
@@ -13628,82 +15693,48 @@
           </a:p>
         </p:txBody>
       </p:sp>
-    </p:spTree>
-    <p:extLst>
-      <p:ext uri="{BB962C8B-B14F-4D97-AF65-F5344CB8AC3E}">
-        <p14:creationId xmlns:p14="http://schemas.microsoft.com/office/powerpoint/2010/main" val="2965336870"/>
-      </p:ext>
-    </p:extLst>
-  </p:cSld>
-  <p:clrMapOvr>
-    <a:masterClrMapping/>
-  </p:clrMapOvr>
-</p:sld>
-</file>
-
-<file path=ppt/slides/slide9.xml><?xml version="1.0" encoding="utf-8"?>
-<p:sld xmlns:a="http://schemas.openxmlformats.org/drawingml/2006/main" xmlns:r="http://schemas.openxmlformats.org/officeDocument/2006/relationships" xmlns:p="http://schemas.openxmlformats.org/presentationml/2006/main">
-  <p:cSld>
-    <p:spTree>
-      <p:nvGrpSpPr>
-        <p:cNvPr id="1" name="">
-          <a:extLst>
-            <a:ext uri="{FF2B5EF4-FFF2-40B4-BE49-F238E27FC236}">
-              <a16:creationId xmlns:a16="http://schemas.microsoft.com/office/drawing/2014/main" id="{D0DB8130-042B-B4E1-C9AA-68BC013FB4D1}"/>
-            </a:ext>
-          </a:extLst>
-        </p:cNvPr>
-        <p:cNvGrpSpPr/>
-        <p:nvPr/>
-      </p:nvGrpSpPr>
-      <p:grpSpPr>
-        <a:xfrm>
-          <a:off x="0" y="0"/>
-          <a:ext cx="0" cy="0"/>
-          <a:chOff x="0" y="0"/>
-          <a:chExt cx="0" cy="0"/>
-        </a:xfrm>
-      </p:grpSpPr>
-      <p:sp>
-        <p:nvSpPr>
-          <p:cNvPr id="6" name="Slide Number Placeholder 5">
+      <p:pic>
+        <p:nvPicPr>
+          <p:cNvPr id="5" name="Picture 4">
             <a:extLst>
               <a:ext uri="{FF2B5EF4-FFF2-40B4-BE49-F238E27FC236}">
-                <a16:creationId xmlns:a16="http://schemas.microsoft.com/office/drawing/2014/main" id="{8FCD4CA3-D4E6-1779-B582-CDACDAEF05DD}"/>
+                <a16:creationId xmlns:a16="http://schemas.microsoft.com/office/drawing/2014/main" id="{63E91F48-EF63-E670-5CB7-A02DA59D198C}"/>
               </a:ext>
             </a:extLst>
           </p:cNvPr>
-          <p:cNvSpPr>
-            <a:spLocks noGrp="1"/>
-          </p:cNvSpPr>
-          <p:nvPr>
-            <p:ph type="sldNum" sz="quarter" idx="12"/>
-          </p:nvPr>
-        </p:nvSpPr>
+          <p:cNvPicPr>
+            <a:picLocks noChangeAspect="1"/>
+          </p:cNvPicPr>
+          <p:nvPr/>
+        </p:nvPicPr>
+        <p:blipFill>
+          <a:blip r:embed="rId3">
+            <a:extLst>
+              <a:ext uri="{28A0092B-C50C-407E-A947-70E740481C1C}">
+                <a14:useLocalDpi xmlns:a14="http://schemas.microsoft.com/office/drawing/2010/main" val="0"/>
+              </a:ext>
+            </a:extLst>
+          </a:blip>
+          <a:stretch>
+            <a:fillRect/>
+          </a:stretch>
+        </p:blipFill>
         <p:spPr>
           <a:xfrm>
-            <a:off x="9282793" y="6420757"/>
-            <a:ext cx="2743200" cy="365125"/>
+            <a:off x="310208" y="1737360"/>
+            <a:ext cx="2118360" cy="3927237"/>
           </a:xfrm>
+          <a:prstGeom prst="rect">
+            <a:avLst/>
+          </a:prstGeom>
         </p:spPr>
-        <p:txBody>
-          <a:bodyPr/>
-          <a:lstStyle/>
-          <a:p>
-            <a:fld id="{1E5564C7-97C0-40C1-9717-452594735347}" type="slidenum">
-              <a:rPr lang="en-CA" smtClean="0"/>
-              <a:t>9</a:t>
-            </a:fld>
-            <a:endParaRPr lang="en-CA" dirty="0"/>
-          </a:p>
-        </p:txBody>
-      </p:sp>
-      <p:sp>
-        <p:nvSpPr>
-          <p:cNvPr id="4" name="Rectangle: Rounded Corners 3">
+      </p:pic>
+      <p:sp>
+        <p:nvSpPr>
+          <p:cNvPr id="3" name="Rectangle 2">
             <a:extLst>
               <a:ext uri="{FF2B5EF4-FFF2-40B4-BE49-F238E27FC236}">
-                <a16:creationId xmlns:a16="http://schemas.microsoft.com/office/drawing/2014/main" id="{F258722A-0186-76C8-81DB-DBCB03E12997}"/>
+                <a16:creationId xmlns:a16="http://schemas.microsoft.com/office/drawing/2014/main" id="{FBCA739D-465C-AC0E-C157-56A2C62FA738}"/>
               </a:ext>
             </a:extLst>
           </p:cNvPr>
@@ -13712,200 +15743,18 @@
         </p:nvSpPr>
         <p:spPr>
           <a:xfrm>
-            <a:off x="2351314" y="751957"/>
-            <a:ext cx="7489371" cy="2008409"/>
+            <a:off x="3515106" y="5202205"/>
+            <a:ext cx="5546598" cy="558515"/>
           </a:xfrm>
-          <a:prstGeom prst="roundRect">
+          <a:prstGeom prst="rect">
             <a:avLst/>
           </a:prstGeom>
           <a:solidFill>
-            <a:schemeClr val="accent1"/>
-          </a:solidFill>
-          <a:ln>
-            <a:noFill/>
-          </a:ln>
-        </p:spPr>
-        <p:style>
-          <a:lnRef idx="2">
-            <a:schemeClr val="accent1">
-              <a:shade val="15000"/>
-            </a:schemeClr>
-          </a:lnRef>
-          <a:fillRef idx="1">
-            <a:schemeClr val="accent1"/>
-          </a:fillRef>
-          <a:effectRef idx="0">
-            <a:schemeClr val="accent1"/>
-          </a:effectRef>
-          <a:fontRef idx="minor">
-            <a:schemeClr val="lt1"/>
-          </a:fontRef>
-        </p:style>
-        <p:txBody>
-          <a:bodyPr rtlCol="0" anchor="ctr"/>
-          <a:lstStyle/>
-          <a:p>
-            <a:pPr algn="ctr"/>
-            <a:r>
-              <a:rPr lang="en-US" sz="3600" dirty="0">
-                <a:solidFill>
-                  <a:schemeClr val="bg1"/>
-                </a:solidFill>
-              </a:rPr>
-              <a:t>What is the heterogeneity of dose to the circulating blood volume during TBI?</a:t>
-            </a:r>
-            <a:endParaRPr lang="en-CA" sz="3600" dirty="0">
-              <a:solidFill>
-                <a:schemeClr val="bg1"/>
-              </a:solidFill>
-            </a:endParaRPr>
-          </a:p>
-        </p:txBody>
-      </p:sp>
-      <p:sp>
-        <p:nvSpPr>
-          <p:cNvPr id="14" name="Rectangle: Rounded Corners 13">
-            <a:extLst>
-              <a:ext uri="{FF2B5EF4-FFF2-40B4-BE49-F238E27FC236}">
-                <a16:creationId xmlns:a16="http://schemas.microsoft.com/office/drawing/2014/main" id="{9B69EA45-4B9B-A788-FC47-69F62B2EFCCD}"/>
-              </a:ext>
-            </a:extLst>
-          </p:cNvPr>
-          <p:cNvSpPr/>
-          <p:nvPr/>
-        </p:nvSpPr>
-        <p:spPr>
-          <a:xfrm>
-            <a:off x="342000" y="3953361"/>
-            <a:ext cx="3197678" cy="2277835"/>
-          </a:xfrm>
-          <a:prstGeom prst="roundRect">
-            <a:avLst/>
-          </a:prstGeom>
-          <a:solidFill>
-            <a:schemeClr val="bg1">
-              <a:lumMod val="50000"/>
-            </a:schemeClr>
-          </a:solidFill>
-          <a:ln>
-            <a:noFill/>
-          </a:ln>
-        </p:spPr>
-        <p:style>
-          <a:lnRef idx="2">
-            <a:schemeClr val="accent1">
-              <a:shade val="15000"/>
-            </a:schemeClr>
-          </a:lnRef>
-          <a:fillRef idx="1">
-            <a:schemeClr val="accent1"/>
-          </a:fillRef>
-          <a:effectRef idx="0">
-            <a:schemeClr val="accent1"/>
-          </a:effectRef>
-          <a:fontRef idx="minor">
-            <a:schemeClr val="lt1"/>
-          </a:fontRef>
-        </p:style>
-        <p:txBody>
-          <a:bodyPr rtlCol="0" anchor="ctr"/>
-          <a:lstStyle/>
-          <a:p>
-            <a:pPr algn="ctr"/>
-            <a:r>
-              <a:rPr lang="en-US" sz="3600" dirty="0"/>
-              <a:t>Determine dose deposition in time</a:t>
-            </a:r>
-            <a:endParaRPr lang="en-CA" sz="3600" dirty="0"/>
-          </a:p>
-        </p:txBody>
-      </p:sp>
-      <p:sp>
-        <p:nvSpPr>
-          <p:cNvPr id="15" name="Rectangle: Rounded Corners 14">
-            <a:extLst>
-              <a:ext uri="{FF2B5EF4-FFF2-40B4-BE49-F238E27FC236}">
-                <a16:creationId xmlns:a16="http://schemas.microsoft.com/office/drawing/2014/main" id="{A7B3B9F3-CB13-05BF-F629-5A4735F3A304}"/>
-              </a:ext>
-            </a:extLst>
-          </p:cNvPr>
-          <p:cNvSpPr/>
-          <p:nvPr/>
-        </p:nvSpPr>
-        <p:spPr>
-          <a:xfrm>
-            <a:off x="4497161" y="3961881"/>
-            <a:ext cx="3197678" cy="2277835"/>
-          </a:xfrm>
-          <a:prstGeom prst="roundRect">
-            <a:avLst/>
-          </a:prstGeom>
-          <a:solidFill>
-            <a:schemeClr val="bg1">
-              <a:lumMod val="50000"/>
-            </a:schemeClr>
-          </a:solidFill>
-          <a:ln>
-            <a:noFill/>
-          </a:ln>
-        </p:spPr>
-        <p:style>
-          <a:lnRef idx="2">
-            <a:schemeClr val="accent1">
-              <a:shade val="15000"/>
-            </a:schemeClr>
-          </a:lnRef>
-          <a:fillRef idx="1">
-            <a:schemeClr val="accent1"/>
-          </a:fillRef>
-          <a:effectRef idx="0">
-            <a:schemeClr val="accent1"/>
-          </a:effectRef>
-          <a:fontRef idx="minor">
-            <a:schemeClr val="lt1"/>
-          </a:fontRef>
-        </p:style>
-        <p:txBody>
-          <a:bodyPr rtlCol="0" anchor="ctr"/>
-          <a:lstStyle/>
-          <a:p>
-            <a:pPr algn="ctr"/>
-            <a:r>
-              <a:rPr lang="en-US" sz="3600" dirty="0"/>
-              <a:t>Track blood flow through the body</a:t>
-            </a:r>
-            <a:endParaRPr lang="en-CA" sz="3600" dirty="0"/>
-          </a:p>
-        </p:txBody>
-      </p:sp>
-      <p:sp>
-        <p:nvSpPr>
-          <p:cNvPr id="17" name="Rectangle: Rounded Corners 16">
-            <a:extLst>
-              <a:ext uri="{FF2B5EF4-FFF2-40B4-BE49-F238E27FC236}">
-                <a16:creationId xmlns:a16="http://schemas.microsoft.com/office/drawing/2014/main" id="{F19784DD-7BC5-8411-A8DD-A6866B6B3705}"/>
-              </a:ext>
-            </a:extLst>
-          </p:cNvPr>
-          <p:cNvSpPr/>
-          <p:nvPr/>
-        </p:nvSpPr>
-        <p:spPr>
-          <a:xfrm>
-            <a:off x="8652322" y="3953360"/>
-            <a:ext cx="3197678" cy="2277835"/>
-          </a:xfrm>
-          <a:prstGeom prst="roundRect">
-            <a:avLst/>
-          </a:prstGeom>
-          <a:solidFill>
-            <a:schemeClr val="accent1"/>
+            <a:schemeClr val="bg1"/>
           </a:solidFill>
           <a:ln>
             <a:solidFill>
-              <a:schemeClr val="accent2">
-                <a:lumMod val="75000"/>
-              </a:schemeClr>
+              <a:schemeClr val="bg2"/>
             </a:solidFill>
           </a:ln>
         </p:spPr>
@@ -13930,178 +15779,63 @@
           <a:lstStyle/>
           <a:p>
             <a:pPr algn="ctr"/>
-            <a:r>
-              <a:rPr lang="en-US" sz="3600" dirty="0">
-                <a:solidFill>
-                  <a:schemeClr val="bg1"/>
-                </a:solidFill>
-              </a:rPr>
-              <a:t>Model various TBI treatments</a:t>
-            </a:r>
-            <a:endParaRPr lang="en-CA" sz="3600" dirty="0">
-              <a:solidFill>
-                <a:schemeClr val="bg1"/>
-              </a:solidFill>
-            </a:endParaRPr>
-          </a:p>
-        </p:txBody>
-      </p:sp>
-      <p:cxnSp>
-        <p:nvCxnSpPr>
-          <p:cNvPr id="19" name="Straight Connector 18">
+            <a:endParaRPr lang="en-CA"/>
+          </a:p>
+        </p:txBody>
+      </p:sp>
+      <p:pic>
+        <p:nvPicPr>
+          <p:cNvPr id="1026" name="Picture 2">
             <a:extLst>
               <a:ext uri="{FF2B5EF4-FFF2-40B4-BE49-F238E27FC236}">
-                <a16:creationId xmlns:a16="http://schemas.microsoft.com/office/drawing/2014/main" id="{FD0F56B8-79E3-0FDB-1B88-8599F40DDAB7}"/>
+                <a16:creationId xmlns:a16="http://schemas.microsoft.com/office/drawing/2014/main" id="{9F8C1166-9EBE-934F-BEED-95AA3F6CA409}"/>
               </a:ext>
             </a:extLst>
           </p:cNvPr>
-          <p:cNvCxnSpPr>
-            <a:stCxn id="14" idx="0"/>
-            <a:endCxn id="4" idx="2"/>
-          </p:cNvCxnSpPr>
+          <p:cNvPicPr>
+            <a:picLocks noChangeAspect="1" noChangeArrowheads="1"/>
+          </p:cNvPicPr>
           <p:nvPr/>
-        </p:nvCxnSpPr>
-        <p:spPr>
-          <a:xfrm flipV="1">
-            <a:off x="1940839" y="2760366"/>
-            <a:ext cx="4155161" cy="1192995"/>
+        </p:nvPicPr>
+        <p:blipFill>
+          <a:blip r:embed="rId4">
+            <a:extLst>
+              <a:ext uri="{28A0092B-C50C-407E-A947-70E740481C1C}">
+                <a14:useLocalDpi xmlns:a14="http://schemas.microsoft.com/office/drawing/2010/main" val="0"/>
+              </a:ext>
+            </a:extLst>
+          </a:blip>
+          <a:srcRect/>
+          <a:stretch>
+            <a:fillRect/>
+          </a:stretch>
+        </p:blipFill>
+        <p:spPr bwMode="auto">
+          <a:xfrm>
+            <a:off x="3665284" y="5315346"/>
+            <a:ext cx="4629150" cy="304800"/>
           </a:xfrm>
-          <a:prstGeom prst="line">
+          <a:prstGeom prst="rect">
             <a:avLst/>
           </a:prstGeom>
-          <a:ln w="19050" cap="flat" cmpd="sng" algn="ctr">
-            <a:solidFill>
-              <a:schemeClr val="bg1">
-                <a:lumMod val="50000"/>
-              </a:schemeClr>
-            </a:solidFill>
-            <a:prstDash val="solid"/>
-            <a:round/>
-            <a:headEnd type="none" w="med" len="med"/>
-            <a:tailEnd type="none" w="med" len="med"/>
-          </a:ln>
+          <a:noFill/>
+          <a:extLst>
+            <a:ext uri="{909E8E84-426E-40DD-AFC4-6F175D3DCCD1}">
+              <a14:hiddenFill xmlns:a14="http://schemas.microsoft.com/office/drawing/2010/main">
+                <a:solidFill>
+                  <a:srgbClr val="FFFFFF"/>
+                </a:solidFill>
+              </a14:hiddenFill>
+            </a:ext>
+          </a:extLst>
         </p:spPr>
-        <p:style>
-          <a:lnRef idx="0">
-            <a:scrgbClr r="0" g="0" b="0"/>
-          </a:lnRef>
-          <a:fillRef idx="0">
-            <a:scrgbClr r="0" g="0" b="0"/>
-          </a:fillRef>
-          <a:effectRef idx="0">
-            <a:scrgbClr r="0" g="0" b="0"/>
-          </a:effectRef>
-          <a:fontRef idx="minor">
-            <a:schemeClr val="tx1"/>
-          </a:fontRef>
-        </p:style>
-      </p:cxnSp>
-      <p:cxnSp>
-        <p:nvCxnSpPr>
-          <p:cNvPr id="20" name="Straight Connector 19">
+      </p:pic>
+      <p:sp>
+        <p:nvSpPr>
+          <p:cNvPr id="8" name="TextBox 7">
             <a:extLst>
               <a:ext uri="{FF2B5EF4-FFF2-40B4-BE49-F238E27FC236}">
-                <a16:creationId xmlns:a16="http://schemas.microsoft.com/office/drawing/2014/main" id="{62A06013-D998-FFA0-934C-7F382C260B25}"/>
-              </a:ext>
-            </a:extLst>
-          </p:cNvPr>
-          <p:cNvCxnSpPr>
-            <a:cxnSpLocks/>
-            <a:stCxn id="15" idx="0"/>
-            <a:endCxn id="4" idx="2"/>
-          </p:cNvCxnSpPr>
-          <p:nvPr/>
-        </p:nvCxnSpPr>
-        <p:spPr>
-          <a:xfrm flipV="1">
-            <a:off x="6096000" y="2760366"/>
-            <a:ext cx="0" cy="1201515"/>
-          </a:xfrm>
-          <a:prstGeom prst="line">
-            <a:avLst/>
-          </a:prstGeom>
-          <a:ln w="19050" cap="flat" cmpd="sng" algn="ctr">
-            <a:solidFill>
-              <a:schemeClr val="bg1">
-                <a:lumMod val="50000"/>
-              </a:schemeClr>
-            </a:solidFill>
-            <a:prstDash val="solid"/>
-            <a:round/>
-            <a:headEnd type="none" w="med" len="med"/>
-            <a:tailEnd type="none" w="med" len="med"/>
-          </a:ln>
-        </p:spPr>
-        <p:style>
-          <a:lnRef idx="0">
-            <a:scrgbClr r="0" g="0" b="0"/>
-          </a:lnRef>
-          <a:fillRef idx="0">
-            <a:scrgbClr r="0" g="0" b="0"/>
-          </a:fillRef>
-          <a:effectRef idx="0">
-            <a:scrgbClr r="0" g="0" b="0"/>
-          </a:effectRef>
-          <a:fontRef idx="minor">
-            <a:schemeClr val="tx1"/>
-          </a:fontRef>
-        </p:style>
-      </p:cxnSp>
-      <p:cxnSp>
-        <p:nvCxnSpPr>
-          <p:cNvPr id="23" name="Straight Connector 22">
-            <a:extLst>
-              <a:ext uri="{FF2B5EF4-FFF2-40B4-BE49-F238E27FC236}">
-                <a16:creationId xmlns:a16="http://schemas.microsoft.com/office/drawing/2014/main" id="{4968E942-D279-4FAC-52BB-6709C4675376}"/>
-              </a:ext>
-            </a:extLst>
-          </p:cNvPr>
-          <p:cNvCxnSpPr>
-            <a:cxnSpLocks/>
-            <a:stCxn id="17" idx="0"/>
-            <a:endCxn id="4" idx="2"/>
-          </p:cNvCxnSpPr>
-          <p:nvPr/>
-        </p:nvCxnSpPr>
-        <p:spPr>
-          <a:xfrm flipH="1" flipV="1">
-            <a:off x="6096000" y="2760366"/>
-            <a:ext cx="4155161" cy="1192994"/>
-          </a:xfrm>
-          <a:prstGeom prst="line">
-            <a:avLst/>
-          </a:prstGeom>
-          <a:ln w="19050" cap="flat" cmpd="sng" algn="ctr">
-            <a:solidFill>
-              <a:schemeClr val="accent1"/>
-            </a:solidFill>
-            <a:prstDash val="solid"/>
-            <a:round/>
-            <a:headEnd type="none" w="med" len="med"/>
-            <a:tailEnd type="none" w="med" len="med"/>
-          </a:ln>
-        </p:spPr>
-        <p:style>
-          <a:lnRef idx="0">
-            <a:scrgbClr r="0" g="0" b="0"/>
-          </a:lnRef>
-          <a:fillRef idx="0">
-            <a:scrgbClr r="0" g="0" b="0"/>
-          </a:fillRef>
-          <a:effectRef idx="0">
-            <a:scrgbClr r="0" g="0" b="0"/>
-          </a:effectRef>
-          <a:fontRef idx="minor">
-            <a:schemeClr val="tx1"/>
-          </a:fontRef>
-        </p:style>
-      </p:cxnSp>
-      <p:sp>
-        <p:nvSpPr>
-          <p:cNvPr id="2" name="TextBox 1">
-            <a:extLst>
-              <a:ext uri="{FF2B5EF4-FFF2-40B4-BE49-F238E27FC236}">
-                <a16:creationId xmlns:a16="http://schemas.microsoft.com/office/drawing/2014/main" id="{7745A920-7684-4CF8-06D5-E318D761DA50}"/>
+                <a16:creationId xmlns:a16="http://schemas.microsoft.com/office/drawing/2014/main" id="{C8725778-BB2F-3217-7DFA-3524179E705C}"/>
               </a:ext>
             </a:extLst>
           </p:cNvPr>
@@ -14110,25 +15844,15 @@
         </p:nvSpPr>
         <p:spPr>
           <a:xfrm>
-            <a:off x="4497161" y="3534032"/>
-            <a:ext cx="3197677" cy="369332"/>
+            <a:off x="7717536" y="4169664"/>
+            <a:ext cx="374904" cy="230832"/>
           </a:xfrm>
           <a:prstGeom prst="rect">
             <a:avLst/>
           </a:prstGeom>
           <a:solidFill>
-            <a:schemeClr val="accent1">
-              <a:lumMod val="20000"/>
-              <a:lumOff val="80000"/>
-            </a:schemeClr>
+            <a:schemeClr val="bg1"/>
           </a:solidFill>
-          <a:ln>
-            <a:solidFill>
-              <a:schemeClr val="bg1">
-                <a:lumMod val="50000"/>
-              </a:schemeClr>
-            </a:solidFill>
-          </a:ln>
         </p:spPr>
         <p:txBody>
           <a:bodyPr wrap="square" rtlCol="0">
@@ -14138,8 +15862,51 @@
           <a:p>
             <a:pPr algn="ctr"/>
             <a:r>
-              <a:rPr lang="en-CA" dirty="0"/>
-              <a:t>Presented at COMP 2025</a:t>
+              <a:rPr lang="en-CA" sz="900" dirty="0" err="1"/>
+              <a:t>dst</a:t>
+            </a:r>
+            <a:endParaRPr lang="en-CA" sz="900" dirty="0"/>
+          </a:p>
+        </p:txBody>
+      </p:sp>
+      <p:sp>
+        <p:nvSpPr>
+          <p:cNvPr id="9" name="TextBox 8">
+            <a:extLst>
+              <a:ext uri="{FF2B5EF4-FFF2-40B4-BE49-F238E27FC236}">
+                <a16:creationId xmlns:a16="http://schemas.microsoft.com/office/drawing/2014/main" id="{CC68D3C7-4AC7-6725-4E0C-81953EE78B57}"/>
+              </a:ext>
+            </a:extLst>
+          </p:cNvPr>
+          <p:cNvSpPr txBox="1"/>
+          <p:nvPr/>
+        </p:nvSpPr>
+        <p:spPr>
+          <a:xfrm>
+            <a:off x="6229768" y="5315346"/>
+            <a:ext cx="344768" cy="369332"/>
+          </a:xfrm>
+          <a:prstGeom prst="rect">
+            <a:avLst/>
+          </a:prstGeom>
+          <a:solidFill>
+            <a:schemeClr val="bg1"/>
+          </a:solidFill>
+        </p:spPr>
+        <p:txBody>
+          <a:bodyPr wrap="square" rtlCol="0">
+            <a:spAutoFit/>
+          </a:bodyPr>
+          <a:lstStyle/>
+          <a:p>
+            <a:pPr algn="ctr"/>
+            <a:r>
+              <a:rPr lang="en-CA" sz="900" dirty="0" err="1"/>
+              <a:t>dst</a:t>
+            </a:r>
+            <a:r>
+              <a:rPr lang="en-CA" sz="900" dirty="0"/>
+              <a:t> (s) </a:t>
             </a:r>
           </a:p>
         </p:txBody>
@@ -14147,7 +15914,173 @@
     </p:spTree>
     <p:extLst>
       <p:ext uri="{BB962C8B-B14F-4D97-AF65-F5344CB8AC3E}">
-        <p14:creationId xmlns:p14="http://schemas.microsoft.com/office/powerpoint/2010/main" val="255193766"/>
+        <p14:creationId xmlns:p14="http://schemas.microsoft.com/office/powerpoint/2010/main" val="3781331518"/>
+      </p:ext>
+    </p:extLst>
+  </p:cSld>
+  <p:clrMapOvr>
+    <a:masterClrMapping/>
+  </p:clrMapOvr>
+</p:sld>
+</file>
+
+<file path=ppt/slides/slide9.xml><?xml version="1.0" encoding="utf-8"?>
+<p:sld xmlns:a="http://schemas.openxmlformats.org/drawingml/2006/main" xmlns:r="http://schemas.openxmlformats.org/officeDocument/2006/relationships" xmlns:p="http://schemas.openxmlformats.org/presentationml/2006/main">
+  <p:cSld>
+    <p:spTree>
+      <p:nvGrpSpPr>
+        <p:cNvPr id="1" name=""/>
+        <p:cNvGrpSpPr/>
+        <p:nvPr/>
+      </p:nvGrpSpPr>
+      <p:grpSpPr>
+        <a:xfrm>
+          <a:off x="0" y="0"/>
+          <a:ext cx="0" cy="0"/>
+          <a:chOff x="0" y="0"/>
+          <a:chExt cx="0" cy="0"/>
+        </a:xfrm>
+      </p:grpSpPr>
+      <p:sp>
+        <p:nvSpPr>
+          <p:cNvPr id="2" name="Title 1">
+            <a:extLst>
+              <a:ext uri="{FF2B5EF4-FFF2-40B4-BE49-F238E27FC236}">
+                <a16:creationId xmlns:a16="http://schemas.microsoft.com/office/drawing/2014/main" id="{B5F71BD1-4E07-89AD-E95B-E2FCF3F3B4BD}"/>
+              </a:ext>
+            </a:extLst>
+          </p:cNvPr>
+          <p:cNvSpPr>
+            <a:spLocks noGrp="1"/>
+          </p:cNvSpPr>
+          <p:nvPr>
+            <p:ph type="title"/>
+          </p:nvPr>
+        </p:nvSpPr>
+        <p:spPr/>
+        <p:txBody>
+          <a:bodyPr/>
+          <a:lstStyle/>
+          <a:p>
+            <a:r>
+              <a:rPr lang="en-US" dirty="0"/>
+              <a:t>Experimental Set-Up: </a:t>
+            </a:r>
+            <a:r>
+              <a:rPr lang="en-US" sz="4000" dirty="0"/>
+              <a:t>Minimizing Uncertainty </a:t>
+            </a:r>
+            <a:endParaRPr lang="en-CA" dirty="0"/>
+          </a:p>
+        </p:txBody>
+      </p:sp>
+      <p:sp>
+        <p:nvSpPr>
+          <p:cNvPr id="3" name="Content Placeholder 2">
+            <a:extLst>
+              <a:ext uri="{FF2B5EF4-FFF2-40B4-BE49-F238E27FC236}">
+                <a16:creationId xmlns:a16="http://schemas.microsoft.com/office/drawing/2014/main" id="{97401A52-1201-D79F-3910-BF7CA817185E}"/>
+              </a:ext>
+            </a:extLst>
+          </p:cNvPr>
+          <p:cNvSpPr>
+            <a:spLocks noGrp="1"/>
+          </p:cNvSpPr>
+          <p:nvPr>
+            <p:ph idx="1"/>
+          </p:nvPr>
+        </p:nvSpPr>
+        <p:spPr/>
+        <p:txBody>
+          <a:bodyPr/>
+          <a:lstStyle/>
+          <a:p>
+            <a:pPr marL="0" indent="0">
+              <a:buNone/>
+            </a:pPr>
+            <a:r>
+              <a:rPr lang="en-US" dirty="0"/>
+              <a:t>Three sources of uncertainty:</a:t>
+            </a:r>
+            <a:endParaRPr lang="en-CA" dirty="0"/>
+          </a:p>
+          <a:p>
+            <a:pPr>
+              <a:buFont typeface="Arial" panose="020B0604020202020204" pitchFamily="34" charset="0"/>
+              <a:buChar char="•"/>
+            </a:pPr>
+            <a:r>
+              <a:rPr lang="en-CA" dirty="0"/>
+              <a:t>4D Dose Simulations</a:t>
+            </a:r>
+          </a:p>
+          <a:p>
+            <a:pPr marL="749808" lvl="1" indent="-457200">
+              <a:buFont typeface="+mj-lt"/>
+              <a:buAutoNum type="arabicPeriod"/>
+            </a:pPr>
+            <a:r>
+              <a:rPr lang="en-CA" dirty="0"/>
+              <a:t>Number of particles simulated (Stochastic)</a:t>
+            </a:r>
+          </a:p>
+          <a:p>
+            <a:pPr marL="932688" lvl="2" indent="-457200"/>
+            <a:r>
+              <a:rPr lang="en-CA" dirty="0"/>
+              <a:t>↑ the number of particles simulated = ↓ stochastic uncertainty = </a:t>
+            </a:r>
+            <a:r>
+              <a:rPr lang="en-CA" b="1" dirty="0"/>
+              <a:t>↑ simulation time </a:t>
+            </a:r>
+          </a:p>
+          <a:p>
+            <a:pPr marL="932688" lvl="2" indent="-457200"/>
+            <a:r>
+              <a:rPr lang="en-CA" b="1" dirty="0"/>
+              <a:t>Solution: </a:t>
+            </a:r>
+            <a:r>
+              <a:rPr lang="en-CA" dirty="0"/>
+              <a:t> Run each sweep of the Co-60 head as its own simulation with 2E11 particles. Each sweep takes ~20 hrs to calculate </a:t>
+            </a:r>
+          </a:p>
+        </p:txBody>
+      </p:sp>
+      <p:sp>
+        <p:nvSpPr>
+          <p:cNvPr id="4" name="Slide Number Placeholder 3">
+            <a:extLst>
+              <a:ext uri="{FF2B5EF4-FFF2-40B4-BE49-F238E27FC236}">
+                <a16:creationId xmlns:a16="http://schemas.microsoft.com/office/drawing/2014/main" id="{44F37BDC-2374-9C9A-6430-E0C96632AD0D}"/>
+              </a:ext>
+            </a:extLst>
+          </p:cNvPr>
+          <p:cNvSpPr>
+            <a:spLocks noGrp="1"/>
+          </p:cNvSpPr>
+          <p:nvPr>
+            <p:ph type="sldNum" sz="quarter" idx="12"/>
+          </p:nvPr>
+        </p:nvSpPr>
+        <p:spPr/>
+        <p:txBody>
+          <a:bodyPr/>
+          <a:lstStyle/>
+          <a:p>
+            <a:fld id="{4BAA6517-F367-4EB3-AFA6-036DD26A3111}" type="slidenum">
+              <a:rPr lang="en-CA" smtClean="0"/>
+              <a:t>9</a:t>
+            </a:fld>
+            <a:endParaRPr lang="en-CA"/>
+          </a:p>
+        </p:txBody>
+      </p:sp>
+    </p:spTree>
+    <p:extLst>
+      <p:ext uri="{BB962C8B-B14F-4D97-AF65-F5344CB8AC3E}">
+        <p14:creationId xmlns:p14="http://schemas.microsoft.com/office/powerpoint/2010/main" val="2965336870"/>
       </p:ext>
     </p:extLst>
   </p:cSld>
